--- a/docs/apresentacao.pptx
+++ b/docs/apresentacao.pptx
@@ -16,10 +16,9 @@
     <p:sldId id="264" r:id="rId10"/>
     <p:sldId id="265" r:id="rId11"/>
     <p:sldId id="266" r:id="rId12"/>
-    <p:sldId id="267" r:id="rId13"/>
   </p:sldIdLst>
   <p:notesMasterIdLst>
-    <p:notesMasterId r:id="rId14"/>
+    <p:notesMasterId r:id="rId13"/>
   </p:notesMasterIdLst>
   <p:sldSz cx="12192000" cy="6858000"/>
   <p:notesSz cx="6858000" cy="12192000"/>
@@ -713,94 +712,6 @@
             <a:fld id="{F7021451-1387-4CA6-816F-3879F97B5CBC}" type="slidenum">
               <a:rPr lang="en-US"/>
               <a:t>11</a:t>
-            </a:fld>
-            <a:endParaRPr lang="en-US"/>
-          </a:p>
-        </p:txBody>
-      </p:sp>
-    </p:spTree>
-    <p:extLst>
-      <p:ext uri="{BB962C8B-B14F-4D97-AF65-F5344CB8AC3E}">
-        <p14:creationId xmlns:p14="http://schemas.microsoft.com/office/powerpoint/2010/main" val="1024086991"/>
-      </p:ext>
-    </p:extLst>
-  </p:cSld>
-  <p:clrMapOvr>
-    <a:masterClrMapping/>
-  </p:clrMapOvr>
-</p:notes>
-</file>
-
-<file path=ppt/notesSlides/notesSlide12.xml><?xml version="1.0" encoding="utf-8"?>
-<p:notes xmlns:a="http://schemas.openxmlformats.org/drawingml/2006/main" xmlns:r="http://schemas.openxmlformats.org/officeDocument/2006/relationships" xmlns:p="http://schemas.openxmlformats.org/presentationml/2006/main">
-  <p:cSld>
-    <p:spTree>
-      <p:nvGrpSpPr>
-        <p:cNvPr id="1" name=""/>
-        <p:cNvGrpSpPr/>
-        <p:nvPr/>
-      </p:nvGrpSpPr>
-      <p:grpSpPr>
-        <a:xfrm>
-          <a:off x="0" y="0"/>
-          <a:ext cx="0" cy="0"/>
-          <a:chOff x="0" y="0"/>
-          <a:chExt cx="0" cy="0"/>
-        </a:xfrm>
-      </p:grpSpPr>
-      <p:sp>
-        <p:nvSpPr>
-          <p:cNvPr id="2" name="Slide Image Placeholder 1"/>
-          <p:cNvSpPr>
-            <a:spLocks noGrp="1" noRot="1" noChangeAspect="1"/>
-          </p:cNvSpPr>
-          <p:nvPr>
-            <p:ph type="sldImg"/>
-          </p:nvPr>
-        </p:nvSpPr>
-        <p:spPr/>
-      </p:sp>
-      <p:sp>
-        <p:nvSpPr>
-          <p:cNvPr id="3" name="Notes Placeholder 2"/>
-          <p:cNvSpPr>
-            <a:spLocks noGrp="1"/>
-          </p:cNvSpPr>
-          <p:nvPr>
-            <p:ph type="body" idx="1"/>
-          </p:nvPr>
-        </p:nvSpPr>
-        <p:spPr/>
-        <p:txBody>
-          <a:bodyPr/>
-          <a:lstStyle/>
-          <a:p>
-            <a:r>
-              <a:rPr lang="en-US" dirty="0"/>
-              <a:t/>
-            </a:r>
-            <a:endParaRPr lang="en-US" dirty="0"/>
-          </a:p>
-        </p:txBody>
-      </p:sp>
-      <p:sp>
-        <p:nvSpPr>
-          <p:cNvPr id="4" name="Slide Number Placeholder 3"/>
-          <p:cNvSpPr>
-            <a:spLocks noGrp="1"/>
-          </p:cNvSpPr>
-          <p:nvPr>
-            <p:ph type="sldNum" sz="quarter" idx="10"/>
-          </p:nvPr>
-        </p:nvSpPr>
-        <p:spPr/>
-        <p:txBody>
-          <a:bodyPr/>
-          <a:lstStyle/>
-          <a:p>
-            <a:fld id="{F7021451-1387-4CA6-816F-3879F97B5CBC}" type="slidenum">
-              <a:rPr lang="en-US"/>
-              <a:t>12</a:t>
             </a:fld>
             <a:endParaRPr lang="en-US"/>
           </a:p>
@@ -2155,7 +2066,7 @@
                 <a:ea typeface="Calibri" pitchFamily="34" charset="-122"/>
                 <a:cs typeface="Calibri" pitchFamily="34" charset="-120"/>
               </a:rPr>
-              <a:t>INSIGHT DE POLÍTICA</a:t>
+              <a:t>CONCLUSÃO</a:t>
             </a:r>
             <a:endParaRPr lang="en-US" sz="1200" dirty="0"/>
           </a:p>
@@ -2186,7 +2097,7 @@
               <a:buNone/>
             </a:pPr>
             <a:r>
-              <a:rPr lang="en-US" sz="3400" b="1" dirty="0">
+              <a:rPr lang="en-US" sz="3200" b="1" dirty="0">
                 <a:solidFill>
                   <a:srgbClr val="1A2B28"/>
                 </a:solidFill>
@@ -2194,97 +2105,131 @@
                 <a:ea typeface="Calibri" pitchFamily="34" charset="-122"/>
                 <a:cs typeface="Calibri" pitchFamily="34" charset="-120"/>
               </a:rPr>
-              <a:t>Mesma renda, vinte e sete pontos de diferença</a:t>
-            </a:r>
-            <a:endParaRPr lang="en-US" sz="3400" dirty="0"/>
-          </a:p>
-        </p:txBody>
-      </p:sp>
-      <p:sp>
-        <p:nvSpPr>
-          <p:cNvPr id="4" name="Text 2"/>
-          <p:cNvSpPr txBox="1"/>
-          <p:nvPr/>
-        </p:nvSpPr>
-        <p:spPr>
-          <a:xfrm>
-            <a:off x="548640" y="1554480"/>
-            <a:ext cx="6309360" cy="4023360"/>
-          </a:xfrm>
-          <a:prstGeom prst="rect">
-            <a:avLst/>
-          </a:prstGeom>
-          <a:noFill/>
-          <a:ln/>
-        </p:spPr>
-        <p:txBody>
-          <a:bodyPr wrap="square" lIns="0" tIns="0" rIns="0" bIns="0" rtlCol="0" anchor="t"/>
-          <a:lstStyle/>
-          <a:p>
-            <a:pPr indent="0" marL="0">
-              <a:lnSpc>
-                <a:spcPct val="130000"/>
-              </a:lnSpc>
-              <a:buNone/>
-            </a:pPr>
-            <a:r>
-              <a:rPr lang="en-US" sz="1600" dirty="0">
-                <a:solidFill>
-                  <a:srgbClr val="1A2B28"/>
-                </a:solidFill>
-                <a:latin typeface="Calibri" pitchFamily="34" charset="0"/>
-                <a:ea typeface="Calibri" pitchFamily="34" charset="-122"/>
-                <a:cs typeface="Calibri" pitchFamily="34" charset="-120"/>
-              </a:rPr>
-              <a:t>Quatro perfis de município. Dois têm o mesmo PIB per capita, R$ 16,6 mil, e taxas de 47,3% e 74,0%.</a:t>
-            </a:r>
-            <a:endParaRPr lang="en-US" sz="1600" dirty="0"/>
-          </a:p>
-          <a:p>
-            <a:pPr indent="0" marL="0">
-              <a:lnSpc>
-                <a:spcPct val="130000"/>
-              </a:lnSpc>
-              <a:buNone/>
-            </a:pPr>
-            <a:endParaRPr lang="en-US" sz="1600" dirty="0"/>
-          </a:p>
-          <a:p>
-            <a:pPr indent="0" marL="0">
-              <a:lnSpc>
-                <a:spcPct val="130000"/>
-              </a:lnSpc>
-              <a:buNone/>
-            </a:pPr>
-            <a:r>
-              <a:rPr lang="en-US" sz="1600" dirty="0">
-                <a:solidFill>
-                  <a:srgbClr val="1A2B28"/>
-                </a:solidFill>
-                <a:latin typeface="Calibri" pitchFamily="34" charset="0"/>
-                <a:ea typeface="Calibri" pitchFamily="34" charset="-122"/>
-                <a:cs typeface="Calibri" pitchFamily="34" charset="-120"/>
-              </a:rPr>
-              <a:t>São 1.351 municípios de baixa renda acima da média nacional. A renda não determina o resultado.</a:t>
-            </a:r>
-            <a:endParaRPr lang="en-US" sz="1600" dirty="0"/>
-          </a:p>
-        </p:txBody>
-      </p:sp>
-      <p:sp>
-        <p:nvSpPr>
-          <p:cNvPr id="5" name="Shape 3"/>
+              <a:t>As cinco perguntas, respondidas</a:t>
+            </a:r>
+            <a:endParaRPr lang="en-US" sz="3200" dirty="0"/>
+          </a:p>
+        </p:txBody>
+      </p:sp>
+      <p:sp>
+        <p:nvSpPr>
+          <p:cNvPr id="4" name="Shape 2"/>
           <p:cNvSpPr/>
           <p:nvPr/>
         </p:nvSpPr>
         <p:spPr>
           <a:xfrm>
-            <a:off x="7406640" y="1737360"/>
-            <a:ext cx="2011680" cy="1828800"/>
+            <a:off x="548640" y="1600200"/>
+            <a:ext cx="11064240" cy="841248"/>
           </a:xfrm>
           <a:prstGeom prst="roundRect">
             <a:avLst>
-              <a:gd name="adj" fmla="val 4000"/>
+              <a:gd name="adj" fmla="val 6522"/>
+            </a:avLst>
+          </a:prstGeom>
+          <a:solidFill>
+            <a:srgbClr val="EDF3F0"/>
+          </a:solidFill>
+          <a:ln w="12700">
+            <a:solidFill>
+              <a:srgbClr val="F2F6F4"/>
+            </a:solidFill>
+            <a:prstDash val="solid"/>
+          </a:ln>
+        </p:spPr>
+      </p:sp>
+      <p:sp>
+        <p:nvSpPr>
+          <p:cNvPr id="5" name="Text 3"/>
+          <p:cNvSpPr txBox="1"/>
+          <p:nvPr/>
+        </p:nvSpPr>
+        <p:spPr>
+          <a:xfrm>
+            <a:off x="777240" y="1682496"/>
+            <a:ext cx="4572000" cy="676656"/>
+          </a:xfrm>
+          <a:prstGeom prst="rect">
+            <a:avLst/>
+          </a:prstGeom>
+          <a:noFill/>
+          <a:ln/>
+        </p:spPr>
+        <p:txBody>
+          <a:bodyPr wrap="square" lIns="0" tIns="0" rIns="0" bIns="0" rtlCol="0" anchor="ctr"/>
+          <a:lstStyle/>
+          <a:p>
+            <a:pPr indent="0" marL="0">
+              <a:buNone/>
+            </a:pPr>
+            <a:r>
+              <a:rPr lang="en-US" sz="1350" b="1" dirty="0">
+                <a:solidFill>
+                  <a:srgbClr val="1B6B5A"/>
+                </a:solidFill>
+                <a:latin typeface="Calibri" pitchFamily="34" charset="0"/>
+                <a:ea typeface="Calibri" pitchFamily="34" charset="-122"/>
+                <a:cs typeface="Calibri" pitchFamily="34" charset="-120"/>
+              </a:rPr>
+              <a:t>Quais fatores mais impactam a alfabetização?</a:t>
+            </a:r>
+            <a:endParaRPr lang="en-US" sz="1350" dirty="0"/>
+          </a:p>
+        </p:txBody>
+      </p:sp>
+      <p:sp>
+        <p:nvSpPr>
+          <p:cNvPr id="6" name="Text 4"/>
+          <p:cNvSpPr txBox="1"/>
+          <p:nvPr/>
+        </p:nvSpPr>
+        <p:spPr>
+          <a:xfrm>
+            <a:off x="5577840" y="1682496"/>
+            <a:ext cx="5852160" cy="676656"/>
+          </a:xfrm>
+          <a:prstGeom prst="rect">
+            <a:avLst/>
+          </a:prstGeom>
+          <a:noFill/>
+          <a:ln/>
+        </p:spPr>
+        <p:txBody>
+          <a:bodyPr wrap="square" lIns="0" tIns="0" rIns="0" bIns="0" rtlCol="0" anchor="ctr"/>
+          <a:lstStyle/>
+          <a:p>
+            <a:pPr indent="0" marL="0">
+              <a:buNone/>
+            </a:pPr>
+            <a:r>
+              <a:rPr lang="en-US" sz="1300" dirty="0">
+                <a:solidFill>
+                  <a:srgbClr val="1A2B28"/>
+                </a:solidFill>
+                <a:latin typeface="Calibri" pitchFamily="34" charset="0"/>
+                <a:ea typeface="Calibri" pitchFamily="34" charset="-122"/>
+                <a:cs typeface="Calibri" pitchFamily="34" charset="-120"/>
+              </a:rPr>
+              <a:t>A história do município, com o dobro do peso da segunda variável</a:t>
+            </a:r>
+            <a:endParaRPr lang="en-US" sz="1300" dirty="0"/>
+          </a:p>
+        </p:txBody>
+      </p:sp>
+      <p:sp>
+        <p:nvSpPr>
+          <p:cNvPr id="7" name="Shape 5"/>
+          <p:cNvSpPr/>
+          <p:nvPr/>
+        </p:nvSpPr>
+        <p:spPr>
+          <a:xfrm>
+            <a:off x="548640" y="2514600"/>
+            <a:ext cx="11064240" cy="841248"/>
+          </a:xfrm>
+          <a:prstGeom prst="roundRect">
+            <a:avLst>
+              <a:gd name="adj" fmla="val 6522"/>
             </a:avLst>
           </a:prstGeom>
           <a:solidFill>
@@ -2300,14 +2245,14 @@
       </p:sp>
       <p:sp>
         <p:nvSpPr>
-          <p:cNvPr id="6" name="Text 4"/>
-          <p:cNvSpPr txBox="1"/>
-          <p:nvPr/>
-        </p:nvSpPr>
-        <p:spPr>
-          <a:xfrm>
-            <a:off x="7543800" y="1901952"/>
-            <a:ext cx="1737360" cy="868680"/>
+          <p:cNvPr id="8" name="Text 6"/>
+          <p:cNvSpPr txBox="1"/>
+          <p:nvPr/>
+        </p:nvSpPr>
+        <p:spPr>
+          <a:xfrm>
+            <a:off x="777240" y="2596896"/>
+            <a:ext cx="4572000" cy="676656"/>
           </a:xfrm>
           <a:prstGeom prst="rect">
             <a:avLst/>
@@ -2323,30 +2268,30 @@
               <a:buNone/>
             </a:pPr>
             <a:r>
-              <a:rPr lang="en-US" sz="3200" b="1" dirty="0">
-                <a:solidFill>
-                  <a:srgbClr val="C0504D"/>
-                </a:solidFill>
-                <a:latin typeface="Calibri" pitchFamily="34" charset="0"/>
-                <a:ea typeface="Calibri" pitchFamily="34" charset="-122"/>
-                <a:cs typeface="Calibri" pitchFamily="34" charset="-120"/>
-              </a:rPr>
-              <a:t>47,3%</a:t>
-            </a:r>
-            <a:endParaRPr lang="en-US" sz="3200" dirty="0"/>
-          </a:p>
-        </p:txBody>
-      </p:sp>
-      <p:sp>
-        <p:nvSpPr>
-          <p:cNvPr id="7" name="Text 5"/>
-          <p:cNvSpPr txBox="1"/>
-          <p:nvPr/>
-        </p:nvSpPr>
-        <p:spPr>
-          <a:xfrm>
-            <a:off x="7543800" y="2697480"/>
-            <a:ext cx="1737360" cy="640080"/>
+              <a:rPr lang="en-US" sz="1350" b="1" dirty="0">
+                <a:solidFill>
+                  <a:srgbClr val="1B6B5A"/>
+                </a:solidFill>
+                <a:latin typeface="Calibri" pitchFamily="34" charset="0"/>
+                <a:ea typeface="Calibri" pitchFamily="34" charset="-122"/>
+                <a:cs typeface="Calibri" pitchFamily="34" charset="-120"/>
+              </a:rPr>
+              <a:t>Quais variáveis influenciam mais o modelo?</a:t>
+            </a:r>
+            <a:endParaRPr lang="en-US" sz="1350" dirty="0"/>
+          </a:p>
+        </p:txBody>
+      </p:sp>
+      <p:sp>
+        <p:nvSpPr>
+          <p:cNvPr id="9" name="Text 7"/>
+          <p:cNvSpPr txBox="1"/>
+          <p:nvPr/>
+        </p:nvSpPr>
+        <p:spPr>
+          <a:xfrm>
+            <a:off x="5577840" y="2596896"/>
+            <a:ext cx="5852160" cy="676656"/>
           </a:xfrm>
           <a:prstGeom prst="rect">
             <a:avLst/>
@@ -2359,60 +2304,142 @@
           <a:lstStyle/>
           <a:p>
             <a:pPr indent="0" marL="0">
-              <a:lnSpc>
-                <a:spcPct val="110000"/>
-              </a:lnSpc>
-              <a:buNone/>
-            </a:pPr>
-            <a:r>
-              <a:rPr lang="en-US" sz="1150" dirty="0">
-                <a:solidFill>
-                  <a:srgbClr val="6B7C77"/>
-                </a:solidFill>
-                <a:latin typeface="Calibri" pitchFamily="34" charset="0"/>
-                <a:ea typeface="Calibri" pitchFamily="34" charset="-122"/>
-                <a:cs typeface="Calibri" pitchFamily="34" charset="-120"/>
-              </a:rPr>
-              <a:t>baixa renda,</a:t>
-            </a:r>
-            <a:endParaRPr lang="en-US" sz="1150" dirty="0"/>
-          </a:p>
-          <a:p>
-            <a:pPr indent="0" marL="0">
-              <a:lnSpc>
-                <a:spcPct val="110000"/>
-              </a:lnSpc>
-              <a:buNone/>
-            </a:pPr>
-            <a:r>
-              <a:rPr lang="en-US" sz="1150" dirty="0">
-                <a:solidFill>
-                  <a:srgbClr val="6B7C77"/>
-                </a:solidFill>
-                <a:latin typeface="Calibri" pitchFamily="34" charset="0"/>
-                <a:ea typeface="Calibri" pitchFamily="34" charset="-122"/>
-                <a:cs typeface="Calibri" pitchFamily="34" charset="-120"/>
-              </a:rPr>
-              <a:t>desempenho crítico</a:t>
-            </a:r>
-            <a:endParaRPr lang="en-US" sz="1150" dirty="0"/>
-          </a:p>
-        </p:txBody>
-      </p:sp>
-      <p:sp>
-        <p:nvSpPr>
-          <p:cNvPr id="8" name="Shape 6"/>
+              <a:buNone/>
+            </a:pPr>
+            <a:r>
+              <a:rPr lang="en-US" sz="1300" dirty="0">
+                <a:solidFill>
+                  <a:srgbClr val="1A2B28"/>
+                </a:solidFill>
+                <a:latin typeface="Calibri" pitchFamily="34" charset="0"/>
+                <a:ea typeface="Calibri" pitchFamily="34" charset="-122"/>
+                <a:cs typeface="Calibri" pitchFamily="34" charset="-120"/>
+              </a:rPr>
+              <a:t>Taxa histórica, UF e meta municipal; as cinco primeiras são territoriais</a:t>
+            </a:r>
+            <a:endParaRPr lang="en-US" sz="1300" dirty="0"/>
+          </a:p>
+        </p:txBody>
+      </p:sp>
+      <p:sp>
+        <p:nvSpPr>
+          <p:cNvPr id="10" name="Shape 8"/>
           <p:cNvSpPr/>
           <p:nvPr/>
         </p:nvSpPr>
         <p:spPr>
           <a:xfrm>
-            <a:off x="9601200" y="1737360"/>
-            <a:ext cx="2011680" cy="1828800"/>
+            <a:off x="548640" y="3429000"/>
+            <a:ext cx="11064240" cy="841248"/>
           </a:xfrm>
           <a:prstGeom prst="roundRect">
             <a:avLst>
-              <a:gd name="adj" fmla="val 4000"/>
+              <a:gd name="adj" fmla="val 6522"/>
+            </a:avLst>
+          </a:prstGeom>
+          <a:solidFill>
+            <a:srgbClr val="EDF3F0"/>
+          </a:solidFill>
+          <a:ln w="12700">
+            <a:solidFill>
+              <a:srgbClr val="F2F6F4"/>
+            </a:solidFill>
+            <a:prstDash val="solid"/>
+          </a:ln>
+        </p:spPr>
+      </p:sp>
+      <p:sp>
+        <p:nvSpPr>
+          <p:cNvPr id="11" name="Text 9"/>
+          <p:cNvSpPr txBox="1"/>
+          <p:nvPr/>
+        </p:nvSpPr>
+        <p:spPr>
+          <a:xfrm>
+            <a:off x="777240" y="3511296"/>
+            <a:ext cx="4572000" cy="676656"/>
+          </a:xfrm>
+          <a:prstGeom prst="rect">
+            <a:avLst/>
+          </a:prstGeom>
+          <a:noFill/>
+          <a:ln/>
+        </p:spPr>
+        <p:txBody>
+          <a:bodyPr wrap="square" lIns="0" tIns="0" rIns="0" bIns="0" rtlCol="0" anchor="ctr"/>
+          <a:lstStyle/>
+          <a:p>
+            <a:pPr indent="0" marL="0">
+              <a:buNone/>
+            </a:pPr>
+            <a:r>
+              <a:rPr lang="en-US" sz="1350" b="1" dirty="0">
+                <a:solidFill>
+                  <a:srgbClr val="1B6B5A"/>
+                </a:solidFill>
+                <a:latin typeface="Calibri" pitchFamily="34" charset="0"/>
+                <a:ea typeface="Calibri" pitchFamily="34" charset="-122"/>
+                <a:cs typeface="Calibri" pitchFamily="34" charset="-120"/>
+              </a:rPr>
+              <a:t>Quais municípios apresentam maior risco?</a:t>
+            </a:r>
+            <a:endParaRPr lang="en-US" sz="1350" dirty="0"/>
+          </a:p>
+        </p:txBody>
+      </p:sp>
+      <p:sp>
+        <p:nvSpPr>
+          <p:cNvPr id="12" name="Text 10"/>
+          <p:cNvSpPr txBox="1"/>
+          <p:nvPr/>
+        </p:nvSpPr>
+        <p:spPr>
+          <a:xfrm>
+            <a:off x="5577840" y="3511296"/>
+            <a:ext cx="5852160" cy="676656"/>
+          </a:xfrm>
+          <a:prstGeom prst="rect">
+            <a:avLst/>
+          </a:prstGeom>
+          <a:noFill/>
+          <a:ln/>
+        </p:spPr>
+        <p:txBody>
+          <a:bodyPr wrap="square" lIns="0" tIns="0" rIns="0" bIns="0" rtlCol="0" anchor="ctr"/>
+          <a:lstStyle/>
+          <a:p>
+            <a:pPr indent="0" marL="0">
+              <a:buNone/>
+            </a:pPr>
+            <a:r>
+              <a:rPr lang="en-US" sz="1300" dirty="0">
+                <a:solidFill>
+                  <a:srgbClr val="1A2B28"/>
+                </a:solidFill>
+                <a:latin typeface="Calibri" pitchFamily="34" charset="0"/>
+                <a:ea typeface="Calibri" pitchFamily="34" charset="-122"/>
+                <a:cs typeface="Calibri" pitchFamily="34" charset="-120"/>
+              </a:rPr>
+              <a:t>1.028 no quinto mais crítico, 690 deles no Nordeste</a:t>
+            </a:r>
+            <a:endParaRPr lang="en-US" sz="1300" dirty="0"/>
+          </a:p>
+        </p:txBody>
+      </p:sp>
+      <p:sp>
+        <p:nvSpPr>
+          <p:cNvPr id="13" name="Shape 11"/>
+          <p:cNvSpPr/>
+          <p:nvPr/>
+        </p:nvSpPr>
+        <p:spPr>
+          <a:xfrm>
+            <a:off x="548640" y="4343400"/>
+            <a:ext cx="11064240" cy="841248"/>
+          </a:xfrm>
+          <a:prstGeom prst="roundRect">
+            <a:avLst>
+              <a:gd name="adj" fmla="val 6522"/>
             </a:avLst>
           </a:prstGeom>
           <a:solidFill>
@@ -2428,14 +2455,14 @@
       </p:sp>
       <p:sp>
         <p:nvSpPr>
-          <p:cNvPr id="9" name="Text 7"/>
-          <p:cNvSpPr txBox="1"/>
-          <p:nvPr/>
-        </p:nvSpPr>
-        <p:spPr>
-          <a:xfrm>
-            <a:off x="9738360" y="1901952"/>
-            <a:ext cx="1737360" cy="868680"/>
+          <p:cNvPr id="14" name="Text 12"/>
+          <p:cNvSpPr txBox="1"/>
+          <p:nvPr/>
+        </p:nvSpPr>
+        <p:spPr>
+          <a:xfrm>
+            <a:off x="777240" y="4425696"/>
+            <a:ext cx="4572000" cy="676656"/>
           </a:xfrm>
           <a:prstGeom prst="rect">
             <a:avLst/>
@@ -2451,7 +2478,7 @@
               <a:buNone/>
             </a:pPr>
             <a:r>
-              <a:rPr lang="en-US" sz="3200" b="1" dirty="0">
+              <a:rPr lang="en-US" sz="1350" b="1" dirty="0">
                 <a:solidFill>
                   <a:srgbClr val="1B6B5A"/>
                 </a:solidFill>
@@ -2459,22 +2486,22 @@
                 <a:ea typeface="Calibri" pitchFamily="34" charset="-122"/>
                 <a:cs typeface="Calibri" pitchFamily="34" charset="-120"/>
               </a:rPr>
-              <a:t>74,0%</a:t>
-            </a:r>
-            <a:endParaRPr lang="en-US" sz="3200" dirty="0"/>
-          </a:p>
-        </p:txBody>
-      </p:sp>
-      <p:sp>
-        <p:nvSpPr>
-          <p:cNvPr id="10" name="Text 8"/>
-          <p:cNvSpPr txBox="1"/>
-          <p:nvPr/>
-        </p:nvSpPr>
-        <p:spPr>
-          <a:xfrm>
-            <a:off x="9738360" y="2697480"/>
-            <a:ext cx="1737360" cy="640080"/>
+              <a:t>Quais regiões têm padrões semelhantes?</a:t>
+            </a:r>
+            <a:endParaRPr lang="en-US" sz="1350" dirty="0"/>
+          </a:p>
+        </p:txBody>
+      </p:sp>
+      <p:sp>
+        <p:nvSpPr>
+          <p:cNvPr id="15" name="Text 13"/>
+          <p:cNvSpPr txBox="1"/>
+          <p:nvPr/>
+        </p:nvSpPr>
+        <p:spPr>
+          <a:xfrm>
+            <a:off x="5577840" y="4425696"/>
+            <a:ext cx="5852160" cy="676656"/>
           </a:xfrm>
           <a:prstGeom prst="rect">
             <a:avLst/>
@@ -2487,64 +2514,41 @@
           <a:lstStyle/>
           <a:p>
             <a:pPr indent="0" marL="0">
-              <a:lnSpc>
-                <a:spcPct val="110000"/>
-              </a:lnSpc>
-              <a:buNone/>
-            </a:pPr>
-            <a:r>
-              <a:rPr lang="en-US" sz="1150" dirty="0">
-                <a:solidFill>
-                  <a:srgbClr val="6B7C77"/>
-                </a:solidFill>
-                <a:latin typeface="Calibri" pitchFamily="34" charset="0"/>
-                <a:ea typeface="Calibri" pitchFamily="34" charset="-122"/>
-                <a:cs typeface="Calibri" pitchFamily="34" charset="-120"/>
-              </a:rPr>
-              <a:t>baixa renda,</a:t>
-            </a:r>
-            <a:endParaRPr lang="en-US" sz="1150" dirty="0"/>
-          </a:p>
-          <a:p>
-            <a:pPr indent="0" marL="0">
-              <a:lnSpc>
-                <a:spcPct val="110000"/>
-              </a:lnSpc>
-              <a:buNone/>
-            </a:pPr>
-            <a:r>
-              <a:rPr lang="en-US" sz="1150" dirty="0">
-                <a:solidFill>
-                  <a:srgbClr val="6B7C77"/>
-                </a:solidFill>
-                <a:latin typeface="Calibri" pitchFamily="34" charset="0"/>
-                <a:ea typeface="Calibri" pitchFamily="34" charset="-122"/>
-                <a:cs typeface="Calibri" pitchFamily="34" charset="-120"/>
-              </a:rPr>
-              <a:t>bom desempenho</a:t>
-            </a:r>
-            <a:endParaRPr lang="en-US" sz="1150" dirty="0"/>
-          </a:p>
-        </p:txBody>
-      </p:sp>
-      <p:sp>
-        <p:nvSpPr>
-          <p:cNvPr id="11" name="Shape 9"/>
+              <a:buNone/>
+            </a:pPr>
+            <a:r>
+              <a:rPr lang="en-US" sz="1300" dirty="0">
+                <a:solidFill>
+                  <a:srgbClr val="1A2B28"/>
+                </a:solidFill>
+                <a:latin typeface="Calibri" pitchFamily="34" charset="0"/>
+                <a:ea typeface="Calibri" pitchFamily="34" charset="-122"/>
+                <a:cs typeface="Calibri" pitchFamily="34" charset="-120"/>
+              </a:rPr>
+              <a:t>Quatro perfis; dois com a mesma renda e 27 pontos de diferença</a:t>
+            </a:r>
+            <a:endParaRPr lang="en-US" sz="1300" dirty="0"/>
+          </a:p>
+        </p:txBody>
+      </p:sp>
+      <p:sp>
+        <p:nvSpPr>
+          <p:cNvPr id="16" name="Shape 14"/>
           <p:cNvSpPr/>
           <p:nvPr/>
         </p:nvSpPr>
         <p:spPr>
           <a:xfrm>
-            <a:off x="7406640" y="3840480"/>
-            <a:ext cx="4206240" cy="1554480"/>
+            <a:off x="548640" y="5257800"/>
+            <a:ext cx="11064240" cy="841248"/>
           </a:xfrm>
           <a:prstGeom prst="roundRect">
             <a:avLst>
-              <a:gd name="adj" fmla="val 4706"/>
+              <a:gd name="adj" fmla="val 6522"/>
             </a:avLst>
           </a:prstGeom>
           <a:solidFill>
-            <a:srgbClr val="F2F6F4"/>
+            <a:srgbClr val="EDF3F0"/>
           </a:solidFill>
           <a:ln w="12700">
             <a:solidFill>
@@ -2556,14 +2560,14 @@
       </p:sp>
       <p:sp>
         <p:nvSpPr>
-          <p:cNvPr id="12" name="Text 10"/>
-          <p:cNvSpPr txBox="1"/>
-          <p:nvPr/>
-        </p:nvSpPr>
-        <p:spPr>
-          <a:xfrm>
-            <a:off x="7543800" y="4005072"/>
-            <a:ext cx="3931920" cy="868680"/>
+          <p:cNvPr id="17" name="Text 15"/>
+          <p:cNvSpPr txBox="1"/>
+          <p:nvPr/>
+        </p:nvSpPr>
+        <p:spPr>
+          <a:xfrm>
+            <a:off x="777240" y="5340096"/>
+            <a:ext cx="4572000" cy="676656"/>
           </a:xfrm>
           <a:prstGeom prst="rect">
             <a:avLst/>
@@ -2579,30 +2583,30 @@
               <a:buNone/>
             </a:pPr>
             <a:r>
-              <a:rPr lang="en-US" sz="3200" b="1" dirty="0">
-                <a:solidFill>
-                  <a:srgbClr val="E8A33D"/>
-                </a:solidFill>
-                <a:latin typeface="Calibri" pitchFamily="34" charset="0"/>
-                <a:ea typeface="Calibri" pitchFamily="34" charset="-122"/>
-                <a:cs typeface="Calibri" pitchFamily="34" charset="-120"/>
-              </a:rPr>
-              <a:t>R$ 16,6 mil</a:t>
-            </a:r>
-            <a:endParaRPr lang="en-US" sz="3200" dirty="0"/>
-          </a:p>
-        </p:txBody>
-      </p:sp>
-      <p:sp>
-        <p:nvSpPr>
-          <p:cNvPr id="13" name="Text 11"/>
-          <p:cNvSpPr txBox="1"/>
-          <p:nvPr/>
-        </p:nvSpPr>
-        <p:spPr>
-          <a:xfrm>
-            <a:off x="7543800" y="4800600"/>
-            <a:ext cx="3931920" cy="640080"/>
+              <a:rPr lang="en-US" sz="1350" b="1" dirty="0">
+                <a:solidFill>
+                  <a:srgbClr val="1B6B5A"/>
+                </a:solidFill>
+                <a:latin typeface="Calibri" pitchFamily="34" charset="0"/>
+                <a:ea typeface="Calibri" pitchFamily="34" charset="-122"/>
+                <a:cs typeface="Calibri" pitchFamily="34" charset="-120"/>
+              </a:rPr>
+              <a:t>Como prever quem não atinge a meta de 2030?</a:t>
+            </a:r>
+            <a:endParaRPr lang="en-US" sz="1350" dirty="0"/>
+          </a:p>
+        </p:txBody>
+      </p:sp>
+      <p:sp>
+        <p:nvSpPr>
+          <p:cNvPr id="18" name="Text 16"/>
+          <p:cNvSpPr txBox="1"/>
+          <p:nvPr/>
+        </p:nvSpPr>
+        <p:spPr>
+          <a:xfrm>
+            <a:off x="5577840" y="5340096"/>
+            <a:ext cx="5852160" cy="676656"/>
           </a:xfrm>
           <a:prstGeom prst="rect">
             <a:avLst/>
@@ -2615,23 +2619,20 @@
           <a:lstStyle/>
           <a:p>
             <a:pPr indent="0" marL="0">
-              <a:lnSpc>
-                <a:spcPct val="110000"/>
-              </a:lnSpc>
-              <a:buNone/>
-            </a:pPr>
-            <a:r>
-              <a:rPr lang="en-US" sz="1150" dirty="0">
-                <a:solidFill>
-                  <a:srgbClr val="6B7C77"/>
-                </a:solidFill>
-                <a:latin typeface="Calibri" pitchFamily="34" charset="0"/>
-                <a:ea typeface="Calibri" pitchFamily="34" charset="-122"/>
-                <a:cs typeface="Calibri" pitchFamily="34" charset="-120"/>
-              </a:rPr>
-              <a:t>o mesmo PIB per capita nos dois grupos</a:t>
-            </a:r>
-            <a:endParaRPr lang="en-US" sz="1150" dirty="0"/>
+              <a:buNone/>
+            </a:pPr>
+            <a:r>
+              <a:rPr lang="en-US" sz="1300" dirty="0">
+                <a:solidFill>
+                  <a:srgbClr val="1A2B28"/>
+                </a:solidFill>
+                <a:latin typeface="Calibri" pitchFamily="34" charset="0"/>
+                <a:ea typeface="Calibri" pitchFamily="34" charset="-122"/>
+                <a:cs typeface="Calibri" pitchFamily="34" charset="-120"/>
+              </a:rPr>
+              <a:t>O país avança 2,68 p.p./ano e a meta pede 2,76</a:t>
+            </a:r>
+            <a:endParaRPr lang="en-US" sz="1300" dirty="0"/>
           </a:p>
         </p:txBody>
       </p:sp>
@@ -2646,533 +2647,6 @@
 <file path=ppt/slides/slide11.xml><?xml version="1.0" encoding="utf-8"?>
 <p:sld xmlns:a="http://schemas.openxmlformats.org/drawingml/2006/main" xmlns:r="http://schemas.openxmlformats.org/officeDocument/2006/relationships" xmlns:p="http://schemas.openxmlformats.org/presentationml/2006/main">
   <p:cSld name="Slide 11">
-    <p:spTree>
-      <p:nvGrpSpPr>
-        <p:cNvPr id="1" name=""/>
-        <p:cNvGrpSpPr/>
-        <p:nvPr/>
-      </p:nvGrpSpPr>
-      <p:grpSpPr>
-        <a:xfrm>
-          <a:off x="0" y="0"/>
-          <a:ext cx="0" cy="0"/>
-          <a:chOff x="0" y="0"/>
-          <a:chExt cx="0" cy="0"/>
-        </a:xfrm>
-      </p:grpSpPr>
-      <p:sp>
-        <p:nvSpPr>
-          <p:cNvPr id="2" name="Text 0"/>
-          <p:cNvSpPr txBox="1"/>
-          <p:nvPr/>
-        </p:nvSpPr>
-        <p:spPr>
-          <a:xfrm>
-            <a:off x="548640" y="274320"/>
-            <a:ext cx="10972800" cy="274320"/>
-          </a:xfrm>
-          <a:prstGeom prst="rect">
-            <a:avLst/>
-          </a:prstGeom>
-          <a:noFill/>
-          <a:ln/>
-        </p:spPr>
-        <p:txBody>
-          <a:bodyPr wrap="square" lIns="0" tIns="0" rIns="0" bIns="0" rtlCol="0" anchor="ctr"/>
-          <a:lstStyle/>
-          <a:p>
-            <a:pPr indent="0" marL="0">
-              <a:buNone/>
-            </a:pPr>
-            <a:r>
-              <a:rPr lang="en-US" sz="1200" b="1" dirty="0">
-                <a:solidFill>
-                  <a:srgbClr val="E8A33D"/>
-                </a:solidFill>
-                <a:latin typeface="Calibri" pitchFamily="34" charset="0"/>
-                <a:ea typeface="Calibri" pitchFamily="34" charset="-122"/>
-                <a:cs typeface="Calibri" pitchFamily="34" charset="-120"/>
-              </a:rPr>
-              <a:t>APLICAÇÃO</a:t>
-            </a:r>
-            <a:endParaRPr lang="en-US" sz="1200" dirty="0"/>
-          </a:p>
-        </p:txBody>
-      </p:sp>
-      <p:sp>
-        <p:nvSpPr>
-          <p:cNvPr id="3" name="Text 1"/>
-          <p:cNvSpPr txBox="1"/>
-          <p:nvPr/>
-        </p:nvSpPr>
-        <p:spPr>
-          <a:xfrm>
-            <a:off x="548640" y="502920"/>
-            <a:ext cx="11064240" cy="822960"/>
-          </a:xfrm>
-          <a:prstGeom prst="rect">
-            <a:avLst/>
-          </a:prstGeom>
-          <a:noFill/>
-          <a:ln/>
-        </p:spPr>
-        <p:txBody>
-          <a:bodyPr wrap="square" lIns="0" tIns="0" rIns="0" bIns="0" rtlCol="0" anchor="ctr"/>
-          <a:lstStyle/>
-          <a:p>
-            <a:pPr indent="0" marL="0">
-              <a:buNone/>
-            </a:pPr>
-            <a:r>
-              <a:rPr lang="en-US" sz="3400" b="1" dirty="0">
-                <a:solidFill>
-                  <a:srgbClr val="1A2B28"/>
-                </a:solidFill>
-                <a:latin typeface="Calibri" pitchFamily="34" charset="0"/>
-                <a:ea typeface="Calibri" pitchFamily="34" charset="-122"/>
-                <a:cs typeface="Calibri" pitchFamily="34" charset="-120"/>
-              </a:rPr>
-              <a:t>Como isso apoia a decisão</a:t>
-            </a:r>
-            <a:endParaRPr lang="en-US" sz="3400" dirty="0"/>
-          </a:p>
-        </p:txBody>
-      </p:sp>
-      <p:sp>
-        <p:nvSpPr>
-          <p:cNvPr id="4" name="Text 2"/>
-          <p:cNvSpPr txBox="1"/>
-          <p:nvPr/>
-        </p:nvSpPr>
-        <p:spPr>
-          <a:xfrm>
-            <a:off x="548640" y="1554480"/>
-            <a:ext cx="6309360" cy="4023360"/>
-          </a:xfrm>
-          <a:prstGeom prst="rect">
-            <a:avLst/>
-          </a:prstGeom>
-          <a:noFill/>
-          <a:ln/>
-        </p:spPr>
-        <p:txBody>
-          <a:bodyPr wrap="square" lIns="0" tIns="0" rIns="0" bIns="0" rtlCol="0" anchor="t"/>
-          <a:lstStyle/>
-          <a:p>
-            <a:pPr indent="0" marL="0">
-              <a:lnSpc>
-                <a:spcPct val="130000"/>
-              </a:lnSpc>
-              <a:buNone/>
-            </a:pPr>
-            <a:r>
-              <a:rPr lang="en-US" sz="1600" dirty="0">
-                <a:solidFill>
-                  <a:srgbClr val="1A2B28"/>
-                </a:solidFill>
-                <a:latin typeface="Calibri" pitchFamily="34" charset="0"/>
-                <a:ea typeface="Calibri" pitchFamily="34" charset="-122"/>
-                <a:cs typeface="Calibri" pitchFamily="34" charset="-120"/>
-              </a:rPr>
-              <a:t>Uma lista de prioridade por território, publicada como tabela consultável.</a:t>
-            </a:r>
-            <a:endParaRPr lang="en-US" sz="1600" dirty="0"/>
-          </a:p>
-          <a:p>
-            <a:pPr indent="0" marL="0">
-              <a:lnSpc>
-                <a:spcPct val="130000"/>
-              </a:lnSpc>
-              <a:buNone/>
-            </a:pPr>
-            <a:endParaRPr lang="en-US" sz="1600" dirty="0"/>
-          </a:p>
-          <a:p>
-            <a:pPr indent="0" marL="0">
-              <a:lnSpc>
-                <a:spcPct val="130000"/>
-              </a:lnSpc>
-              <a:buNone/>
-            </a:pPr>
-            <a:r>
-              <a:rPr lang="en-US" sz="1600" dirty="0">
-                <a:solidFill>
-                  <a:srgbClr val="1A2B28"/>
-                </a:solidFill>
-                <a:latin typeface="Calibri" pitchFamily="34" charset="0"/>
-                <a:ea typeface="Calibri" pitchFamily="34" charset="-122"/>
-                <a:cs typeface="Calibri" pitchFamily="34" charset="-120"/>
-              </a:rPr>
-              <a:t>1.028 municípios no quinto mais crítico, 690 no Nordeste. Com o limiar ajustado, a triagem encontra 74% das crianças em risco.</a:t>
-            </a:r>
-            <a:endParaRPr lang="en-US" sz="1600" dirty="0"/>
-          </a:p>
-          <a:p>
-            <a:pPr indent="0" marL="0">
-              <a:lnSpc>
-                <a:spcPct val="130000"/>
-              </a:lnSpc>
-              <a:buNone/>
-            </a:pPr>
-            <a:endParaRPr lang="en-US" sz="1600" dirty="0"/>
-          </a:p>
-          <a:p>
-            <a:pPr indent="0" marL="0">
-              <a:lnSpc>
-                <a:spcPct val="130000"/>
-              </a:lnSpc>
-              <a:buNone/>
-            </a:pPr>
-            <a:r>
-              <a:rPr lang="en-US" sz="1600" dirty="0">
-                <a:solidFill>
-                  <a:srgbClr val="1A2B28"/>
-                </a:solidFill>
-                <a:latin typeface="Calibri" pitchFamily="34" charset="0"/>
-                <a:ea typeface="Calibri" pitchFamily="34" charset="-122"/>
-                <a:cs typeface="Calibri" pitchFamily="34" charset="-120"/>
-              </a:rPr>
-              <a:t>O país avança 2,68 pontos por ano; a meta pede 2,76.</a:t>
-            </a:r>
-            <a:endParaRPr lang="en-US" sz="1600" dirty="0"/>
-          </a:p>
-        </p:txBody>
-      </p:sp>
-      <p:sp>
-        <p:nvSpPr>
-          <p:cNvPr id="5" name="Shape 3"/>
-          <p:cNvSpPr/>
-          <p:nvPr/>
-        </p:nvSpPr>
-        <p:spPr>
-          <a:xfrm>
-            <a:off x="7406640" y="1737360"/>
-            <a:ext cx="2011680" cy="1554480"/>
-          </a:xfrm>
-          <a:prstGeom prst="roundRect">
-            <a:avLst>
-              <a:gd name="adj" fmla="val 4706"/>
-            </a:avLst>
-          </a:prstGeom>
-          <a:solidFill>
-            <a:srgbClr val="F2F6F4"/>
-          </a:solidFill>
-          <a:ln w="12700">
-            <a:solidFill>
-              <a:srgbClr val="F2F6F4"/>
-            </a:solidFill>
-            <a:prstDash val="solid"/>
-          </a:ln>
-        </p:spPr>
-      </p:sp>
-      <p:sp>
-        <p:nvSpPr>
-          <p:cNvPr id="6" name="Text 4"/>
-          <p:cNvSpPr txBox="1"/>
-          <p:nvPr/>
-        </p:nvSpPr>
-        <p:spPr>
-          <a:xfrm>
-            <a:off x="7543800" y="1901952"/>
-            <a:ext cx="1737360" cy="868680"/>
-          </a:xfrm>
-          <a:prstGeom prst="rect">
-            <a:avLst/>
-          </a:prstGeom>
-          <a:noFill/>
-          <a:ln/>
-        </p:spPr>
-        <p:txBody>
-          <a:bodyPr wrap="square" lIns="0" tIns="0" rIns="0" bIns="0" rtlCol="0" anchor="ctr"/>
-          <a:lstStyle/>
-          <a:p>
-            <a:pPr indent="0" marL="0">
-              <a:buNone/>
-            </a:pPr>
-            <a:r>
-              <a:rPr lang="en-US" sz="3200" b="1" dirty="0">
-                <a:solidFill>
-                  <a:srgbClr val="C0504D"/>
-                </a:solidFill>
-                <a:latin typeface="Calibri" pitchFamily="34" charset="0"/>
-                <a:ea typeface="Calibri" pitchFamily="34" charset="-122"/>
-                <a:cs typeface="Calibri" pitchFamily="34" charset="-120"/>
-              </a:rPr>
-              <a:t>1.028</a:t>
-            </a:r>
-            <a:endParaRPr lang="en-US" sz="3200" dirty="0"/>
-          </a:p>
-        </p:txBody>
-      </p:sp>
-      <p:sp>
-        <p:nvSpPr>
-          <p:cNvPr id="7" name="Text 5"/>
-          <p:cNvSpPr txBox="1"/>
-          <p:nvPr/>
-        </p:nvSpPr>
-        <p:spPr>
-          <a:xfrm>
-            <a:off x="7543800" y="2697480"/>
-            <a:ext cx="1737360" cy="640080"/>
-          </a:xfrm>
-          <a:prstGeom prst="rect">
-            <a:avLst/>
-          </a:prstGeom>
-          <a:noFill/>
-          <a:ln/>
-        </p:spPr>
-        <p:txBody>
-          <a:bodyPr wrap="square" lIns="0" tIns="0" rIns="0" bIns="0" rtlCol="0" anchor="ctr"/>
-          <a:lstStyle/>
-          <a:p>
-            <a:pPr indent="0" marL="0">
-              <a:lnSpc>
-                <a:spcPct val="110000"/>
-              </a:lnSpc>
-              <a:buNone/>
-            </a:pPr>
-            <a:r>
-              <a:rPr lang="en-US" sz="1150" dirty="0">
-                <a:solidFill>
-                  <a:srgbClr val="6B7C77"/>
-                </a:solidFill>
-                <a:latin typeface="Calibri" pitchFamily="34" charset="0"/>
-                <a:ea typeface="Calibri" pitchFamily="34" charset="-122"/>
-                <a:cs typeface="Calibri" pitchFamily="34" charset="-120"/>
-              </a:rPr>
-              <a:t>municípios prioritários</a:t>
-            </a:r>
-            <a:endParaRPr lang="en-US" sz="1150" dirty="0"/>
-          </a:p>
-        </p:txBody>
-      </p:sp>
-      <p:sp>
-        <p:nvSpPr>
-          <p:cNvPr id="8" name="Shape 6"/>
-          <p:cNvSpPr/>
-          <p:nvPr/>
-        </p:nvSpPr>
-        <p:spPr>
-          <a:xfrm>
-            <a:off x="9601200" y="1737360"/>
-            <a:ext cx="2011680" cy="1554480"/>
-          </a:xfrm>
-          <a:prstGeom prst="roundRect">
-            <a:avLst>
-              <a:gd name="adj" fmla="val 4706"/>
-            </a:avLst>
-          </a:prstGeom>
-          <a:solidFill>
-            <a:srgbClr val="F2F6F4"/>
-          </a:solidFill>
-          <a:ln w="12700">
-            <a:solidFill>
-              <a:srgbClr val="F2F6F4"/>
-            </a:solidFill>
-            <a:prstDash val="solid"/>
-          </a:ln>
-        </p:spPr>
-      </p:sp>
-      <p:sp>
-        <p:nvSpPr>
-          <p:cNvPr id="9" name="Text 7"/>
-          <p:cNvSpPr txBox="1"/>
-          <p:nvPr/>
-        </p:nvSpPr>
-        <p:spPr>
-          <a:xfrm>
-            <a:off x="9738360" y="1901952"/>
-            <a:ext cx="1737360" cy="868680"/>
-          </a:xfrm>
-          <a:prstGeom prst="rect">
-            <a:avLst/>
-          </a:prstGeom>
-          <a:noFill/>
-          <a:ln/>
-        </p:spPr>
-        <p:txBody>
-          <a:bodyPr wrap="square" lIns="0" tIns="0" rIns="0" bIns="0" rtlCol="0" anchor="ctr"/>
-          <a:lstStyle/>
-          <a:p>
-            <a:pPr indent="0" marL="0">
-              <a:buNone/>
-            </a:pPr>
-            <a:r>
-              <a:rPr lang="en-US" sz="3200" b="1" dirty="0">
-                <a:solidFill>
-                  <a:srgbClr val="1B6B5A"/>
-                </a:solidFill>
-                <a:latin typeface="Calibri" pitchFamily="34" charset="0"/>
-                <a:ea typeface="Calibri" pitchFamily="34" charset="-122"/>
-                <a:cs typeface="Calibri" pitchFamily="34" charset="-120"/>
-              </a:rPr>
-              <a:t>74%</a:t>
-            </a:r>
-            <a:endParaRPr lang="en-US" sz="3200" dirty="0"/>
-          </a:p>
-        </p:txBody>
-      </p:sp>
-      <p:sp>
-        <p:nvSpPr>
-          <p:cNvPr id="10" name="Text 8"/>
-          <p:cNvSpPr txBox="1"/>
-          <p:nvPr/>
-        </p:nvSpPr>
-        <p:spPr>
-          <a:xfrm>
-            <a:off x="9738360" y="2697480"/>
-            <a:ext cx="1737360" cy="640080"/>
-          </a:xfrm>
-          <a:prstGeom prst="rect">
-            <a:avLst/>
-          </a:prstGeom>
-          <a:noFill/>
-          <a:ln/>
-        </p:spPr>
-        <p:txBody>
-          <a:bodyPr wrap="square" lIns="0" tIns="0" rIns="0" bIns="0" rtlCol="0" anchor="ctr"/>
-          <a:lstStyle/>
-          <a:p>
-            <a:pPr indent="0" marL="0">
-              <a:lnSpc>
-                <a:spcPct val="110000"/>
-              </a:lnSpc>
-              <a:buNone/>
-            </a:pPr>
-            <a:r>
-              <a:rPr lang="en-US" sz="1150" dirty="0">
-                <a:solidFill>
-                  <a:srgbClr val="6B7C77"/>
-                </a:solidFill>
-                <a:latin typeface="Calibri" pitchFamily="34" charset="0"/>
-                <a:ea typeface="Calibri" pitchFamily="34" charset="-122"/>
-                <a:cs typeface="Calibri" pitchFamily="34" charset="-120"/>
-              </a:rPr>
-              <a:t>das crianças em risco identificadas</a:t>
-            </a:r>
-            <a:endParaRPr lang="en-US" sz="1150" dirty="0"/>
-          </a:p>
-        </p:txBody>
-      </p:sp>
-      <p:sp>
-        <p:nvSpPr>
-          <p:cNvPr id="11" name="Shape 9"/>
-          <p:cNvSpPr/>
-          <p:nvPr/>
-        </p:nvSpPr>
-        <p:spPr>
-          <a:xfrm>
-            <a:off x="7406640" y="3566160"/>
-            <a:ext cx="4206240" cy="1554480"/>
-          </a:xfrm>
-          <a:prstGeom prst="roundRect">
-            <a:avLst>
-              <a:gd name="adj" fmla="val 4706"/>
-            </a:avLst>
-          </a:prstGeom>
-          <a:solidFill>
-            <a:srgbClr val="F2F6F4"/>
-          </a:solidFill>
-          <a:ln w="12700">
-            <a:solidFill>
-              <a:srgbClr val="F2F6F4"/>
-            </a:solidFill>
-            <a:prstDash val="solid"/>
-          </a:ln>
-        </p:spPr>
-      </p:sp>
-      <p:sp>
-        <p:nvSpPr>
-          <p:cNvPr id="12" name="Text 10"/>
-          <p:cNvSpPr txBox="1"/>
-          <p:nvPr/>
-        </p:nvSpPr>
-        <p:spPr>
-          <a:xfrm>
-            <a:off x="7543800" y="3730752"/>
-            <a:ext cx="3931920" cy="868680"/>
-          </a:xfrm>
-          <a:prstGeom prst="rect">
-            <a:avLst/>
-          </a:prstGeom>
-          <a:noFill/>
-          <a:ln/>
-        </p:spPr>
-        <p:txBody>
-          <a:bodyPr wrap="square" lIns="0" tIns="0" rIns="0" bIns="0" rtlCol="0" anchor="ctr"/>
-          <a:lstStyle/>
-          <a:p>
-            <a:pPr indent="0" marL="0">
-              <a:buNone/>
-            </a:pPr>
-            <a:r>
-              <a:rPr lang="en-US" sz="3200" b="1" dirty="0">
-                <a:solidFill>
-                  <a:srgbClr val="E8A33D"/>
-                </a:solidFill>
-                <a:latin typeface="Calibri" pitchFamily="34" charset="0"/>
-                <a:ea typeface="Calibri" pitchFamily="34" charset="-122"/>
-                <a:cs typeface="Calibri" pitchFamily="34" charset="-120"/>
-              </a:rPr>
-              <a:t>−0,08 p.p./ano</a:t>
-            </a:r>
-            <a:endParaRPr lang="en-US" sz="3200" dirty="0"/>
-          </a:p>
-        </p:txBody>
-      </p:sp>
-      <p:sp>
-        <p:nvSpPr>
-          <p:cNvPr id="13" name="Text 11"/>
-          <p:cNvSpPr txBox="1"/>
-          <p:nvPr/>
-        </p:nvSpPr>
-        <p:spPr>
-          <a:xfrm>
-            <a:off x="7543800" y="4526280"/>
-            <a:ext cx="3931920" cy="640080"/>
-          </a:xfrm>
-          <a:prstGeom prst="rect">
-            <a:avLst/>
-          </a:prstGeom>
-          <a:noFill/>
-          <a:ln/>
-        </p:spPr>
-        <p:txBody>
-          <a:bodyPr wrap="square" lIns="0" tIns="0" rIns="0" bIns="0" rtlCol="0" anchor="ctr"/>
-          <a:lstStyle/>
-          <a:p>
-            <a:pPr indent="0" marL="0">
-              <a:lnSpc>
-                <a:spcPct val="110000"/>
-              </a:lnSpc>
-              <a:buNone/>
-            </a:pPr>
-            <a:r>
-              <a:rPr lang="en-US" sz="1150" dirty="0">
-                <a:solidFill>
-                  <a:srgbClr val="6B7C77"/>
-                </a:solidFill>
-                <a:latin typeface="Calibri" pitchFamily="34" charset="0"/>
-                <a:ea typeface="Calibri" pitchFamily="34" charset="-122"/>
-                <a:cs typeface="Calibri" pitchFamily="34" charset="-120"/>
-              </a:rPr>
-              <a:t>defasagem do país diante da meta de 2030</a:t>
-            </a:r>
-            <a:endParaRPr lang="en-US" sz="1150" dirty="0"/>
-          </a:p>
-        </p:txBody>
-      </p:sp>
-    </p:spTree>
-  </p:cSld>
-  <p:clrMapOvr>
-    <a:masterClrMapping/>
-  </p:clrMapOvr>
-</p:sld>
-</file>
-
-<file path=ppt/slides/slide12.xml><?xml version="1.0" encoding="utf-8"?>
-<p:sld xmlns:a="http://schemas.openxmlformats.org/drawingml/2006/main" xmlns:r="http://schemas.openxmlformats.org/officeDocument/2006/relationships" xmlns:p="http://schemas.openxmlformats.org/presentationml/2006/main">
-  <p:cSld name="Slide 12">
     <p:bg>
       <p:bgPr>
         <a:solidFill>
@@ -3473,7 +2947,7 @@
               <a:buNone/>
             </a:pPr>
             <a:r>
-              <a:rPr lang="en-US" sz="3400" b="1" dirty="0">
+              <a:rPr lang="en-US" sz="3200" b="1" dirty="0">
                 <a:solidFill>
                   <a:srgbClr val="1A2B28"/>
                 </a:solidFill>
@@ -3483,7 +2957,7 @@
               </a:rPr>
               <a:t>O problema</a:t>
             </a:r>
-            <a:endParaRPr lang="en-US" sz="3400" dirty="0"/>
+            <a:endParaRPr lang="en-US" sz="3200" dirty="0"/>
           </a:p>
         </p:txBody>
       </p:sp>
@@ -3495,8 +2969,8 @@
         </p:nvSpPr>
         <p:spPr>
           <a:xfrm>
-            <a:off x="548640" y="1554480"/>
-            <a:ext cx="6309360" cy="4023360"/>
+            <a:off x="548640" y="1600200"/>
+            <a:ext cx="6309360" cy="4206240"/>
           </a:xfrm>
           <a:prstGeom prst="rect">
             <a:avLst/>
@@ -3510,12 +2984,12 @@
           <a:p>
             <a:pPr indent="0" marL="0">
               <a:lnSpc>
-                <a:spcPct val="130000"/>
+                <a:spcPct val="132000"/>
               </a:lnSpc>
               <a:buNone/>
             </a:pPr>
             <a:r>
-              <a:rPr lang="en-US" sz="1600" dirty="0">
+              <a:rPr lang="en-US" sz="1500" dirty="0">
                 <a:solidFill>
                   <a:srgbClr val="1A2B28"/>
                 </a:solidFill>
@@ -3525,26 +2999,26 @@
               </a:rPr>
               <a:t>Toda criança alfabetizada até o fim do 2º ano. A régua é o Saeb, 743 pontos; a meta, 80% até 2030.</a:t>
             </a:r>
-            <a:endParaRPr lang="en-US" sz="1600" dirty="0"/>
+            <a:endParaRPr lang="en-US" sz="1500" dirty="0"/>
           </a:p>
           <a:p>
             <a:pPr indent="0" marL="0">
               <a:lnSpc>
-                <a:spcPct val="130000"/>
+                <a:spcPct val="132000"/>
               </a:lnSpc>
               <a:buNone/>
             </a:pPr>
-            <a:endParaRPr lang="en-US" sz="1600" dirty="0"/>
+            <a:endParaRPr lang="en-US" sz="1500" dirty="0"/>
           </a:p>
           <a:p>
             <a:pPr indent="0" marL="0">
               <a:lnSpc>
-                <a:spcPct val="130000"/>
+                <a:spcPct val="132000"/>
               </a:lnSpc>
               <a:buNone/>
             </a:pPr>
             <a:r>
-              <a:rPr lang="en-US" sz="1600" dirty="0">
+              <a:rPr lang="en-US" sz="1500" dirty="0">
                 <a:solidFill>
                   <a:srgbClr val="1A2B28"/>
                 </a:solidFill>
@@ -3552,9 +3026,38 @@
                 <a:ea typeface="Calibri" pitchFamily="34" charset="-122"/>
                 <a:cs typeface="Calibri" pitchFamily="34" charset="-120"/>
               </a:rPr>
-              <a:t>Hoje o resultado só aparece depois da prova aplicada. Este trabalho pergunta: dá para saber antes?</a:t>
-            </a:r>
-            <a:endParaRPr lang="en-US" sz="1600" dirty="0"/>
+              <a:t>Hoje o resultado só aparece depois da prova aplicada. Quando o número chega, o ano letivo acabou.</a:t>
+            </a:r>
+            <a:endParaRPr lang="en-US" sz="1500" dirty="0"/>
+          </a:p>
+          <a:p>
+            <a:pPr indent="0" marL="0">
+              <a:lnSpc>
+                <a:spcPct val="132000"/>
+              </a:lnSpc>
+              <a:buNone/>
+            </a:pPr>
+            <a:endParaRPr lang="en-US" sz="1500" dirty="0"/>
+          </a:p>
+          <a:p>
+            <a:pPr indent="0" marL="0">
+              <a:lnSpc>
+                <a:spcPct val="132000"/>
+              </a:lnSpc>
+              <a:buNone/>
+            </a:pPr>
+            <a:r>
+              <a:rPr lang="en-US" sz="1500" dirty="0">
+                <a:solidFill>
+                  <a:srgbClr val="1A2B28"/>
+                </a:solidFill>
+                <a:latin typeface="Calibri" pitchFamily="34" charset="0"/>
+                <a:ea typeface="Calibri" pitchFamily="34" charset="-122"/>
+                <a:cs typeface="Calibri" pitchFamily="34" charset="-120"/>
+              </a:rPr>
+              <a:t>Dá para saber antes?</a:t>
+            </a:r>
+            <a:endParaRPr lang="en-US" sz="1500" dirty="0"/>
           </a:p>
         </p:txBody>
       </p:sp>
@@ -3660,7 +3163,7 @@
                 <a:ea typeface="Calibri" pitchFamily="34" charset="-122"/>
                 <a:cs typeface="Calibri" pitchFamily="34" charset="-120"/>
               </a:rPr>
-              <a:t>pontos no Saeb — o corte da alfabetização</a:t>
+              <a:t>pontos no Saeb, o corte da alfabetização</a:t>
             </a:r>
             <a:endParaRPr lang="en-US" sz="1150" dirty="0"/>
           </a:p>
@@ -3863,7 +3366,7 @@
               <a:buNone/>
             </a:pPr>
             <a:r>
-              <a:rPr lang="en-US" sz="3400" b="1" dirty="0">
+              <a:rPr lang="en-US" sz="3200" b="1" dirty="0">
                 <a:solidFill>
                   <a:srgbClr val="1A2B28"/>
                 </a:solidFill>
@@ -3873,7 +3376,7 @@
               </a:rPr>
               <a:t>O que foi construído</a:t>
             </a:r>
-            <a:endParaRPr lang="en-US" sz="3400" dirty="0"/>
+            <a:endParaRPr lang="en-US" sz="3200" dirty="0"/>
           </a:p>
         </p:txBody>
       </p:sp>
@@ -3885,8 +3388,8 @@
         </p:nvSpPr>
         <p:spPr>
           <a:xfrm>
-            <a:off x="548640" y="1554480"/>
-            <a:ext cx="6309360" cy="4023360"/>
+            <a:off x="548640" y="1600200"/>
+            <a:ext cx="6309360" cy="4206240"/>
           </a:xfrm>
           <a:prstGeom prst="rect">
             <a:avLst/>
@@ -3900,12 +3403,12 @@
           <a:p>
             <a:pPr indent="0" marL="0">
               <a:lnSpc>
-                <a:spcPct val="130000"/>
+                <a:spcPct val="132000"/>
               </a:lnSpc>
               <a:buNone/>
             </a:pPr>
             <a:r>
-              <a:rPr lang="en-US" sz="1600" dirty="0">
+              <a:rPr lang="en-US" sz="1500" dirty="0">
                 <a:solidFill>
                   <a:srgbClr val="1A2B28"/>
                 </a:solidFill>
@@ -3913,28 +3416,28 @@
                 <a:ea typeface="Calibri" pitchFamily="34" charset="-122"/>
                 <a:cs typeface="Calibri" pitchFamily="34" charset="-120"/>
               </a:rPr>
-              <a:t>Um modelo que estima a probabilidade de uma criança ser alfabetizada, a partir de variáveis educacionais, territoriais e socioeconômicas.</a:t>
-            </a:r>
-            <a:endParaRPr lang="en-US" sz="1600" dirty="0"/>
+              <a:t>Um modelo que estima a probabilidade de uma criança ser alfabetizada.</a:t>
+            </a:r>
+            <a:endParaRPr lang="en-US" sz="1500" dirty="0"/>
           </a:p>
           <a:p>
             <a:pPr indent="0" marL="0">
               <a:lnSpc>
-                <a:spcPct val="130000"/>
+                <a:spcPct val="132000"/>
               </a:lnSpc>
               <a:buNone/>
             </a:pPr>
-            <a:endParaRPr lang="en-US" sz="1600" dirty="0"/>
+            <a:endParaRPr lang="en-US" sz="1500" dirty="0"/>
           </a:p>
           <a:p>
             <a:pPr indent="0" marL="0">
               <a:lnSpc>
-                <a:spcPct val="130000"/>
+                <a:spcPct val="132000"/>
               </a:lnSpc>
               <a:buNone/>
             </a:pPr>
             <a:r>
-              <a:rPr lang="en-US" sz="1600" dirty="0">
+              <a:rPr lang="en-US" sz="1500" dirty="0">
                 <a:solidFill>
                   <a:srgbClr val="1A2B28"/>
                 </a:solidFill>
@@ -3942,9 +3445,38 @@
                 <a:ea typeface="Calibri" pitchFamily="34" charset="-122"/>
                 <a:cs typeface="Calibri" pitchFamily="34" charset="-120"/>
               </a:rPr>
-              <a:t>A base da Fase 2 foi ampliada com IDEB, PIB e população. Um comando roda tudo.</a:t>
-            </a:r>
-            <a:endParaRPr lang="en-US" sz="1600" dirty="0"/>
+              <a:t>A Gold da Fase 2 servia a relatório, no grão de município. Construímos uma nova camada Gold no grão de aluno.</a:t>
+            </a:r>
+            <a:endParaRPr lang="en-US" sz="1500" dirty="0"/>
+          </a:p>
+          <a:p>
+            <a:pPr indent="0" marL="0">
+              <a:lnSpc>
+                <a:spcPct val="132000"/>
+              </a:lnSpc>
+              <a:buNone/>
+            </a:pPr>
+            <a:endParaRPr lang="en-US" sz="1500" dirty="0"/>
+          </a:p>
+          <a:p>
+            <a:pPr indent="0" marL="0">
+              <a:lnSpc>
+                <a:spcPct val="132000"/>
+              </a:lnSpc>
+              <a:buNone/>
+            </a:pPr>
+            <a:r>
+              <a:rPr lang="en-US" sz="1500" dirty="0">
+                <a:solidFill>
+                  <a:srgbClr val="1A2B28"/>
+                </a:solidFill>
+                <a:latin typeface="Calibri" pitchFamily="34" charset="0"/>
+                <a:ea typeface="Calibri" pitchFamily="34" charset="-122"/>
+                <a:cs typeface="Calibri" pitchFamily="34" charset="-120"/>
+              </a:rPr>
+              <a:t>Um comando roda as nove etapas, da extração à publicação, e para sozinho se a qualidade cair.</a:t>
+            </a:r>
+            <a:endParaRPr lang="en-US" sz="1500" dirty="0"/>
           </a:p>
         </p:txBody>
       </p:sp>
@@ -4326,13 +3858,13 @@
             <a:r>
               <a:rPr lang="en-US" sz="3200" b="1" dirty="0">
                 <a:solidFill>
-                  <a:srgbClr val="1B6B5A"/>
-                </a:solidFill>
-                <a:latin typeface="Calibri" pitchFamily="34" charset="0"/>
-                <a:ea typeface="Calibri" pitchFamily="34" charset="-122"/>
-                <a:cs typeface="Calibri" pitchFamily="34" charset="-120"/>
-              </a:rPr>
-              <a:t>9</a:t>
+                  <a:srgbClr val="E8A33D"/>
+                </a:solidFill>
+                <a:latin typeface="Calibri" pitchFamily="34" charset="0"/>
+                <a:ea typeface="Calibri" pitchFamily="34" charset="-122"/>
+                <a:cs typeface="Calibri" pitchFamily="34" charset="-120"/>
+              </a:rPr>
+              <a:t>2</a:t>
             </a:r>
             <a:endParaRPr lang="en-US" sz="3200" dirty="0"/>
           </a:p>
@@ -4374,7 +3906,7 @@
                 <a:ea typeface="Calibri" pitchFamily="34" charset="-122"/>
                 <a:cs typeface="Calibri" pitchFamily="34" charset="-120"/>
               </a:rPr>
-              <a:t>etapas orquestradas</a:t>
+              <a:t>tabelas Gold novas</a:t>
             </a:r>
             <a:endParaRPr lang="en-US" sz="1150" dirty="0"/>
           </a:p>
@@ -4469,7 +4001,7 @@
               <a:buNone/>
             </a:pPr>
             <a:r>
-              <a:rPr lang="en-US" sz="3400" b="1" dirty="0">
+              <a:rPr lang="en-US" sz="3200" b="1" dirty="0">
                 <a:solidFill>
                   <a:srgbClr val="1A2B28"/>
                 </a:solidFill>
@@ -4479,7 +4011,7 @@
               </a:rPr>
               <a:t>A variável que entregava a resposta</a:t>
             </a:r>
-            <a:endParaRPr lang="en-US" sz="3400" dirty="0"/>
+            <a:endParaRPr lang="en-US" sz="3200" dirty="0"/>
           </a:p>
         </p:txBody>
       </p:sp>
@@ -4491,8 +4023,8 @@
         </p:nvSpPr>
         <p:spPr>
           <a:xfrm>
-            <a:off x="548640" y="1554480"/>
-            <a:ext cx="6309360" cy="4023360"/>
+            <a:off x="548640" y="1600200"/>
+            <a:ext cx="4480560" cy="4206240"/>
           </a:xfrm>
           <a:prstGeom prst="rect">
             <a:avLst/>
@@ -4506,12 +4038,12 @@
           <a:p>
             <a:pPr indent="0" marL="0">
               <a:lnSpc>
-                <a:spcPct val="130000"/>
+                <a:spcPct val="132000"/>
               </a:lnSpc>
               <a:buNone/>
             </a:pPr>
             <a:r>
-              <a:rPr lang="en-US" sz="1600" dirty="0">
+              <a:rPr lang="en-US" sz="1500" dirty="0">
                 <a:solidFill>
                   <a:srgbClr val="1A2B28"/>
                 </a:solidFill>
@@ -4519,28 +4051,28 @@
                 <a:ea typeface="Calibri" pitchFamily="34" charset="-122"/>
                 <a:cs typeface="Calibri" pitchFamily="34" charset="-120"/>
               </a:rPr>
-              <a:t>A proficiência define o alvo: acima de 743, alfabetizada. Usá-la como preditora daria acerto perfeito e um modelo inútil, porque antes da prova ela não existe.</a:t>
-            </a:r>
-            <a:endParaRPr lang="en-US" sz="1600" dirty="0"/>
+              <a:t>A proficiência define o alvo: acima de 743, alfabetizada. Um modelo com ela acertaria 100% e não serviria para nada, porque antes da prova esse número não existe.</a:t>
+            </a:r>
+            <a:endParaRPr lang="en-US" sz="1500" dirty="0"/>
           </a:p>
           <a:p>
             <a:pPr indent="0" marL="0">
               <a:lnSpc>
-                <a:spcPct val="130000"/>
+                <a:spcPct val="132000"/>
               </a:lnSpc>
               <a:buNone/>
             </a:pPr>
-            <a:endParaRPr lang="en-US" sz="1600" dirty="0"/>
+            <a:endParaRPr lang="en-US" sz="1500" dirty="0"/>
           </a:p>
           <a:p>
             <a:pPr indent="0" marL="0">
               <a:lnSpc>
-                <a:spcPct val="130000"/>
+                <a:spcPct val="132000"/>
               </a:lnSpc>
               <a:buNone/>
             </a:pPr>
             <a:r>
-              <a:rPr lang="en-US" sz="1600" dirty="0">
+              <a:rPr lang="en-US" sz="1500" dirty="0">
                 <a:solidFill>
                   <a:srgbClr val="1A2B28"/>
                 </a:solidFill>
@@ -4548,49 +4080,155 @@
                 <a:ea typeface="Calibri" pitchFamily="34" charset="-122"/>
                 <a:cs typeface="Calibri" pitchFamily="34" charset="-120"/>
               </a:rPr>
-              <a:t>Todo aluno ausente entra como não alfabetizado. Presença também entregava a resposta.</a:t>
-            </a:r>
-            <a:endParaRPr lang="en-US" sz="1600" dirty="0"/>
-          </a:p>
-        </p:txBody>
-      </p:sp>
-      <p:sp>
-        <p:nvSpPr>
-          <p:cNvPr id="5" name="Shape 3"/>
-          <p:cNvSpPr/>
-          <p:nvPr/>
-        </p:nvSpPr>
-        <p:spPr>
-          <a:xfrm>
-            <a:off x="7406640" y="1737360"/>
-            <a:ext cx="4206240" cy="1737360"/>
-          </a:xfrm>
-          <a:prstGeom prst="roundRect">
-            <a:avLst>
-              <a:gd name="adj" fmla="val 4211"/>
-            </a:avLst>
-          </a:prstGeom>
-          <a:solidFill>
-            <a:srgbClr val="F2F6F4"/>
-          </a:solidFill>
-          <a:ln w="12700">
-            <a:solidFill>
-              <a:srgbClr val="F2F6F4"/>
-            </a:solidFill>
-            <a:prstDash val="solid"/>
-          </a:ln>
-        </p:spPr>
-      </p:sp>
-      <p:sp>
-        <p:nvSpPr>
-          <p:cNvPr id="6" name="Text 4"/>
-          <p:cNvSpPr txBox="1"/>
-          <p:nvPr/>
-        </p:nvSpPr>
-        <p:spPr>
-          <a:xfrm>
-            <a:off x="7543800" y="1901952"/>
-            <a:ext cx="3931920" cy="868680"/>
+              <a:t>Ao investigar, descobrimos que todo aluno ausente entra como não alfabetizado.</a:t>
+            </a:r>
+            <a:endParaRPr lang="en-US" sz="1500" dirty="0"/>
+          </a:p>
+          <a:p>
+            <a:pPr indent="0" marL="0">
+              <a:lnSpc>
+                <a:spcPct val="132000"/>
+              </a:lnSpc>
+              <a:buNone/>
+            </a:pPr>
+            <a:endParaRPr lang="en-US" sz="1500" dirty="0"/>
+          </a:p>
+          <a:p>
+            <a:pPr indent="0" marL="0">
+              <a:lnSpc>
+                <a:spcPct val="132000"/>
+              </a:lnSpc>
+              <a:buNone/>
+            </a:pPr>
+            <a:r>
+              <a:rPr lang="en-US" sz="1500" dirty="0">
+                <a:solidFill>
+                  <a:srgbClr val="1A2B28"/>
+                </a:solidFill>
+                <a:latin typeface="Calibri" pitchFamily="34" charset="0"/>
+                <a:ea typeface="Calibri" pitchFamily="34" charset="-122"/>
+                <a:cs typeface="Calibri" pitchFamily="34" charset="-120"/>
+              </a:rPr>
+              <a:t>Saem do treino:</a:t>
+            </a:r>
+            <a:endParaRPr lang="en-US" sz="1500" dirty="0"/>
+          </a:p>
+          <a:p>
+            <a:pPr indent="0" marL="0">
+              <a:lnSpc>
+                <a:spcPct val="132000"/>
+              </a:lnSpc>
+              <a:buNone/>
+            </a:pPr>
+            <a:r>
+              <a:rPr lang="en-US" sz="1500" dirty="0">
+                <a:solidFill>
+                  <a:srgbClr val="1A2B28"/>
+                </a:solidFill>
+                <a:latin typeface="Calibri" pitchFamily="34" charset="0"/>
+                <a:ea typeface="Calibri" pitchFamily="34" charset="-122"/>
+                <a:cs typeface="Calibri" pitchFamily="34" charset="-120"/>
+              </a:rPr>
+              <a:t>     proficiencia</a:t>
+            </a:r>
+            <a:endParaRPr lang="en-US" sz="1500" dirty="0"/>
+          </a:p>
+          <a:p>
+            <a:pPr indent="0" marL="0">
+              <a:lnSpc>
+                <a:spcPct val="132000"/>
+              </a:lnSpc>
+              <a:buNone/>
+            </a:pPr>
+            <a:r>
+              <a:rPr lang="en-US" sz="1500" dirty="0">
+                <a:solidFill>
+                  <a:srgbClr val="1A2B28"/>
+                </a:solidFill>
+                <a:latin typeface="Calibri" pitchFamily="34" charset="0"/>
+                <a:ea typeface="Calibri" pitchFamily="34" charset="-122"/>
+                <a:cs typeface="Calibri" pitchFamily="34" charset="-120"/>
+              </a:rPr>
+              <a:t>     presenca</a:t>
+            </a:r>
+            <a:endParaRPr lang="en-US" sz="1500" dirty="0"/>
+          </a:p>
+          <a:p>
+            <a:pPr indent="0" marL="0">
+              <a:lnSpc>
+                <a:spcPct val="132000"/>
+              </a:lnSpc>
+              <a:buNone/>
+            </a:pPr>
+            <a:r>
+              <a:rPr lang="en-US" sz="1500" dirty="0">
+                <a:solidFill>
+                  <a:srgbClr val="1A2B28"/>
+                </a:solidFill>
+                <a:latin typeface="Calibri" pitchFamily="34" charset="0"/>
+                <a:ea typeface="Calibri" pitchFamily="34" charset="-122"/>
+                <a:cs typeface="Calibri" pitchFamily="34" charset="-120"/>
+              </a:rPr>
+              <a:t>     preenchimento_caderno</a:t>
+            </a:r>
+            <a:endParaRPr lang="en-US" sz="1500" dirty="0"/>
+          </a:p>
+          <a:p>
+            <a:pPr indent="0" marL="0">
+              <a:lnSpc>
+                <a:spcPct val="132000"/>
+              </a:lnSpc>
+              <a:buNone/>
+            </a:pPr>
+            <a:r>
+              <a:rPr lang="en-US" sz="1500" dirty="0">
+                <a:solidFill>
+                  <a:srgbClr val="1A2B28"/>
+                </a:solidFill>
+                <a:latin typeface="Calibri" pitchFamily="34" charset="0"/>
+                <a:ea typeface="Calibri" pitchFamily="34" charset="-122"/>
+                <a:cs typeface="Calibri" pitchFamily="34" charset="-120"/>
+              </a:rPr>
+              <a:t>     peso_aluno</a:t>
+            </a:r>
+            <a:endParaRPr lang="en-US" sz="1500" dirty="0"/>
+          </a:p>
+        </p:txBody>
+      </p:sp>
+      <p:pic>
+        <p:nvPicPr>
+          <p:cNvPr id="5" name="Image 0" descr="/Users/thiago/Documents/ARQUIVOS PÓS/FASE 3/tech-challenge-fase3/images/01_vazamento_proficiencia.png">    </p:cNvPr>
+          <p:cNvPicPr>
+            <a:picLocks noChangeAspect="1"/>
+          </p:cNvPicPr>
+          <p:nvPr/>
+        </p:nvPicPr>
+        <p:blipFill>
+          <a:blip r:embed="rId1"/>
+          <a:stretch>
+            <a:fillRect/>
+          </a:stretch>
+        </p:blipFill>
+        <p:spPr>
+          <a:xfrm>
+            <a:off x="5394960" y="1920240"/>
+            <a:ext cx="6400800" cy="3566160"/>
+          </a:xfrm>
+          <a:prstGeom prst="rect">
+            <a:avLst/>
+          </a:prstGeom>
+        </p:spPr>
+      </p:pic>
+      <p:sp>
+        <p:nvSpPr>
+          <p:cNvPr id="6" name="Text 3"/>
+          <p:cNvSpPr txBox="1"/>
+          <p:nvPr/>
+        </p:nvSpPr>
+        <p:spPr>
+          <a:xfrm>
+            <a:off x="5394960" y="5532120"/>
+            <a:ext cx="6400800" cy="292608"/>
           </a:xfrm>
           <a:prstGeom prst="rect">
             <a:avLst/>
@@ -4602,53 +4240,11 @@
           <a:bodyPr wrap="square" lIns="0" tIns="0" rIns="0" bIns="0" rtlCol="0" anchor="ctr"/>
           <a:lstStyle/>
           <a:p>
-            <a:pPr indent="0" marL="0">
-              <a:buNone/>
-            </a:pPr>
-            <a:r>
-              <a:rPr lang="en-US" sz="3200" b="1" dirty="0">
-                <a:solidFill>
-                  <a:srgbClr val="E8A33D"/>
-                </a:solidFill>
-                <a:latin typeface="Calibri" pitchFamily="34" charset="0"/>
-                <a:ea typeface="Calibri" pitchFamily="34" charset="-122"/>
-                <a:cs typeface="Calibri" pitchFamily="34" charset="-120"/>
-              </a:rPr>
-              <a:t>100%</a:t>
-            </a:r>
-            <a:endParaRPr lang="en-US" sz="3200" dirty="0"/>
-          </a:p>
-        </p:txBody>
-      </p:sp>
-      <p:sp>
-        <p:nvSpPr>
-          <p:cNvPr id="7" name="Text 5"/>
-          <p:cNvSpPr txBox="1"/>
-          <p:nvPr/>
-        </p:nvSpPr>
-        <p:spPr>
-          <a:xfrm>
-            <a:off x="7543800" y="2697480"/>
-            <a:ext cx="3931920" cy="640080"/>
-          </a:xfrm>
-          <a:prstGeom prst="rect">
-            <a:avLst/>
-          </a:prstGeom>
-          <a:noFill/>
-          <a:ln/>
-        </p:spPr>
-        <p:txBody>
-          <a:bodyPr wrap="square" lIns="0" tIns="0" rIns="0" bIns="0" rtlCol="0" anchor="ctr"/>
-          <a:lstStyle/>
-          <a:p>
-            <a:pPr indent="0" marL="0">
-              <a:lnSpc>
-                <a:spcPct val="110000"/>
-              </a:lnSpc>
-              <a:buNone/>
-            </a:pPr>
-            <a:r>
-              <a:rPr lang="en-US" sz="1150" dirty="0">
+            <a:pPr algn="ctr" indent="0" marL="0">
+              <a:buNone/>
+            </a:pPr>
+            <a:r>
+              <a:rPr lang="en-US" sz="1050" i="1" dirty="0">
                 <a:solidFill>
                   <a:srgbClr val="6B7C77"/>
                 </a:solidFill>
@@ -4656,117 +4252,9 @@
                 <a:ea typeface="Calibri" pitchFamily="34" charset="-122"/>
                 <a:cs typeface="Calibri" pitchFamily="34" charset="-120"/>
               </a:rPr>
-              <a:t>de concordância entre o corte e o alvo</a:t>
-            </a:r>
-            <a:endParaRPr lang="en-US" sz="1150" dirty="0"/>
-          </a:p>
-        </p:txBody>
-      </p:sp>
-      <p:sp>
-        <p:nvSpPr>
-          <p:cNvPr id="8" name="Shape 6"/>
-          <p:cNvSpPr/>
-          <p:nvPr/>
-        </p:nvSpPr>
-        <p:spPr>
-          <a:xfrm>
-            <a:off x="7406640" y="3749040"/>
-            <a:ext cx="4206240" cy="1737360"/>
-          </a:xfrm>
-          <a:prstGeom prst="roundRect">
-            <a:avLst>
-              <a:gd name="adj" fmla="val 4211"/>
-            </a:avLst>
-          </a:prstGeom>
-          <a:solidFill>
-            <a:srgbClr val="F2F6F4"/>
-          </a:solidFill>
-          <a:ln w="12700">
-            <a:solidFill>
-              <a:srgbClr val="F2F6F4"/>
-            </a:solidFill>
-            <a:prstDash val="solid"/>
-          </a:ln>
-        </p:spPr>
-      </p:sp>
-      <p:sp>
-        <p:nvSpPr>
-          <p:cNvPr id="9" name="Text 7"/>
-          <p:cNvSpPr txBox="1"/>
-          <p:nvPr/>
-        </p:nvSpPr>
-        <p:spPr>
-          <a:xfrm>
-            <a:off x="7543800" y="3913632"/>
-            <a:ext cx="3931920" cy="868680"/>
-          </a:xfrm>
-          <a:prstGeom prst="rect">
-            <a:avLst/>
-          </a:prstGeom>
-          <a:noFill/>
-          <a:ln/>
-        </p:spPr>
-        <p:txBody>
-          <a:bodyPr wrap="square" lIns="0" tIns="0" rIns="0" bIns="0" rtlCol="0" anchor="ctr"/>
-          <a:lstStyle/>
-          <a:p>
-            <a:pPr indent="0" marL="0">
-              <a:buNone/>
-            </a:pPr>
-            <a:r>
-              <a:rPr lang="en-US" sz="3200" b="1" dirty="0">
-                <a:solidFill>
-                  <a:srgbClr val="1B6B5A"/>
-                </a:solidFill>
-                <a:latin typeface="Calibri" pitchFamily="34" charset="0"/>
-                <a:ea typeface="Calibri" pitchFamily="34" charset="-122"/>
-                <a:cs typeface="Calibri" pitchFamily="34" charset="-120"/>
-              </a:rPr>
-              <a:t>4 colunas</a:t>
-            </a:r>
-            <a:endParaRPr lang="en-US" sz="3200" dirty="0"/>
-          </a:p>
-        </p:txBody>
-      </p:sp>
-      <p:sp>
-        <p:nvSpPr>
-          <p:cNvPr id="10" name="Text 8"/>
-          <p:cNvSpPr txBox="1"/>
-          <p:nvPr/>
-        </p:nvSpPr>
-        <p:spPr>
-          <a:xfrm>
-            <a:off x="7543800" y="4709160"/>
-            <a:ext cx="3931920" cy="640080"/>
-          </a:xfrm>
-          <a:prstGeom prst="rect">
-            <a:avLst/>
-          </a:prstGeom>
-          <a:noFill/>
-          <a:ln/>
-        </p:spPr>
-        <p:txBody>
-          <a:bodyPr wrap="square" lIns="0" tIns="0" rIns="0" bIns="0" rtlCol="0" anchor="ctr"/>
-          <a:lstStyle/>
-          <a:p>
-            <a:pPr indent="0" marL="0">
-              <a:lnSpc>
-                <a:spcPct val="110000"/>
-              </a:lnSpc>
-              <a:buNone/>
-            </a:pPr>
-            <a:r>
-              <a:rPr lang="en-US" sz="1150" dirty="0">
-                <a:solidFill>
-                  <a:srgbClr val="6B7C77"/>
-                </a:solidFill>
-                <a:latin typeface="Calibri" pitchFamily="34" charset="0"/>
-                <a:ea typeface="Calibri" pitchFamily="34" charset="-122"/>
-                <a:cs typeface="Calibri" pitchFamily="34" charset="-120"/>
-              </a:rPr>
-              <a:t>excluídas por vazamento</a:t>
-            </a:r>
-            <a:endParaRPr lang="en-US" sz="1150" dirty="0"/>
+              <a:t>As duas classes se separam exatamente no corte, sem uma única exceção.</a:t>
+            </a:r>
+            <a:endParaRPr lang="en-US" sz="1050" dirty="0"/>
           </a:p>
         </p:txBody>
       </p:sp>
@@ -4859,7 +4347,7 @@
               <a:buNone/>
             </a:pPr>
             <a:r>
-              <a:rPr lang="en-US" sz="3400" b="1" dirty="0">
+              <a:rPr lang="en-US" sz="3200" b="1" dirty="0">
                 <a:solidFill>
                   <a:srgbClr val="1A2B28"/>
                 </a:solidFill>
@@ -4869,7 +4357,7 @@
               </a:rPr>
               <a:t>Um quarto da classe negativa nunca fez a prova</a:t>
             </a:r>
-            <a:endParaRPr lang="en-US" sz="3400" dirty="0"/>
+            <a:endParaRPr lang="en-US" sz="3200" dirty="0"/>
           </a:p>
         </p:txBody>
       </p:sp>
@@ -4881,8 +4369,8 @@
         </p:nvSpPr>
         <p:spPr>
           <a:xfrm>
-            <a:off x="548640" y="1554480"/>
-            <a:ext cx="6309360" cy="4023360"/>
+            <a:off x="548640" y="1600200"/>
+            <a:ext cx="4480560" cy="4206240"/>
           </a:xfrm>
           <a:prstGeom prst="rect">
             <a:avLst/>
@@ -4896,12 +4384,12 @@
           <a:p>
             <a:pPr indent="0" marL="0">
               <a:lnSpc>
-                <a:spcPct val="130000"/>
+                <a:spcPct val="132000"/>
               </a:lnSpc>
               <a:buNone/>
             </a:pPr>
             <a:r>
-              <a:rPr lang="en-US" sz="1600" dirty="0">
+              <a:rPr lang="en-US" sz="1500" dirty="0">
                 <a:solidFill>
                   <a:srgbClr val="1A2B28"/>
                 </a:solidFill>
@@ -4909,28 +4397,28 @@
                 <a:ea typeface="Calibri" pitchFamily="34" charset="-122"/>
                 <a:cs typeface="Calibri" pitchFamily="34" charset="-120"/>
               </a:rPr>
-              <a:t>Dos 1,88 milhão de alunos não alfabetizados, 513 mil nunca fizeram a prova.</a:t>
-            </a:r>
-            <a:endParaRPr lang="en-US" sz="1600" dirty="0"/>
+              <a:t>Dos 1,88 milhão de alunos contados como não alfabetizados, 513 mil nunca fizeram a prova. São 27% do problema.</a:t>
+            </a:r>
+            <a:endParaRPr lang="en-US" sz="1500" dirty="0"/>
           </a:p>
           <a:p>
             <a:pPr indent="0" marL="0">
               <a:lnSpc>
-                <a:spcPct val="130000"/>
+                <a:spcPct val="132000"/>
               </a:lnSpc>
               <a:buNone/>
             </a:pPr>
-            <a:endParaRPr lang="en-US" sz="1600" dirty="0"/>
+            <a:endParaRPr lang="en-US" sz="1500" dirty="0"/>
           </a:p>
           <a:p>
             <a:pPr indent="0" marL="0">
               <a:lnSpc>
-                <a:spcPct val="130000"/>
+                <a:spcPct val="132000"/>
               </a:lnSpc>
               <a:buNone/>
             </a:pPr>
             <a:r>
-              <a:rPr lang="en-US" sz="1600" dirty="0">
+              <a:rPr lang="en-US" sz="1500" dirty="0">
                 <a:solidFill>
                   <a:srgbClr val="1A2B28"/>
                 </a:solidFill>
@@ -4938,49 +4426,75 @@
                 <a:ea typeface="Calibri" pitchFamily="34" charset="-122"/>
                 <a:cs typeface="Calibri" pitchFamily="34" charset="-120"/>
               </a:rPr>
-              <a:t>Incluir os ausentes prevê quem será contabilizado. Restringir aos testados prevê quem de fato não atinge o corte. A modelagem usa a população testada.</a:t>
-            </a:r>
-            <a:endParaRPr lang="en-US" sz="1600" dirty="0"/>
-          </a:p>
-        </p:txBody>
-      </p:sp>
-      <p:sp>
-        <p:nvSpPr>
-          <p:cNvPr id="5" name="Shape 3"/>
-          <p:cNvSpPr/>
-          <p:nvPr/>
-        </p:nvSpPr>
-        <p:spPr>
-          <a:xfrm>
-            <a:off x="7406640" y="1737360"/>
-            <a:ext cx="4206240" cy="1737360"/>
-          </a:xfrm>
-          <a:prstGeom prst="roundRect">
-            <a:avLst>
-              <a:gd name="adj" fmla="val 4211"/>
-            </a:avLst>
-          </a:prstGeom>
-          <a:solidFill>
-            <a:srgbClr val="F2F6F4"/>
-          </a:solidFill>
-          <a:ln w="12700">
-            <a:solidFill>
-              <a:srgbClr val="F2F6F4"/>
-            </a:solidFill>
-            <a:prstDash val="solid"/>
-          </a:ln>
-        </p:spPr>
-      </p:sp>
-      <p:sp>
-        <p:nvSpPr>
-          <p:cNvPr id="6" name="Text 4"/>
-          <p:cNvSpPr txBox="1"/>
-          <p:nvPr/>
-        </p:nvSpPr>
-        <p:spPr>
-          <a:xfrm>
-            <a:off x="7543800" y="1901952"/>
-            <a:ext cx="3931920" cy="868680"/>
+              <a:t>Separando aprendizagem de participação, o ranking das regiões muda.</a:t>
+            </a:r>
+            <a:endParaRPr lang="en-US" sz="1500" dirty="0"/>
+          </a:p>
+          <a:p>
+            <a:pPr indent="0" marL="0">
+              <a:lnSpc>
+                <a:spcPct val="132000"/>
+              </a:lnSpc>
+              <a:buNone/>
+            </a:pPr>
+            <a:endParaRPr lang="en-US" sz="1500" dirty="0"/>
+          </a:p>
+          <a:p>
+            <a:pPr indent="0" marL="0">
+              <a:lnSpc>
+                <a:spcPct val="132000"/>
+              </a:lnSpc>
+              <a:buNone/>
+            </a:pPr>
+            <a:r>
+              <a:rPr lang="en-US" sz="1500" dirty="0">
+                <a:solidFill>
+                  <a:srgbClr val="1A2B28"/>
+                </a:solidFill>
+                <a:latin typeface="Calibri" pitchFamily="34" charset="0"/>
+                <a:ea typeface="Calibri" pitchFamily="34" charset="-122"/>
+                <a:cs typeface="Calibri" pitchFamily="34" charset="-120"/>
+              </a:rPr>
+              <a:t>O Sul lidera entre quem faz a prova e cai para terceiro no indicador oficial: tem a maior ausência do país.</a:t>
+            </a:r>
+            <a:endParaRPr lang="en-US" sz="1500" dirty="0"/>
+          </a:p>
+        </p:txBody>
+      </p:sp>
+      <p:pic>
+        <p:nvPicPr>
+          <p:cNvPr id="5" name="Image 0" descr="/Users/thiago/Documents/ARQUIVOS PÓS/FASE 3/tech-challenge-fase3/images/02_alvo_por_regiao.png">    </p:cNvPr>
+          <p:cNvPicPr>
+            <a:picLocks noChangeAspect="1"/>
+          </p:cNvPicPr>
+          <p:nvPr/>
+        </p:nvPicPr>
+        <p:blipFill>
+          <a:blip r:embed="rId1"/>
+          <a:stretch>
+            <a:fillRect/>
+          </a:stretch>
+        </p:blipFill>
+        <p:spPr>
+          <a:xfrm>
+            <a:off x="5394960" y="1828800"/>
+            <a:ext cx="6400800" cy="3520440"/>
+          </a:xfrm>
+          <a:prstGeom prst="rect">
+            <a:avLst/>
+          </a:prstGeom>
+        </p:spPr>
+      </p:pic>
+      <p:sp>
+        <p:nvSpPr>
+          <p:cNvPr id="6" name="Text 3"/>
+          <p:cNvSpPr txBox="1"/>
+          <p:nvPr/>
+        </p:nvSpPr>
+        <p:spPr>
+          <a:xfrm>
+            <a:off x="5394960" y="5440680"/>
+            <a:ext cx="6400800" cy="292608"/>
           </a:xfrm>
           <a:prstGeom prst="rect">
             <a:avLst/>
@@ -4992,53 +4506,11 @@
           <a:bodyPr wrap="square" lIns="0" tIns="0" rIns="0" bIns="0" rtlCol="0" anchor="ctr"/>
           <a:lstStyle/>
           <a:p>
-            <a:pPr indent="0" marL="0">
-              <a:buNone/>
-            </a:pPr>
-            <a:r>
-              <a:rPr lang="en-US" sz="3200" b="1" dirty="0">
-                <a:solidFill>
-                  <a:srgbClr val="E8A33D"/>
-                </a:solidFill>
-                <a:latin typeface="Calibri" pitchFamily="34" charset="0"/>
-                <a:ea typeface="Calibri" pitchFamily="34" charset="-122"/>
-                <a:cs typeface="Calibri" pitchFamily="34" charset="-120"/>
-              </a:rPr>
-              <a:t>513 mil</a:t>
-            </a:r>
-            <a:endParaRPr lang="en-US" sz="3200" dirty="0"/>
-          </a:p>
-        </p:txBody>
-      </p:sp>
-      <p:sp>
-        <p:nvSpPr>
-          <p:cNvPr id="7" name="Text 5"/>
-          <p:cNvSpPr txBox="1"/>
-          <p:nvPr/>
-        </p:nvSpPr>
-        <p:spPr>
-          <a:xfrm>
-            <a:off x="7543800" y="2697480"/>
-            <a:ext cx="3931920" cy="640080"/>
-          </a:xfrm>
-          <a:prstGeom prst="rect">
-            <a:avLst/>
-          </a:prstGeom>
-          <a:noFill/>
-          <a:ln/>
-        </p:spPr>
-        <p:txBody>
-          <a:bodyPr wrap="square" lIns="0" tIns="0" rIns="0" bIns="0" rtlCol="0" anchor="ctr"/>
-          <a:lstStyle/>
-          <a:p>
-            <a:pPr indent="0" marL="0">
-              <a:lnSpc>
-                <a:spcPct val="110000"/>
-              </a:lnSpc>
-              <a:buNone/>
-            </a:pPr>
-            <a:r>
-              <a:rPr lang="en-US" sz="1150" dirty="0">
+            <a:pPr algn="ctr" indent="0" marL="0">
+              <a:buNone/>
+            </a:pPr>
+            <a:r>
+              <a:rPr lang="en-US" sz="1050" i="1" dirty="0">
                 <a:solidFill>
                   <a:srgbClr val="6B7C77"/>
                 </a:solidFill>
@@ -5046,117 +4518,9 @@
                 <a:ea typeface="Calibri" pitchFamily="34" charset="-122"/>
                 <a:cs typeface="Calibri" pitchFamily="34" charset="-120"/>
               </a:rPr>
-              <a:t>alunos sem prova aplicada</a:t>
-            </a:r>
-            <a:endParaRPr lang="en-US" sz="1150" dirty="0"/>
-          </a:p>
-        </p:txBody>
-      </p:sp>
-      <p:sp>
-        <p:nvSpPr>
-          <p:cNvPr id="8" name="Shape 6"/>
-          <p:cNvSpPr/>
-          <p:nvPr/>
-        </p:nvSpPr>
-        <p:spPr>
-          <a:xfrm>
-            <a:off x="7406640" y="3749040"/>
-            <a:ext cx="4206240" cy="1737360"/>
-          </a:xfrm>
-          <a:prstGeom prst="roundRect">
-            <a:avLst>
-              <a:gd name="adj" fmla="val 4211"/>
-            </a:avLst>
-          </a:prstGeom>
-          <a:solidFill>
-            <a:srgbClr val="F2F6F4"/>
-          </a:solidFill>
-          <a:ln w="12700">
-            <a:solidFill>
-              <a:srgbClr val="F2F6F4"/>
-            </a:solidFill>
-            <a:prstDash val="solid"/>
-          </a:ln>
-        </p:spPr>
-      </p:sp>
-      <p:sp>
-        <p:nvSpPr>
-          <p:cNvPr id="9" name="Text 7"/>
-          <p:cNvSpPr txBox="1"/>
-          <p:nvPr/>
-        </p:nvSpPr>
-        <p:spPr>
-          <a:xfrm>
-            <a:off x="7543800" y="3913632"/>
-            <a:ext cx="3931920" cy="868680"/>
-          </a:xfrm>
-          <a:prstGeom prst="rect">
-            <a:avLst/>
-          </a:prstGeom>
-          <a:noFill/>
-          <a:ln/>
-        </p:spPr>
-        <p:txBody>
-          <a:bodyPr wrap="square" lIns="0" tIns="0" rIns="0" bIns="0" rtlCol="0" anchor="ctr"/>
-          <a:lstStyle/>
-          <a:p>
-            <a:pPr indent="0" marL="0">
-              <a:buNone/>
-            </a:pPr>
-            <a:r>
-              <a:rPr lang="en-US" sz="3200" b="1" dirty="0">
-                <a:solidFill>
-                  <a:srgbClr val="E8A33D"/>
-                </a:solidFill>
-                <a:latin typeface="Calibri" pitchFamily="34" charset="0"/>
-                <a:ea typeface="Calibri" pitchFamily="34" charset="-122"/>
-                <a:cs typeface="Calibri" pitchFamily="34" charset="-120"/>
-              </a:rPr>
-              <a:t>27,3%</a:t>
-            </a:r>
-            <a:endParaRPr lang="en-US" sz="3200" dirty="0"/>
-          </a:p>
-        </p:txBody>
-      </p:sp>
-      <p:sp>
-        <p:nvSpPr>
-          <p:cNvPr id="10" name="Text 8"/>
-          <p:cNvSpPr txBox="1"/>
-          <p:nvPr/>
-        </p:nvSpPr>
-        <p:spPr>
-          <a:xfrm>
-            <a:off x="7543800" y="4709160"/>
-            <a:ext cx="3931920" cy="640080"/>
-          </a:xfrm>
-          <a:prstGeom prst="rect">
-            <a:avLst/>
-          </a:prstGeom>
-          <a:noFill/>
-          <a:ln/>
-        </p:spPr>
-        <p:txBody>
-          <a:bodyPr wrap="square" lIns="0" tIns="0" rIns="0" bIns="0" rtlCol="0" anchor="ctr"/>
-          <a:lstStyle/>
-          <a:p>
-            <a:pPr indent="0" marL="0">
-              <a:lnSpc>
-                <a:spcPct val="110000"/>
-              </a:lnSpc>
-              <a:buNone/>
-            </a:pPr>
-            <a:r>
-              <a:rPr lang="en-US" sz="1150" dirty="0">
-                <a:solidFill>
-                  <a:srgbClr val="6B7C77"/>
-                </a:solidFill>
-                <a:latin typeface="Calibri" pitchFamily="34" charset="0"/>
-                <a:ea typeface="Calibri" pitchFamily="34" charset="-122"/>
-                <a:cs typeface="Calibri" pitchFamily="34" charset="-120"/>
-              </a:rPr>
-              <a:t>da classe negativa é ausência, não desempenho</a:t>
-            </a:r>
-            <a:endParaRPr lang="en-US" sz="1150" dirty="0"/>
+              <a:t>Cinza: indicador oficial. Azul: somente quem fez a prova.</a:t>
+            </a:r>
+            <a:endParaRPr lang="en-US" sz="1050" dirty="0"/>
           </a:p>
         </p:txBody>
       </p:sp>
@@ -5218,7 +4582,7 @@
                 <a:ea typeface="Calibri" pitchFamily="34" charset="-122"/>
                 <a:cs typeface="Calibri" pitchFamily="34" charset="-120"/>
               </a:rPr>
-              <a:t>IMPLICAÇÃO</a:t>
+              <a:t>MODELAGEM</a:t>
             </a:r>
             <a:endParaRPr lang="en-US" sz="1200" dirty="0"/>
           </a:p>
@@ -5249,7 +4613,7 @@
               <a:buNone/>
             </a:pPr>
             <a:r>
-              <a:rPr lang="en-US" sz="3400" b="1" dirty="0">
+              <a:rPr lang="en-US" sz="3200" b="1" dirty="0">
                 <a:solidFill>
                   <a:srgbClr val="1A2B28"/>
                 </a:solidFill>
@@ -5257,9 +4621,9 @@
                 <a:ea typeface="Calibri" pitchFamily="34" charset="-122"/>
                 <a:cs typeface="Calibri" pitchFamily="34" charset="-120"/>
               </a:rPr>
-              <a:t>O indicador soma dois problemas diferentes</a:t>
-            </a:r>
-            <a:endParaRPr lang="en-US" sz="3400" dirty="0"/>
+              <a:t>Um critério que se mostrou impossível</a:t>
+            </a:r>
+            <a:endParaRPr lang="en-US" sz="3200" dirty="0"/>
           </a:p>
         </p:txBody>
       </p:sp>
@@ -5271,8 +4635,8 @@
         </p:nvSpPr>
         <p:spPr>
           <a:xfrm>
-            <a:off x="548640" y="1554480"/>
-            <a:ext cx="6309360" cy="2926080"/>
+            <a:off x="548640" y="1600200"/>
+            <a:ext cx="5120640" cy="4206240"/>
           </a:xfrm>
           <a:prstGeom prst="rect">
             <a:avLst/>
@@ -5286,12 +4650,12 @@
           <a:p>
             <a:pPr indent="0" marL="0">
               <a:lnSpc>
-                <a:spcPct val="130000"/>
+                <a:spcPct val="132000"/>
               </a:lnSpc>
               <a:buNone/>
             </a:pPr>
             <a:r>
-              <a:rPr lang="en-US" sz="1600" dirty="0">
+              <a:rPr lang="en-US" sz="1500" dirty="0">
                 <a:solidFill>
                   <a:srgbClr val="1A2B28"/>
                 </a:solidFill>
@@ -5299,28 +4663,28 @@
                 <a:ea typeface="Calibri" pitchFamily="34" charset="-122"/>
                 <a:cs typeface="Calibri" pitchFamily="34" charset="-120"/>
               </a:rPr>
-              <a:t>Separar aprendizagem de participação reordena as regiões. O Sul lidera entre quem faz a prova e cai para terceiro no indicador oficial, por ter a maior ausência do país.</a:t>
-            </a:r>
-            <a:endParaRPr lang="en-US" sz="1600" dirty="0"/>
+              <a:t>Antes de treinar, definimos a nota mínima: superar o chute em 5 pontos de acurácia.</a:t>
+            </a:r>
+            <a:endParaRPr lang="en-US" sz="1500" dirty="0"/>
           </a:p>
           <a:p>
             <a:pPr indent="0" marL="0">
               <a:lnSpc>
-                <a:spcPct val="130000"/>
+                <a:spcPct val="132000"/>
               </a:lnSpc>
               <a:buNone/>
             </a:pPr>
-            <a:endParaRPr lang="en-US" sz="1600" dirty="0"/>
+            <a:endParaRPr lang="en-US" sz="1500" dirty="0"/>
           </a:p>
           <a:p>
             <a:pPr indent="0" marL="0">
               <a:lnSpc>
-                <a:spcPct val="130000"/>
+                <a:spcPct val="132000"/>
               </a:lnSpc>
               <a:buNone/>
             </a:pPr>
             <a:r>
-              <a:rPr lang="en-US" sz="1600" dirty="0">
+              <a:rPr lang="en-US" sz="1500" dirty="0">
                 <a:solidFill>
                   <a:srgbClr val="1A2B28"/>
                 </a:solidFill>
@@ -5328,1234 +4692,94 @@
                 <a:ea typeface="Calibri" pitchFamily="34" charset="-122"/>
                 <a:cs typeface="Calibri" pitchFamily="34" charset="-120"/>
               </a:rPr>
-              <a:t>São dois problemas, com políticas distintas.</a:t>
-            </a:r>
-            <a:endParaRPr lang="en-US" sz="1600" dirty="0"/>
-          </a:p>
-        </p:txBody>
-      </p:sp>
-      <p:graphicFrame>
-        <p:nvGraphicFramePr>
-          <p:cNvPr id="7" name="Table 0"/>
-          <p:cNvGraphicFramePr>
-            <a:graphicFrameLocks noGrp="1"/>
-          </p:cNvGraphicFramePr>
-          <p:nvPr>
-            <p:extLst>
-              <p:ext uri="{D42A27DB-BD31-4B8C-83A1-F6EECF244321}">
-                <p14:modId xmlns:p14="http://schemas.microsoft.com/office/powerpoint/2010/main" val="1579011935"/>
-              </p:ext>
-            </p:extLst>
-          </p:nvPr>
-        </p:nvGraphicFramePr>
-        <p:xfrm>
-          <a:off x="7406640" y="1737360"/>
-          <a:ext cx="4206240" cy="914400"/>
-        </p:xfrm>
-        <a:graphic>
-          <a:graphicData uri="http://schemas.openxmlformats.org/drawingml/2006/table">
-            <a:tbl>
-              <a:tblPr/>
-              <a:tblGrid>
-                <a:gridCol w="1463040"/>
-                <a:gridCol w="1371600"/>
-                <a:gridCol w="1371600"/>
-              </a:tblGrid>
-              <a:tr h="347472">
-                <a:tc>
-                  <a:txBody>
-                    <a:bodyPr/>
-                    <a:lstStyle/>
-                    <a:p>
-                      <a:pPr indent="0" marL="0">
-                        <a:buNone/>
-                      </a:pPr>
-                      <a:r>
-                        <a:rPr lang="en-US" sz="1100" b="1" dirty="0">
-                          <a:solidFill>
-                            <a:srgbClr val="FFFFFF"/>
-                          </a:solidFill>
-                          <a:latin typeface="Calibri" pitchFamily="34" charset="0"/>
-                          <a:ea typeface="Calibri" pitchFamily="34" charset="-122"/>
-                          <a:cs typeface="Calibri" pitchFamily="34" charset="-120"/>
-                        </a:rPr>
-                        <a:t>Região</a:t>
-                      </a:r>
-                      <a:endParaRPr lang="en-US" sz="1100" dirty="0">
-                        <a:latin typeface="Calibri" charset="0"/>
-                        <a:ea typeface="Calibri" charset="0"/>
-                        <a:cs typeface="Calibri" charset="0"/>
-                      </a:endParaRPr>
-                    </a:p>
-                  </a:txBody>
-                  <a:tcPr marL="91440" marR="91440" marT="45720" marB="45720" anchor="ctr">
-                    <a:lnL w="6350" cap="flat" cmpd="sng" algn="ctr">
-                      <a:solidFill>
-                        <a:srgbClr val="DDE5E2"/>
-                      </a:solidFill>
-                      <a:prstDash val="solid"/>
-                      <a:round/>
-                      <a:headEnd type="none" w="med" len="med"/>
-                      <a:tailEnd type="none" w="med" len="med"/>
-                    </a:lnL>
-                    <a:lnR w="6350" cap="flat" cmpd="sng" algn="ctr">
-                      <a:solidFill>
-                        <a:srgbClr val="DDE5E2"/>
-                      </a:solidFill>
-                      <a:prstDash val="solid"/>
-                      <a:round/>
-                      <a:headEnd type="none" w="med" len="med"/>
-                      <a:tailEnd type="none" w="med" len="med"/>
-                    </a:lnR>
-                    <a:lnT w="6350" cap="flat" cmpd="sng" algn="ctr">
-                      <a:solidFill>
-                        <a:srgbClr val="DDE5E2"/>
-                      </a:solidFill>
-                      <a:prstDash val="solid"/>
-                      <a:round/>
-                      <a:headEnd type="none" w="med" len="med"/>
-                      <a:tailEnd type="none" w="med" len="med"/>
-                    </a:lnT>
-                    <a:lnB w="6350" cap="flat" cmpd="sng" algn="ctr">
-                      <a:solidFill>
-                        <a:srgbClr val="DDE5E2"/>
-                      </a:solidFill>
-                      <a:prstDash val="solid"/>
-                      <a:round/>
-                      <a:headEnd type="none" w="med" len="med"/>
-                      <a:tailEnd type="none" w="med" len="med"/>
-                    </a:lnB>
-                    <a:solidFill>
-                      <a:srgbClr val="1B6B5A"/>
-                    </a:solidFill>
-                  </a:tcPr>
-                </a:tc>
-                <a:tc>
-                  <a:txBody>
-                    <a:bodyPr/>
-                    <a:lstStyle/>
-                    <a:p>
-                      <a:pPr indent="0" marL="0">
-                        <a:buNone/>
-                      </a:pPr>
-                      <a:r>
-                        <a:rPr lang="en-US" sz="1100" b="1" dirty="0">
-                          <a:solidFill>
-                            <a:srgbClr val="FFFFFF"/>
-                          </a:solidFill>
-                          <a:latin typeface="Calibri" pitchFamily="34" charset="0"/>
-                          <a:ea typeface="Calibri" pitchFamily="34" charset="-122"/>
-                          <a:cs typeface="Calibri" pitchFamily="34" charset="-120"/>
-                        </a:rPr>
-                        <a:t>Indicador oficial</a:t>
-                      </a:r>
-                      <a:endParaRPr lang="en-US" sz="1100" dirty="0">
-                        <a:latin typeface="Calibri" charset="0"/>
-                        <a:ea typeface="Calibri" charset="0"/>
-                        <a:cs typeface="Calibri" charset="0"/>
-                      </a:endParaRPr>
-                    </a:p>
-                  </a:txBody>
-                  <a:tcPr marL="91440" marR="91440" marT="45720" marB="45720" anchor="ctr">
-                    <a:lnL w="6350" cap="flat" cmpd="sng" algn="ctr">
-                      <a:solidFill>
-                        <a:srgbClr val="DDE5E2"/>
-                      </a:solidFill>
-                      <a:prstDash val="solid"/>
-                      <a:round/>
-                      <a:headEnd type="none" w="med" len="med"/>
-                      <a:tailEnd type="none" w="med" len="med"/>
-                    </a:lnL>
-                    <a:lnR w="6350" cap="flat" cmpd="sng" algn="ctr">
-                      <a:solidFill>
-                        <a:srgbClr val="DDE5E2"/>
-                      </a:solidFill>
-                      <a:prstDash val="solid"/>
-                      <a:round/>
-                      <a:headEnd type="none" w="med" len="med"/>
-                      <a:tailEnd type="none" w="med" len="med"/>
-                    </a:lnR>
-                    <a:lnT w="6350" cap="flat" cmpd="sng" algn="ctr">
-                      <a:solidFill>
-                        <a:srgbClr val="DDE5E2"/>
-                      </a:solidFill>
-                      <a:prstDash val="solid"/>
-                      <a:round/>
-                      <a:headEnd type="none" w="med" len="med"/>
-                      <a:tailEnd type="none" w="med" len="med"/>
-                    </a:lnT>
-                    <a:lnB w="6350" cap="flat" cmpd="sng" algn="ctr">
-                      <a:solidFill>
-                        <a:srgbClr val="DDE5E2"/>
-                      </a:solidFill>
-                      <a:prstDash val="solid"/>
-                      <a:round/>
-                      <a:headEnd type="none" w="med" len="med"/>
-                      <a:tailEnd type="none" w="med" len="med"/>
-                    </a:lnB>
-                    <a:solidFill>
-                      <a:srgbClr val="1B6B5A"/>
-                    </a:solidFill>
-                  </a:tcPr>
-                </a:tc>
-                <a:tc>
-                  <a:txBody>
-                    <a:bodyPr/>
-                    <a:lstStyle/>
-                    <a:p>
-                      <a:pPr indent="0" marL="0">
-                        <a:buNone/>
-                      </a:pPr>
-                      <a:r>
-                        <a:rPr lang="en-US" sz="1100" b="1" dirty="0">
-                          <a:solidFill>
-                            <a:srgbClr val="FFFFFF"/>
-                          </a:solidFill>
-                          <a:latin typeface="Calibri" pitchFamily="34" charset="0"/>
-                          <a:ea typeface="Calibri" pitchFamily="34" charset="-122"/>
-                          <a:cs typeface="Calibri" pitchFamily="34" charset="-120"/>
-                        </a:rPr>
-                        <a:t>Entre testados</a:t>
-                      </a:r>
-                      <a:endParaRPr lang="en-US" sz="1100" dirty="0">
-                        <a:latin typeface="Calibri" charset="0"/>
-                        <a:ea typeface="Calibri" charset="0"/>
-                        <a:cs typeface="Calibri" charset="0"/>
-                      </a:endParaRPr>
-                    </a:p>
-                  </a:txBody>
-                  <a:tcPr marL="91440" marR="91440" marT="45720" marB="45720" anchor="ctr">
-                    <a:lnL w="6350" cap="flat" cmpd="sng" algn="ctr">
-                      <a:solidFill>
-                        <a:srgbClr val="DDE5E2"/>
-                      </a:solidFill>
-                      <a:prstDash val="solid"/>
-                      <a:round/>
-                      <a:headEnd type="none" w="med" len="med"/>
-                      <a:tailEnd type="none" w="med" len="med"/>
-                    </a:lnL>
-                    <a:lnR w="6350" cap="flat" cmpd="sng" algn="ctr">
-                      <a:solidFill>
-                        <a:srgbClr val="DDE5E2"/>
-                      </a:solidFill>
-                      <a:prstDash val="solid"/>
-                      <a:round/>
-                      <a:headEnd type="none" w="med" len="med"/>
-                      <a:tailEnd type="none" w="med" len="med"/>
-                    </a:lnR>
-                    <a:lnT w="6350" cap="flat" cmpd="sng" algn="ctr">
-                      <a:solidFill>
-                        <a:srgbClr val="DDE5E2"/>
-                      </a:solidFill>
-                      <a:prstDash val="solid"/>
-                      <a:round/>
-                      <a:headEnd type="none" w="med" len="med"/>
-                      <a:tailEnd type="none" w="med" len="med"/>
-                    </a:lnT>
-                    <a:lnB w="6350" cap="flat" cmpd="sng" algn="ctr">
-                      <a:solidFill>
-                        <a:srgbClr val="DDE5E2"/>
-                      </a:solidFill>
-                      <a:prstDash val="solid"/>
-                      <a:round/>
-                      <a:headEnd type="none" w="med" len="med"/>
-                      <a:tailEnd type="none" w="med" len="med"/>
-                    </a:lnB>
-                    <a:solidFill>
-                      <a:srgbClr val="1B6B5A"/>
-                    </a:solidFill>
-                  </a:tcPr>
-                </a:tc>
-              </a:tr>
-              <a:tr h="347472">
-                <a:tc>
-                  <a:txBody>
-                    <a:bodyPr/>
-                    <a:lstStyle/>
-                    <a:p>
-                      <a:pPr indent="0" marL="0">
-                        <a:buNone/>
-                      </a:pPr>
-                      <a:r>
-                        <a:rPr lang="en-US" sz="1100" dirty="0">
-                          <a:solidFill>
-                            <a:srgbClr val="1A2B28"/>
-                          </a:solidFill>
-                          <a:latin typeface="Calibri" pitchFamily="34" charset="0"/>
-                          <a:ea typeface="Calibri" pitchFamily="34" charset="-122"/>
-                          <a:cs typeface="Calibri" pitchFamily="34" charset="-120"/>
-                        </a:rPr>
-                        <a:t>Sul</a:t>
-                      </a:r>
-                      <a:endParaRPr lang="en-US" sz="1100" dirty="0">
-                        <a:latin typeface="Calibri" charset="0"/>
-                        <a:ea typeface="Calibri" charset="0"/>
-                        <a:cs typeface="Calibri" charset="0"/>
-                      </a:endParaRPr>
-                    </a:p>
-                  </a:txBody>
-                  <a:tcPr marL="91440" marR="91440" marT="45720" marB="45720" anchor="ctr">
-                    <a:lnL w="6350" cap="flat" cmpd="sng" algn="ctr">
-                      <a:solidFill>
-                        <a:srgbClr val="DDE5E2"/>
-                      </a:solidFill>
-                      <a:prstDash val="solid"/>
-                      <a:round/>
-                      <a:headEnd type="none" w="med" len="med"/>
-                      <a:tailEnd type="none" w="med" len="med"/>
-                    </a:lnL>
-                    <a:lnR w="6350" cap="flat" cmpd="sng" algn="ctr">
-                      <a:solidFill>
-                        <a:srgbClr val="DDE5E2"/>
-                      </a:solidFill>
-                      <a:prstDash val="solid"/>
-                      <a:round/>
-                      <a:headEnd type="none" w="med" len="med"/>
-                      <a:tailEnd type="none" w="med" len="med"/>
-                    </a:lnR>
-                    <a:lnT w="6350" cap="flat" cmpd="sng" algn="ctr">
-                      <a:solidFill>
-                        <a:srgbClr val="DDE5E2"/>
-                      </a:solidFill>
-                      <a:prstDash val="solid"/>
-                      <a:round/>
-                      <a:headEnd type="none" w="med" len="med"/>
-                      <a:tailEnd type="none" w="med" len="med"/>
-                    </a:lnT>
-                    <a:lnB w="6350" cap="flat" cmpd="sng" algn="ctr">
-                      <a:solidFill>
-                        <a:srgbClr val="DDE5E2"/>
-                      </a:solidFill>
-                      <a:prstDash val="solid"/>
-                      <a:round/>
-                      <a:headEnd type="none" w="med" len="med"/>
-                      <a:tailEnd type="none" w="med" len="med"/>
-                    </a:lnB>
-                  </a:tcPr>
-                </a:tc>
-                <a:tc>
-                  <a:txBody>
-                    <a:bodyPr/>
-                    <a:lstStyle/>
-                    <a:p>
-                      <a:pPr indent="0" marL="0">
-                        <a:buNone/>
-                      </a:pPr>
-                      <a:r>
-                        <a:rPr lang="en-US" sz="1100" dirty="0">
-                          <a:solidFill>
-                            <a:srgbClr val="1A2B28"/>
-                          </a:solidFill>
-                          <a:latin typeface="Calibri" pitchFamily="34" charset="0"/>
-                          <a:ea typeface="Calibri" pitchFamily="34" charset="-122"/>
-                          <a:cs typeface="Calibri" pitchFamily="34" charset="-120"/>
-                        </a:rPr>
-                        <a:t>52,5%  (3º)</a:t>
-                      </a:r>
-                      <a:endParaRPr lang="en-US" sz="1100" dirty="0">
-                        <a:latin typeface="Calibri" charset="0"/>
-                        <a:ea typeface="Calibri" charset="0"/>
-                        <a:cs typeface="Calibri" charset="0"/>
-                      </a:endParaRPr>
-                    </a:p>
-                  </a:txBody>
-                  <a:tcPr marL="91440" marR="91440" marT="45720" marB="45720" anchor="ctr">
-                    <a:lnL w="6350" cap="flat" cmpd="sng" algn="ctr">
-                      <a:solidFill>
-                        <a:srgbClr val="DDE5E2"/>
-                      </a:solidFill>
-                      <a:prstDash val="solid"/>
-                      <a:round/>
-                      <a:headEnd type="none" w="med" len="med"/>
-                      <a:tailEnd type="none" w="med" len="med"/>
-                    </a:lnL>
-                    <a:lnR w="6350" cap="flat" cmpd="sng" algn="ctr">
-                      <a:solidFill>
-                        <a:srgbClr val="DDE5E2"/>
-                      </a:solidFill>
-                      <a:prstDash val="solid"/>
-                      <a:round/>
-                      <a:headEnd type="none" w="med" len="med"/>
-                      <a:tailEnd type="none" w="med" len="med"/>
-                    </a:lnR>
-                    <a:lnT w="6350" cap="flat" cmpd="sng" algn="ctr">
-                      <a:solidFill>
-                        <a:srgbClr val="DDE5E2"/>
-                      </a:solidFill>
-                      <a:prstDash val="solid"/>
-                      <a:round/>
-                      <a:headEnd type="none" w="med" len="med"/>
-                      <a:tailEnd type="none" w="med" len="med"/>
-                    </a:lnT>
-                    <a:lnB w="6350" cap="flat" cmpd="sng" algn="ctr">
-                      <a:solidFill>
-                        <a:srgbClr val="DDE5E2"/>
-                      </a:solidFill>
-                      <a:prstDash val="solid"/>
-                      <a:round/>
-                      <a:headEnd type="none" w="med" len="med"/>
-                      <a:tailEnd type="none" w="med" len="med"/>
-                    </a:lnB>
-                  </a:tcPr>
-                </a:tc>
-                <a:tc>
-                  <a:txBody>
-                    <a:bodyPr/>
-                    <a:lstStyle/>
-                    <a:p>
-                      <a:pPr indent="0" marL="0">
-                        <a:buNone/>
-                      </a:pPr>
-                      <a:r>
-                        <a:rPr lang="en-US" sz="1100" dirty="0">
-                          <a:solidFill>
-                            <a:srgbClr val="1A2B28"/>
-                          </a:solidFill>
-                          <a:latin typeface="Calibri" pitchFamily="34" charset="0"/>
-                          <a:ea typeface="Calibri" pitchFamily="34" charset="-122"/>
-                          <a:cs typeface="Calibri" pitchFamily="34" charset="-120"/>
-                        </a:rPr>
-                        <a:t>64,5%  (1º)</a:t>
-                      </a:r>
-                      <a:endParaRPr lang="en-US" sz="1100" dirty="0">
-                        <a:latin typeface="Calibri" charset="0"/>
-                        <a:ea typeface="Calibri" charset="0"/>
-                        <a:cs typeface="Calibri" charset="0"/>
-                      </a:endParaRPr>
-                    </a:p>
-                  </a:txBody>
-                  <a:tcPr marL="91440" marR="91440" marT="45720" marB="45720" anchor="ctr">
-                    <a:lnL w="6350" cap="flat" cmpd="sng" algn="ctr">
-                      <a:solidFill>
-                        <a:srgbClr val="DDE5E2"/>
-                      </a:solidFill>
-                      <a:prstDash val="solid"/>
-                      <a:round/>
-                      <a:headEnd type="none" w="med" len="med"/>
-                      <a:tailEnd type="none" w="med" len="med"/>
-                    </a:lnL>
-                    <a:lnR w="6350" cap="flat" cmpd="sng" algn="ctr">
-                      <a:solidFill>
-                        <a:srgbClr val="DDE5E2"/>
-                      </a:solidFill>
-                      <a:prstDash val="solid"/>
-                      <a:round/>
-                      <a:headEnd type="none" w="med" len="med"/>
-                      <a:tailEnd type="none" w="med" len="med"/>
-                    </a:lnR>
-                    <a:lnT w="6350" cap="flat" cmpd="sng" algn="ctr">
-                      <a:solidFill>
-                        <a:srgbClr val="DDE5E2"/>
-                      </a:solidFill>
-                      <a:prstDash val="solid"/>
-                      <a:round/>
-                      <a:headEnd type="none" w="med" len="med"/>
-                      <a:tailEnd type="none" w="med" len="med"/>
-                    </a:lnT>
-                    <a:lnB w="6350" cap="flat" cmpd="sng" algn="ctr">
-                      <a:solidFill>
-                        <a:srgbClr val="DDE5E2"/>
-                      </a:solidFill>
-                      <a:prstDash val="solid"/>
-                      <a:round/>
-                      <a:headEnd type="none" w="med" len="med"/>
-                      <a:tailEnd type="none" w="med" len="med"/>
-                    </a:lnB>
-                  </a:tcPr>
-                </a:tc>
-              </a:tr>
-              <a:tr h="347472">
-                <a:tc>
-                  <a:txBody>
-                    <a:bodyPr/>
-                    <a:lstStyle/>
-                    <a:p>
-                      <a:pPr indent="0" marL="0">
-                        <a:buNone/>
-                      </a:pPr>
-                      <a:r>
-                        <a:rPr lang="en-US" sz="1100" dirty="0">
-                          <a:solidFill>
-                            <a:srgbClr val="1A2B28"/>
-                          </a:solidFill>
-                          <a:latin typeface="Calibri" pitchFamily="34" charset="0"/>
-                          <a:ea typeface="Calibri" pitchFamily="34" charset="-122"/>
-                          <a:cs typeface="Calibri" pitchFamily="34" charset="-120"/>
-                        </a:rPr>
-                        <a:t>Centro-Oeste</a:t>
-                      </a:r>
-                      <a:endParaRPr lang="en-US" sz="1100" dirty="0">
-                        <a:latin typeface="Calibri" charset="0"/>
-                        <a:ea typeface="Calibri" charset="0"/>
-                        <a:cs typeface="Calibri" charset="0"/>
-                      </a:endParaRPr>
-                    </a:p>
-                  </a:txBody>
-                  <a:tcPr marL="91440" marR="91440" marT="45720" marB="45720" anchor="ctr">
-                    <a:lnL w="6350" cap="flat" cmpd="sng" algn="ctr">
-                      <a:solidFill>
-                        <a:srgbClr val="DDE5E2"/>
-                      </a:solidFill>
-                      <a:prstDash val="solid"/>
-                      <a:round/>
-                      <a:headEnd type="none" w="med" len="med"/>
-                      <a:tailEnd type="none" w="med" len="med"/>
-                    </a:lnL>
-                    <a:lnR w="6350" cap="flat" cmpd="sng" algn="ctr">
-                      <a:solidFill>
-                        <a:srgbClr val="DDE5E2"/>
-                      </a:solidFill>
-                      <a:prstDash val="solid"/>
-                      <a:round/>
-                      <a:headEnd type="none" w="med" len="med"/>
-                      <a:tailEnd type="none" w="med" len="med"/>
-                    </a:lnR>
-                    <a:lnT w="6350" cap="flat" cmpd="sng" algn="ctr">
-                      <a:solidFill>
-                        <a:srgbClr val="DDE5E2"/>
-                      </a:solidFill>
-                      <a:prstDash val="solid"/>
-                      <a:round/>
-                      <a:headEnd type="none" w="med" len="med"/>
-                      <a:tailEnd type="none" w="med" len="med"/>
-                    </a:lnT>
-                    <a:lnB w="6350" cap="flat" cmpd="sng" algn="ctr">
-                      <a:solidFill>
-                        <a:srgbClr val="DDE5E2"/>
-                      </a:solidFill>
-                      <a:prstDash val="solid"/>
-                      <a:round/>
-                      <a:headEnd type="none" w="med" len="med"/>
-                      <a:tailEnd type="none" w="med" len="med"/>
-                    </a:lnB>
-                  </a:tcPr>
-                </a:tc>
-                <a:tc>
-                  <a:txBody>
-                    <a:bodyPr/>
-                    <a:lstStyle/>
-                    <a:p>
-                      <a:pPr indent="0" marL="0">
-                        <a:buNone/>
-                      </a:pPr>
-                      <a:r>
-                        <a:rPr lang="en-US" sz="1100" dirty="0">
-                          <a:solidFill>
-                            <a:srgbClr val="1A2B28"/>
-                          </a:solidFill>
-                          <a:latin typeface="Calibri" pitchFamily="34" charset="0"/>
-                          <a:ea typeface="Calibri" pitchFamily="34" charset="-122"/>
-                          <a:cs typeface="Calibri" pitchFamily="34" charset="-120"/>
-                        </a:rPr>
-                        <a:t>54,7%  (1º)</a:t>
-                      </a:r>
-                      <a:endParaRPr lang="en-US" sz="1100" dirty="0">
-                        <a:latin typeface="Calibri" charset="0"/>
-                        <a:ea typeface="Calibri" charset="0"/>
-                        <a:cs typeface="Calibri" charset="0"/>
-                      </a:endParaRPr>
-                    </a:p>
-                  </a:txBody>
-                  <a:tcPr marL="91440" marR="91440" marT="45720" marB="45720" anchor="ctr">
-                    <a:lnL w="6350" cap="flat" cmpd="sng" algn="ctr">
-                      <a:solidFill>
-                        <a:srgbClr val="DDE5E2"/>
-                      </a:solidFill>
-                      <a:prstDash val="solid"/>
-                      <a:round/>
-                      <a:headEnd type="none" w="med" len="med"/>
-                      <a:tailEnd type="none" w="med" len="med"/>
-                    </a:lnL>
-                    <a:lnR w="6350" cap="flat" cmpd="sng" algn="ctr">
-                      <a:solidFill>
-                        <a:srgbClr val="DDE5E2"/>
-                      </a:solidFill>
-                      <a:prstDash val="solid"/>
-                      <a:round/>
-                      <a:headEnd type="none" w="med" len="med"/>
-                      <a:tailEnd type="none" w="med" len="med"/>
-                    </a:lnR>
-                    <a:lnT w="6350" cap="flat" cmpd="sng" algn="ctr">
-                      <a:solidFill>
-                        <a:srgbClr val="DDE5E2"/>
-                      </a:solidFill>
-                      <a:prstDash val="solid"/>
-                      <a:round/>
-                      <a:headEnd type="none" w="med" len="med"/>
-                      <a:tailEnd type="none" w="med" len="med"/>
-                    </a:lnT>
-                    <a:lnB w="6350" cap="flat" cmpd="sng" algn="ctr">
-                      <a:solidFill>
-                        <a:srgbClr val="DDE5E2"/>
-                      </a:solidFill>
-                      <a:prstDash val="solid"/>
-                      <a:round/>
-                      <a:headEnd type="none" w="med" len="med"/>
-                      <a:tailEnd type="none" w="med" len="med"/>
-                    </a:lnB>
-                  </a:tcPr>
-                </a:tc>
-                <a:tc>
-                  <a:txBody>
-                    <a:bodyPr/>
-                    <a:lstStyle/>
-                    <a:p>
-                      <a:pPr indent="0" marL="0">
-                        <a:buNone/>
-                      </a:pPr>
-                      <a:r>
-                        <a:rPr lang="en-US" sz="1100" dirty="0">
-                          <a:solidFill>
-                            <a:srgbClr val="1A2B28"/>
-                          </a:solidFill>
-                          <a:latin typeface="Calibri" pitchFamily="34" charset="0"/>
-                          <a:ea typeface="Calibri" pitchFamily="34" charset="-122"/>
-                          <a:cs typeface="Calibri" pitchFamily="34" charset="-120"/>
-                        </a:rPr>
-                        <a:t>62,0%  (2º)</a:t>
-                      </a:r>
-                      <a:endParaRPr lang="en-US" sz="1100" dirty="0">
-                        <a:latin typeface="Calibri" charset="0"/>
-                        <a:ea typeface="Calibri" charset="0"/>
-                        <a:cs typeface="Calibri" charset="0"/>
-                      </a:endParaRPr>
-                    </a:p>
-                  </a:txBody>
-                  <a:tcPr marL="91440" marR="91440" marT="45720" marB="45720" anchor="ctr">
-                    <a:lnL w="6350" cap="flat" cmpd="sng" algn="ctr">
-                      <a:solidFill>
-                        <a:srgbClr val="DDE5E2"/>
-                      </a:solidFill>
-                      <a:prstDash val="solid"/>
-                      <a:round/>
-                      <a:headEnd type="none" w="med" len="med"/>
-                      <a:tailEnd type="none" w="med" len="med"/>
-                    </a:lnL>
-                    <a:lnR w="6350" cap="flat" cmpd="sng" algn="ctr">
-                      <a:solidFill>
-                        <a:srgbClr val="DDE5E2"/>
-                      </a:solidFill>
-                      <a:prstDash val="solid"/>
-                      <a:round/>
-                      <a:headEnd type="none" w="med" len="med"/>
-                      <a:tailEnd type="none" w="med" len="med"/>
-                    </a:lnR>
-                    <a:lnT w="6350" cap="flat" cmpd="sng" algn="ctr">
-                      <a:solidFill>
-                        <a:srgbClr val="DDE5E2"/>
-                      </a:solidFill>
-                      <a:prstDash val="solid"/>
-                      <a:round/>
-                      <a:headEnd type="none" w="med" len="med"/>
-                      <a:tailEnd type="none" w="med" len="med"/>
-                    </a:lnT>
-                    <a:lnB w="6350" cap="flat" cmpd="sng" algn="ctr">
-                      <a:solidFill>
-                        <a:srgbClr val="DDE5E2"/>
-                      </a:solidFill>
-                      <a:prstDash val="solid"/>
-                      <a:round/>
-                      <a:headEnd type="none" w="med" len="med"/>
-                      <a:tailEnd type="none" w="med" len="med"/>
-                    </a:lnB>
-                  </a:tcPr>
-                </a:tc>
-              </a:tr>
-              <a:tr h="347472">
-                <a:tc>
-                  <a:txBody>
-                    <a:bodyPr/>
-                    <a:lstStyle/>
-                    <a:p>
-                      <a:pPr indent="0" marL="0">
-                        <a:buNone/>
-                      </a:pPr>
-                      <a:r>
-                        <a:rPr lang="en-US" sz="1100" dirty="0">
-                          <a:solidFill>
-                            <a:srgbClr val="1A2B28"/>
-                          </a:solidFill>
-                          <a:latin typeface="Calibri" pitchFamily="34" charset="0"/>
-                          <a:ea typeface="Calibri" pitchFamily="34" charset="-122"/>
-                          <a:cs typeface="Calibri" pitchFamily="34" charset="-120"/>
-                        </a:rPr>
-                        <a:t>Sudeste</a:t>
-                      </a:r>
-                      <a:endParaRPr lang="en-US" sz="1100" dirty="0">
-                        <a:latin typeface="Calibri" charset="0"/>
-                        <a:ea typeface="Calibri" charset="0"/>
-                        <a:cs typeface="Calibri" charset="0"/>
-                      </a:endParaRPr>
-                    </a:p>
-                  </a:txBody>
-                  <a:tcPr marL="91440" marR="91440" marT="45720" marB="45720" anchor="ctr">
-                    <a:lnL w="6350" cap="flat" cmpd="sng" algn="ctr">
-                      <a:solidFill>
-                        <a:srgbClr val="DDE5E2"/>
-                      </a:solidFill>
-                      <a:prstDash val="solid"/>
-                      <a:round/>
-                      <a:headEnd type="none" w="med" len="med"/>
-                      <a:tailEnd type="none" w="med" len="med"/>
-                    </a:lnL>
-                    <a:lnR w="6350" cap="flat" cmpd="sng" algn="ctr">
-                      <a:solidFill>
-                        <a:srgbClr val="DDE5E2"/>
-                      </a:solidFill>
-                      <a:prstDash val="solid"/>
-                      <a:round/>
-                      <a:headEnd type="none" w="med" len="med"/>
-                      <a:tailEnd type="none" w="med" len="med"/>
-                    </a:lnR>
-                    <a:lnT w="6350" cap="flat" cmpd="sng" algn="ctr">
-                      <a:solidFill>
-                        <a:srgbClr val="DDE5E2"/>
-                      </a:solidFill>
-                      <a:prstDash val="solid"/>
-                      <a:round/>
-                      <a:headEnd type="none" w="med" len="med"/>
-                      <a:tailEnd type="none" w="med" len="med"/>
-                    </a:lnT>
-                    <a:lnB w="6350" cap="flat" cmpd="sng" algn="ctr">
-                      <a:solidFill>
-                        <a:srgbClr val="DDE5E2"/>
-                      </a:solidFill>
-                      <a:prstDash val="solid"/>
-                      <a:round/>
-                      <a:headEnd type="none" w="med" len="med"/>
-                      <a:tailEnd type="none" w="med" len="med"/>
-                    </a:lnB>
-                  </a:tcPr>
-                </a:tc>
-                <a:tc>
-                  <a:txBody>
-                    <a:bodyPr/>
-                    <a:lstStyle/>
-                    <a:p>
-                      <a:pPr indent="0" marL="0">
-                        <a:buNone/>
-                      </a:pPr>
-                      <a:r>
-                        <a:rPr lang="en-US" sz="1100" dirty="0">
-                          <a:solidFill>
-                            <a:srgbClr val="1A2B28"/>
-                          </a:solidFill>
-                          <a:latin typeface="Calibri" pitchFamily="34" charset="0"/>
-                          <a:ea typeface="Calibri" pitchFamily="34" charset="-122"/>
-                          <a:cs typeface="Calibri" pitchFamily="34" charset="-120"/>
-                        </a:rPr>
-                        <a:t>53,6%  (2º)</a:t>
-                      </a:r>
-                      <a:endParaRPr lang="en-US" sz="1100" dirty="0">
-                        <a:latin typeface="Calibri" charset="0"/>
-                        <a:ea typeface="Calibri" charset="0"/>
-                        <a:cs typeface="Calibri" charset="0"/>
-                      </a:endParaRPr>
-                    </a:p>
-                  </a:txBody>
-                  <a:tcPr marL="91440" marR="91440" marT="45720" marB="45720" anchor="ctr">
-                    <a:lnL w="6350" cap="flat" cmpd="sng" algn="ctr">
-                      <a:solidFill>
-                        <a:srgbClr val="DDE5E2"/>
-                      </a:solidFill>
-                      <a:prstDash val="solid"/>
-                      <a:round/>
-                      <a:headEnd type="none" w="med" len="med"/>
-                      <a:tailEnd type="none" w="med" len="med"/>
-                    </a:lnL>
-                    <a:lnR w="6350" cap="flat" cmpd="sng" algn="ctr">
-                      <a:solidFill>
-                        <a:srgbClr val="DDE5E2"/>
-                      </a:solidFill>
-                      <a:prstDash val="solid"/>
-                      <a:round/>
-                      <a:headEnd type="none" w="med" len="med"/>
-                      <a:tailEnd type="none" w="med" len="med"/>
-                    </a:lnR>
-                    <a:lnT w="6350" cap="flat" cmpd="sng" algn="ctr">
-                      <a:solidFill>
-                        <a:srgbClr val="DDE5E2"/>
-                      </a:solidFill>
-                      <a:prstDash val="solid"/>
-                      <a:round/>
-                      <a:headEnd type="none" w="med" len="med"/>
-                      <a:tailEnd type="none" w="med" len="med"/>
-                    </a:lnT>
-                    <a:lnB w="6350" cap="flat" cmpd="sng" algn="ctr">
-                      <a:solidFill>
-                        <a:srgbClr val="DDE5E2"/>
-                      </a:solidFill>
-                      <a:prstDash val="solid"/>
-                      <a:round/>
-                      <a:headEnd type="none" w="med" len="med"/>
-                      <a:tailEnd type="none" w="med" len="med"/>
-                    </a:lnB>
-                  </a:tcPr>
-                </a:tc>
-                <a:tc>
-                  <a:txBody>
-                    <a:bodyPr/>
-                    <a:lstStyle/>
-                    <a:p>
-                      <a:pPr indent="0" marL="0">
-                        <a:buNone/>
-                      </a:pPr>
-                      <a:r>
-                        <a:rPr lang="en-US" sz="1100" dirty="0">
-                          <a:solidFill>
-                            <a:srgbClr val="1A2B28"/>
-                          </a:solidFill>
-                          <a:latin typeface="Calibri" pitchFamily="34" charset="0"/>
-                          <a:ea typeface="Calibri" pitchFamily="34" charset="-122"/>
-                          <a:cs typeface="Calibri" pitchFamily="34" charset="-120"/>
-                        </a:rPr>
-                        <a:t>61,3%  (3º)</a:t>
-                      </a:r>
-                      <a:endParaRPr lang="en-US" sz="1100" dirty="0">
-                        <a:latin typeface="Calibri" charset="0"/>
-                        <a:ea typeface="Calibri" charset="0"/>
-                        <a:cs typeface="Calibri" charset="0"/>
-                      </a:endParaRPr>
-                    </a:p>
-                  </a:txBody>
-                  <a:tcPr marL="91440" marR="91440" marT="45720" marB="45720" anchor="ctr">
-                    <a:lnL w="6350" cap="flat" cmpd="sng" algn="ctr">
-                      <a:solidFill>
-                        <a:srgbClr val="DDE5E2"/>
-                      </a:solidFill>
-                      <a:prstDash val="solid"/>
-                      <a:round/>
-                      <a:headEnd type="none" w="med" len="med"/>
-                      <a:tailEnd type="none" w="med" len="med"/>
-                    </a:lnL>
-                    <a:lnR w="6350" cap="flat" cmpd="sng" algn="ctr">
-                      <a:solidFill>
-                        <a:srgbClr val="DDE5E2"/>
-                      </a:solidFill>
-                      <a:prstDash val="solid"/>
-                      <a:round/>
-                      <a:headEnd type="none" w="med" len="med"/>
-                      <a:tailEnd type="none" w="med" len="med"/>
-                    </a:lnR>
-                    <a:lnT w="6350" cap="flat" cmpd="sng" algn="ctr">
-                      <a:solidFill>
-                        <a:srgbClr val="DDE5E2"/>
-                      </a:solidFill>
-                      <a:prstDash val="solid"/>
-                      <a:round/>
-                      <a:headEnd type="none" w="med" len="med"/>
-                      <a:tailEnd type="none" w="med" len="med"/>
-                    </a:lnT>
-                    <a:lnB w="6350" cap="flat" cmpd="sng" algn="ctr">
-                      <a:solidFill>
-                        <a:srgbClr val="DDE5E2"/>
-                      </a:solidFill>
-                      <a:prstDash val="solid"/>
-                      <a:round/>
-                      <a:headEnd type="none" w="med" len="med"/>
-                      <a:tailEnd type="none" w="med" len="med"/>
-                    </a:lnB>
-                  </a:tcPr>
-                </a:tc>
-              </a:tr>
-              <a:tr h="347472">
-                <a:tc>
-                  <a:txBody>
-                    <a:bodyPr/>
-                    <a:lstStyle/>
-                    <a:p>
-                      <a:pPr indent="0" marL="0">
-                        <a:buNone/>
-                      </a:pPr>
-                      <a:r>
-                        <a:rPr lang="en-US" sz="1100" dirty="0">
-                          <a:solidFill>
-                            <a:srgbClr val="1A2B28"/>
-                          </a:solidFill>
-                          <a:latin typeface="Calibri" pitchFamily="34" charset="0"/>
-                          <a:ea typeface="Calibri" pitchFamily="34" charset="-122"/>
-                          <a:cs typeface="Calibri" pitchFamily="34" charset="-120"/>
-                        </a:rPr>
-                        <a:t>Nordeste</a:t>
-                      </a:r>
-                      <a:endParaRPr lang="en-US" sz="1100" dirty="0">
-                        <a:latin typeface="Calibri" charset="0"/>
-                        <a:ea typeface="Calibri" charset="0"/>
-                        <a:cs typeface="Calibri" charset="0"/>
-                      </a:endParaRPr>
-                    </a:p>
-                  </a:txBody>
-                  <a:tcPr marL="91440" marR="91440" marT="45720" marB="45720" anchor="ctr">
-                    <a:lnL w="6350" cap="flat" cmpd="sng" algn="ctr">
-                      <a:solidFill>
-                        <a:srgbClr val="DDE5E2"/>
-                      </a:solidFill>
-                      <a:prstDash val="solid"/>
-                      <a:round/>
-                      <a:headEnd type="none" w="med" len="med"/>
-                      <a:tailEnd type="none" w="med" len="med"/>
-                    </a:lnL>
-                    <a:lnR w="6350" cap="flat" cmpd="sng" algn="ctr">
-                      <a:solidFill>
-                        <a:srgbClr val="DDE5E2"/>
-                      </a:solidFill>
-                      <a:prstDash val="solid"/>
-                      <a:round/>
-                      <a:headEnd type="none" w="med" len="med"/>
-                      <a:tailEnd type="none" w="med" len="med"/>
-                    </a:lnR>
-                    <a:lnT w="6350" cap="flat" cmpd="sng" algn="ctr">
-                      <a:solidFill>
-                        <a:srgbClr val="DDE5E2"/>
-                      </a:solidFill>
-                      <a:prstDash val="solid"/>
-                      <a:round/>
-                      <a:headEnd type="none" w="med" len="med"/>
-                      <a:tailEnd type="none" w="med" len="med"/>
-                    </a:lnT>
-                    <a:lnB w="6350" cap="flat" cmpd="sng" algn="ctr">
-                      <a:solidFill>
-                        <a:srgbClr val="DDE5E2"/>
-                      </a:solidFill>
-                      <a:prstDash val="solid"/>
-                      <a:round/>
-                      <a:headEnd type="none" w="med" len="med"/>
-                      <a:tailEnd type="none" w="med" len="med"/>
-                    </a:lnB>
-                  </a:tcPr>
-                </a:tc>
-                <a:tc>
-                  <a:txBody>
-                    <a:bodyPr/>
-                    <a:lstStyle/>
-                    <a:p>
-                      <a:pPr indent="0" marL="0">
-                        <a:buNone/>
-                      </a:pPr>
-                      <a:r>
-                        <a:rPr lang="en-US" sz="1100" dirty="0">
-                          <a:solidFill>
-                            <a:srgbClr val="1A2B28"/>
-                          </a:solidFill>
-                          <a:latin typeface="Calibri" pitchFamily="34" charset="0"/>
-                          <a:ea typeface="Calibri" pitchFamily="34" charset="-122"/>
-                          <a:cs typeface="Calibri" pitchFamily="34" charset="-120"/>
-                        </a:rPr>
-                        <a:t>50,6%  (4º)</a:t>
-                      </a:r>
-                      <a:endParaRPr lang="en-US" sz="1100" dirty="0">
-                        <a:latin typeface="Calibri" charset="0"/>
-                        <a:ea typeface="Calibri" charset="0"/>
-                        <a:cs typeface="Calibri" charset="0"/>
-                      </a:endParaRPr>
-                    </a:p>
-                  </a:txBody>
-                  <a:tcPr marL="91440" marR="91440" marT="45720" marB="45720" anchor="ctr">
-                    <a:lnL w="6350" cap="flat" cmpd="sng" algn="ctr">
-                      <a:solidFill>
-                        <a:srgbClr val="DDE5E2"/>
-                      </a:solidFill>
-                      <a:prstDash val="solid"/>
-                      <a:round/>
-                      <a:headEnd type="none" w="med" len="med"/>
-                      <a:tailEnd type="none" w="med" len="med"/>
-                    </a:lnL>
-                    <a:lnR w="6350" cap="flat" cmpd="sng" algn="ctr">
-                      <a:solidFill>
-                        <a:srgbClr val="DDE5E2"/>
-                      </a:solidFill>
-                      <a:prstDash val="solid"/>
-                      <a:round/>
-                      <a:headEnd type="none" w="med" len="med"/>
-                      <a:tailEnd type="none" w="med" len="med"/>
-                    </a:lnR>
-                    <a:lnT w="6350" cap="flat" cmpd="sng" algn="ctr">
-                      <a:solidFill>
-                        <a:srgbClr val="DDE5E2"/>
-                      </a:solidFill>
-                      <a:prstDash val="solid"/>
-                      <a:round/>
-                      <a:headEnd type="none" w="med" len="med"/>
-                      <a:tailEnd type="none" w="med" len="med"/>
-                    </a:lnT>
-                    <a:lnB w="6350" cap="flat" cmpd="sng" algn="ctr">
-                      <a:solidFill>
-                        <a:srgbClr val="DDE5E2"/>
-                      </a:solidFill>
-                      <a:prstDash val="solid"/>
-                      <a:round/>
-                      <a:headEnd type="none" w="med" len="med"/>
-                      <a:tailEnd type="none" w="med" len="med"/>
-                    </a:lnB>
-                  </a:tcPr>
-                </a:tc>
-                <a:tc>
-                  <a:txBody>
-                    <a:bodyPr/>
-                    <a:lstStyle/>
-                    <a:p>
-                      <a:pPr indent="0" marL="0">
-                        <a:buNone/>
-                      </a:pPr>
-                      <a:r>
-                        <a:rPr lang="en-US" sz="1100" dirty="0">
-                          <a:solidFill>
-                            <a:srgbClr val="1A2B28"/>
-                          </a:solidFill>
-                          <a:latin typeface="Calibri" pitchFamily="34" charset="0"/>
-                          <a:ea typeface="Calibri" pitchFamily="34" charset="-122"/>
-                          <a:cs typeface="Calibri" pitchFamily="34" charset="-120"/>
-                        </a:rPr>
-                        <a:t>55,8%  (4º)</a:t>
-                      </a:r>
-                      <a:endParaRPr lang="en-US" sz="1100" dirty="0">
-                        <a:latin typeface="Calibri" charset="0"/>
-                        <a:ea typeface="Calibri" charset="0"/>
-                        <a:cs typeface="Calibri" charset="0"/>
-                      </a:endParaRPr>
-                    </a:p>
-                  </a:txBody>
-                  <a:tcPr marL="91440" marR="91440" marT="45720" marB="45720" anchor="ctr">
-                    <a:lnL w="6350" cap="flat" cmpd="sng" algn="ctr">
-                      <a:solidFill>
-                        <a:srgbClr val="DDE5E2"/>
-                      </a:solidFill>
-                      <a:prstDash val="solid"/>
-                      <a:round/>
-                      <a:headEnd type="none" w="med" len="med"/>
-                      <a:tailEnd type="none" w="med" len="med"/>
-                    </a:lnL>
-                    <a:lnR w="6350" cap="flat" cmpd="sng" algn="ctr">
-                      <a:solidFill>
-                        <a:srgbClr val="DDE5E2"/>
-                      </a:solidFill>
-                      <a:prstDash val="solid"/>
-                      <a:round/>
-                      <a:headEnd type="none" w="med" len="med"/>
-                      <a:tailEnd type="none" w="med" len="med"/>
-                    </a:lnR>
-                    <a:lnT w="6350" cap="flat" cmpd="sng" algn="ctr">
-                      <a:solidFill>
-                        <a:srgbClr val="DDE5E2"/>
-                      </a:solidFill>
-                      <a:prstDash val="solid"/>
-                      <a:round/>
-                      <a:headEnd type="none" w="med" len="med"/>
-                      <a:tailEnd type="none" w="med" len="med"/>
-                    </a:lnT>
-                    <a:lnB w="6350" cap="flat" cmpd="sng" algn="ctr">
-                      <a:solidFill>
-                        <a:srgbClr val="DDE5E2"/>
-                      </a:solidFill>
-                      <a:prstDash val="solid"/>
-                      <a:round/>
-                      <a:headEnd type="none" w="med" len="med"/>
-                      <a:tailEnd type="none" w="med" len="med"/>
-                    </a:lnB>
-                  </a:tcPr>
-                </a:tc>
-              </a:tr>
-              <a:tr h="347472">
-                <a:tc>
-                  <a:txBody>
-                    <a:bodyPr/>
-                    <a:lstStyle/>
-                    <a:p>
-                      <a:pPr indent="0" marL="0">
-                        <a:buNone/>
-                      </a:pPr>
-                      <a:r>
-                        <a:rPr lang="en-US" sz="1100" dirty="0">
-                          <a:solidFill>
-                            <a:srgbClr val="1A2B28"/>
-                          </a:solidFill>
-                          <a:latin typeface="Calibri" pitchFamily="34" charset="0"/>
-                          <a:ea typeface="Calibri" pitchFamily="34" charset="-122"/>
-                          <a:cs typeface="Calibri" pitchFamily="34" charset="-120"/>
-                        </a:rPr>
-                        <a:t>Norte</a:t>
-                      </a:r>
-                      <a:endParaRPr lang="en-US" sz="1100" dirty="0">
-                        <a:latin typeface="Calibri" charset="0"/>
-                        <a:ea typeface="Calibri" charset="0"/>
-                        <a:cs typeface="Calibri" charset="0"/>
-                      </a:endParaRPr>
-                    </a:p>
-                  </a:txBody>
-                  <a:tcPr marL="91440" marR="91440" marT="45720" marB="45720" anchor="ctr">
-                    <a:lnL w="6350" cap="flat" cmpd="sng" algn="ctr">
-                      <a:solidFill>
-                        <a:srgbClr val="DDE5E2"/>
-                      </a:solidFill>
-                      <a:prstDash val="solid"/>
-                      <a:round/>
-                      <a:headEnd type="none" w="med" len="med"/>
-                      <a:tailEnd type="none" w="med" len="med"/>
-                    </a:lnL>
-                    <a:lnR w="6350" cap="flat" cmpd="sng" algn="ctr">
-                      <a:solidFill>
-                        <a:srgbClr val="DDE5E2"/>
-                      </a:solidFill>
-                      <a:prstDash val="solid"/>
-                      <a:round/>
-                      <a:headEnd type="none" w="med" len="med"/>
-                      <a:tailEnd type="none" w="med" len="med"/>
-                    </a:lnR>
-                    <a:lnT w="6350" cap="flat" cmpd="sng" algn="ctr">
-                      <a:solidFill>
-                        <a:srgbClr val="DDE5E2"/>
-                      </a:solidFill>
-                      <a:prstDash val="solid"/>
-                      <a:round/>
-                      <a:headEnd type="none" w="med" len="med"/>
-                      <a:tailEnd type="none" w="med" len="med"/>
-                    </a:lnT>
-                    <a:lnB w="6350" cap="flat" cmpd="sng" algn="ctr">
-                      <a:solidFill>
-                        <a:srgbClr val="DDE5E2"/>
-                      </a:solidFill>
-                      <a:prstDash val="solid"/>
-                      <a:round/>
-                      <a:headEnd type="none" w="med" len="med"/>
-                      <a:tailEnd type="none" w="med" len="med"/>
-                    </a:lnB>
-                  </a:tcPr>
-                </a:tc>
-                <a:tc>
-                  <a:txBody>
-                    <a:bodyPr/>
-                    <a:lstStyle/>
-                    <a:p>
-                      <a:pPr indent="0" marL="0">
-                        <a:buNone/>
-                      </a:pPr>
-                      <a:r>
-                        <a:rPr lang="en-US" sz="1100" dirty="0">
-                          <a:solidFill>
-                            <a:srgbClr val="1A2B28"/>
-                          </a:solidFill>
-                          <a:latin typeface="Calibri" pitchFamily="34" charset="0"/>
-                          <a:ea typeface="Calibri" pitchFamily="34" charset="-122"/>
-                          <a:cs typeface="Calibri" pitchFamily="34" charset="-120"/>
-                        </a:rPr>
-                        <a:t>41,8%  (5º)</a:t>
-                      </a:r>
-                      <a:endParaRPr lang="en-US" sz="1100" dirty="0">
-                        <a:latin typeface="Calibri" charset="0"/>
-                        <a:ea typeface="Calibri" charset="0"/>
-                        <a:cs typeface="Calibri" charset="0"/>
-                      </a:endParaRPr>
-                    </a:p>
-                  </a:txBody>
-                  <a:tcPr marL="91440" marR="91440" marT="45720" marB="45720" anchor="ctr">
-                    <a:lnL w="6350" cap="flat" cmpd="sng" algn="ctr">
-                      <a:solidFill>
-                        <a:srgbClr val="DDE5E2"/>
-                      </a:solidFill>
-                      <a:prstDash val="solid"/>
-                      <a:round/>
-                      <a:headEnd type="none" w="med" len="med"/>
-                      <a:tailEnd type="none" w="med" len="med"/>
-                    </a:lnL>
-                    <a:lnR w="6350" cap="flat" cmpd="sng" algn="ctr">
-                      <a:solidFill>
-                        <a:srgbClr val="DDE5E2"/>
-                      </a:solidFill>
-                      <a:prstDash val="solid"/>
-                      <a:round/>
-                      <a:headEnd type="none" w="med" len="med"/>
-                      <a:tailEnd type="none" w="med" len="med"/>
-                    </a:lnR>
-                    <a:lnT w="6350" cap="flat" cmpd="sng" algn="ctr">
-                      <a:solidFill>
-                        <a:srgbClr val="DDE5E2"/>
-                      </a:solidFill>
-                      <a:prstDash val="solid"/>
-                      <a:round/>
-                      <a:headEnd type="none" w="med" len="med"/>
-                      <a:tailEnd type="none" w="med" len="med"/>
-                    </a:lnT>
-                    <a:lnB w="6350" cap="flat" cmpd="sng" algn="ctr">
-                      <a:solidFill>
-                        <a:srgbClr val="DDE5E2"/>
-                      </a:solidFill>
-                      <a:prstDash val="solid"/>
-                      <a:round/>
-                      <a:headEnd type="none" w="med" len="med"/>
-                      <a:tailEnd type="none" w="med" len="med"/>
-                    </a:lnB>
-                  </a:tcPr>
-                </a:tc>
-                <a:tc>
-                  <a:txBody>
-                    <a:bodyPr/>
-                    <a:lstStyle/>
-                    <a:p>
-                      <a:pPr indent="0" marL="0">
-                        <a:buNone/>
-                      </a:pPr>
-                      <a:r>
-                        <a:rPr lang="en-US" sz="1100" dirty="0">
-                          <a:solidFill>
-                            <a:srgbClr val="1A2B28"/>
-                          </a:solidFill>
-                          <a:latin typeface="Calibri" pitchFamily="34" charset="0"/>
-                          <a:ea typeface="Calibri" pitchFamily="34" charset="-122"/>
-                          <a:cs typeface="Calibri" pitchFamily="34" charset="-120"/>
-                        </a:rPr>
-                        <a:t>50,9%  (5º)</a:t>
-                      </a:r>
-                      <a:endParaRPr lang="en-US" sz="1100" dirty="0">
-                        <a:latin typeface="Calibri" charset="0"/>
-                        <a:ea typeface="Calibri" charset="0"/>
-                        <a:cs typeface="Calibri" charset="0"/>
-                      </a:endParaRPr>
-                    </a:p>
-                  </a:txBody>
-                  <a:tcPr marL="91440" marR="91440" marT="45720" marB="45720" anchor="ctr">
-                    <a:lnL w="6350" cap="flat" cmpd="sng" algn="ctr">
-                      <a:solidFill>
-                        <a:srgbClr val="DDE5E2"/>
-                      </a:solidFill>
-                      <a:prstDash val="solid"/>
-                      <a:round/>
-                      <a:headEnd type="none" w="med" len="med"/>
-                      <a:tailEnd type="none" w="med" len="med"/>
-                    </a:lnL>
-                    <a:lnR w="6350" cap="flat" cmpd="sng" algn="ctr">
-                      <a:solidFill>
-                        <a:srgbClr val="DDE5E2"/>
-                      </a:solidFill>
-                      <a:prstDash val="solid"/>
-                      <a:round/>
-                      <a:headEnd type="none" w="med" len="med"/>
-                      <a:tailEnd type="none" w="med" len="med"/>
-                    </a:lnR>
-                    <a:lnT w="6350" cap="flat" cmpd="sng" algn="ctr">
-                      <a:solidFill>
-                        <a:srgbClr val="DDE5E2"/>
-                      </a:solidFill>
-                      <a:prstDash val="solid"/>
-                      <a:round/>
-                      <a:headEnd type="none" w="med" len="med"/>
-                      <a:tailEnd type="none" w="med" len="med"/>
-                    </a:lnT>
-                    <a:lnB w="6350" cap="flat" cmpd="sng" algn="ctr">
-                      <a:solidFill>
-                        <a:srgbClr val="DDE5E2"/>
-                      </a:solidFill>
-                      <a:prstDash val="solid"/>
-                      <a:round/>
-                      <a:headEnd type="none" w="med" len="med"/>
-                      <a:tailEnd type="none" w="med" len="med"/>
-                    </a:lnB>
-                  </a:tcPr>
-                </a:tc>
-              </a:tr>
-            </a:tbl>
-          </a:graphicData>
-        </a:graphic>
-      </p:graphicFrame>
+              <a:t>O modelo entregou 3,8 e reprovou. A pipeline parou.</a:t>
+            </a:r>
+            <a:endParaRPr lang="en-US" sz="1500" dirty="0"/>
+          </a:p>
+          <a:p>
+            <a:pPr indent="0" marL="0">
+              <a:lnSpc>
+                <a:spcPct val="132000"/>
+              </a:lnSpc>
+              <a:buNone/>
+            </a:pPr>
+            <a:endParaRPr lang="en-US" sz="1500" dirty="0"/>
+          </a:p>
+          <a:p>
+            <a:pPr indent="0" marL="0">
+              <a:lnSpc>
+                <a:spcPct val="132000"/>
+              </a:lnSpc>
+              <a:buNone/>
+            </a:pPr>
+            <a:r>
+              <a:rPr lang="en-US" sz="1500" dirty="0">
+                <a:solidFill>
+                  <a:srgbClr val="1A2B28"/>
+                </a:solidFill>
+                <a:latin typeface="Calibri" pitchFamily="34" charset="0"/>
+                <a:ea typeface="Calibri" pitchFamily="34" charset="-122"/>
+                <a:cs typeface="Calibri" pitchFamily="34" charset="-120"/>
+              </a:rPr>
+              <a:t>Fomos medir o teto. Nem a taxa real do município alcançaria os 5 pontos: o critério era impossível.</a:t>
+            </a:r>
+            <a:endParaRPr lang="en-US" sz="1500" dirty="0"/>
+          </a:p>
+          <a:p>
+            <a:pPr indent="0" marL="0">
+              <a:lnSpc>
+                <a:spcPct val="132000"/>
+              </a:lnSpc>
+              <a:buNone/>
+            </a:pPr>
+            <a:endParaRPr lang="en-US" sz="1500" dirty="0"/>
+          </a:p>
+          <a:p>
+            <a:pPr indent="0" marL="0">
+              <a:lnSpc>
+                <a:spcPct val="132000"/>
+              </a:lnSpc>
+              <a:buNone/>
+            </a:pPr>
+            <a:r>
+              <a:rPr lang="en-US" sz="1500" dirty="0">
+                <a:solidFill>
+                  <a:srgbClr val="1A2B28"/>
+                </a:solidFill>
+                <a:latin typeface="Calibri" pitchFamily="34" charset="0"/>
+                <a:ea typeface="Calibri" pitchFamily="34" charset="-122"/>
+                <a:cs typeface="Calibri" pitchFamily="34" charset="-120"/>
+              </a:rPr>
+              <a:t>A curva confirma que mais dados não ajudariam.</a:t>
+            </a:r>
+            <a:endParaRPr lang="en-US" sz="1500" dirty="0"/>
+          </a:p>
+        </p:txBody>
+      </p:sp>
+      <p:pic>
+        <p:nvPicPr>
+          <p:cNvPr id="5" name="Image 0" descr="/Users/thiago/Documents/ARQUIVOS PÓS/FASE 3/tech-challenge-fase3/images/11_curva_aprendizado.png">    </p:cNvPr>
+          <p:cNvPicPr>
+            <a:picLocks noChangeAspect="1"/>
+          </p:cNvPicPr>
+          <p:nvPr/>
+        </p:nvPicPr>
+        <p:blipFill>
+          <a:blip r:embed="rId1"/>
+          <a:stretch>
+            <a:fillRect/>
+          </a:stretch>
+        </p:blipFill>
+        <p:spPr>
+          <a:xfrm>
+            <a:off x="6400800" y="1828800"/>
+            <a:ext cx="5029200" cy="3639312"/>
+          </a:xfrm>
+          <a:prstGeom prst="rect">
+            <a:avLst/>
+          </a:prstGeom>
+        </p:spPr>
+      </p:pic>
       <p:sp>
         <p:nvSpPr>
           <p:cNvPr id="6" name="Text 3"/>
@@ -6564,8 +4788,8 @@
         </p:nvSpPr>
         <p:spPr>
           <a:xfrm>
-            <a:off x="548640" y="6263640"/>
-            <a:ext cx="11064240" cy="274320"/>
+            <a:off x="6400800" y="5559552"/>
+            <a:ext cx="5029200" cy="292608"/>
           </a:xfrm>
           <a:prstGeom prst="rect">
             <a:avLst/>
@@ -6577,7 +4801,7 @@
           <a:bodyPr wrap="square" lIns="0" tIns="0" rIns="0" bIns="0" rtlCol="0" anchor="ctr"/>
           <a:lstStyle/>
           <a:p>
-            <a:pPr indent="0" marL="0">
+            <a:pPr algn="ctr" indent="0" marL="0">
               <a:buNone/>
             </a:pPr>
             <a:r>
@@ -6589,7 +4813,7 @@
                 <a:ea typeface="Calibri" pitchFamily="34" charset="-122"/>
                 <a:cs typeface="Calibri" pitchFamily="34" charset="-120"/>
               </a:rPr>
-              <a:t>O Sul avança doze pontos quando a ausência é separada do desempenho.</a:t>
+              <a:t>ROC-AUC por volume de treino: de 224 mil a 1,49 milhão de alunos.</a:t>
             </a:r>
             <a:endParaRPr lang="en-US" sz="1050" dirty="0"/>
           </a:p>
@@ -6653,7 +4877,7 @@
                 <a:ea typeface="Calibri" pitchFamily="34" charset="-122"/>
                 <a:cs typeface="Calibri" pitchFamily="34" charset="-120"/>
               </a:rPr>
-              <a:t>MODELAGEM</a:t>
+              <a:t>O ACHADO CENTRAL</a:t>
             </a:r>
             <a:endParaRPr lang="en-US" sz="1200" dirty="0"/>
           </a:p>
@@ -6684,7 +4908,7 @@
               <a:buNone/>
             </a:pPr>
             <a:r>
-              <a:rPr lang="en-US" sz="3400" b="1" dirty="0">
+              <a:rPr lang="en-US" sz="3200" b="1" dirty="0">
                 <a:solidFill>
                   <a:srgbClr val="1A2B28"/>
                 </a:solidFill>
@@ -6692,9 +4916,9 @@
                 <a:ea typeface="Calibri" pitchFamily="34" charset="-122"/>
                 <a:cs typeface="Calibri" pitchFamily="34" charset="-120"/>
               </a:rPr>
-              <a:t>O modelo e seus limites</a:t>
-            </a:r>
-            <a:endParaRPr lang="en-US" sz="3400" dirty="0"/>
+              <a:t>Erra no aluno, acerta no município</a:t>
+            </a:r>
+            <a:endParaRPr lang="en-US" sz="3200" dirty="0"/>
           </a:p>
         </p:txBody>
       </p:sp>
@@ -6706,8 +4930,8 @@
         </p:nvSpPr>
         <p:spPr>
           <a:xfrm>
-            <a:off x="548640" y="1554480"/>
-            <a:ext cx="6309360" cy="4023360"/>
+            <a:off x="548640" y="1600200"/>
+            <a:ext cx="5029200" cy="4206240"/>
           </a:xfrm>
           <a:prstGeom prst="rect">
             <a:avLst/>
@@ -6721,12 +4945,12 @@
           <a:p>
             <a:pPr indent="0" marL="0">
               <a:lnSpc>
-                <a:spcPct val="130000"/>
+                <a:spcPct val="132000"/>
               </a:lnSpc>
               <a:buNone/>
             </a:pPr>
             <a:r>
-              <a:rPr lang="en-US" sz="1600" dirty="0">
+              <a:rPr lang="en-US" sz="1500" dirty="0">
                 <a:solidFill>
                   <a:srgbClr val="1A2B28"/>
                 </a:solidFill>
@@ -6734,28 +4958,28 @@
                 <a:ea typeface="Calibri" pitchFamily="34" charset="-122"/>
                 <a:cs typeface="Calibri" pitchFamily="34" charset="-120"/>
               </a:rPr>
-              <a:t>Gradient boosting sobre pipeline com pré-processamento integrado. Validação agrupada por município: o modelo é testado em territórios que nunca viu.</a:t>
-            </a:r>
-            <a:endParaRPr lang="en-US" sz="1600" dirty="0"/>
+              <a:t>No grão da criança o modelo é modesto: ROC-AUC de 0,66.</a:t>
+            </a:r>
+            <a:endParaRPr lang="en-US" sz="1500" dirty="0"/>
           </a:p>
           <a:p>
             <a:pPr indent="0" marL="0">
               <a:lnSpc>
-                <a:spcPct val="130000"/>
+                <a:spcPct val="132000"/>
               </a:lnSpc>
               <a:buNone/>
             </a:pPr>
-            <a:endParaRPr lang="en-US" sz="1600" dirty="0"/>
+            <a:endParaRPr lang="en-US" sz="1500" dirty="0"/>
           </a:p>
           <a:p>
             <a:pPr indent="0" marL="0">
               <a:lnSpc>
-                <a:spcPct val="130000"/>
+                <a:spcPct val="132000"/>
               </a:lnSpc>
               <a:buNone/>
             </a:pPr>
             <a:r>
-              <a:rPr lang="en-US" sz="1600" dirty="0">
+              <a:rPr lang="en-US" sz="1500" dirty="0">
                 <a:solidFill>
                   <a:srgbClr val="1A2B28"/>
                 </a:solidFill>
@@ -6763,49 +4987,104 @@
                 <a:ea typeface="Calibri" pitchFamily="34" charset="-122"/>
                 <a:cs typeface="Calibri" pitchFamily="34" charset="-120"/>
               </a:rPr>
-              <a:t>Os limiares foram escritos antes de treinar. Um reprovou e se mostrou inatingível.</a:t>
-            </a:r>
-            <a:endParaRPr lang="en-US" sz="1600" dirty="0"/>
-          </a:p>
-        </p:txBody>
-      </p:sp>
-      <p:sp>
-        <p:nvSpPr>
-          <p:cNvPr id="5" name="Shape 3"/>
-          <p:cNvSpPr/>
-          <p:nvPr/>
-        </p:nvSpPr>
-        <p:spPr>
-          <a:xfrm>
-            <a:off x="7406640" y="1737360"/>
-            <a:ext cx="2011680" cy="1554480"/>
-          </a:xfrm>
-          <a:prstGeom prst="roundRect">
-            <a:avLst>
-              <a:gd name="adj" fmla="val 4706"/>
-            </a:avLst>
-          </a:prstGeom>
-          <a:solidFill>
-            <a:srgbClr val="F2F6F4"/>
-          </a:solidFill>
-          <a:ln w="12700">
-            <a:solidFill>
-              <a:srgbClr val="F2F6F4"/>
-            </a:solidFill>
-            <a:prstDash val="solid"/>
-          </a:ln>
-        </p:spPr>
-      </p:sp>
-      <p:sp>
-        <p:nvSpPr>
-          <p:cNvPr id="6" name="Text 4"/>
-          <p:cNvSpPr txBox="1"/>
-          <p:nvPr/>
-        </p:nvSpPr>
-        <p:spPr>
-          <a:xfrm>
-            <a:off x="7543800" y="1901952"/>
-            <a:ext cx="1737360" cy="868680"/>
+              <a:t>Agregando as predições por município, a correlação com o resultado real é de 0,83.</a:t>
+            </a:r>
+            <a:endParaRPr lang="en-US" sz="1500" dirty="0"/>
+          </a:p>
+          <a:p>
+            <a:pPr indent="0" marL="0">
+              <a:lnSpc>
+                <a:spcPct val="132000"/>
+              </a:lnSpc>
+              <a:buNone/>
+            </a:pPr>
+            <a:endParaRPr lang="en-US" sz="1500" dirty="0"/>
+          </a:p>
+          <a:p>
+            <a:pPr indent="0" marL="0">
+              <a:lnSpc>
+                <a:spcPct val="132000"/>
+              </a:lnSpc>
+              <a:buNone/>
+            </a:pPr>
+            <a:r>
+              <a:rPr lang="en-US" sz="1500" dirty="0">
+                <a:solidFill>
+                  <a:srgbClr val="1A2B28"/>
+                </a:solidFill>
+                <a:latin typeface="Calibri" pitchFamily="34" charset="0"/>
+                <a:ea typeface="Calibri" pitchFamily="34" charset="-122"/>
+                <a:cs typeface="Calibri" pitchFamily="34" charset="-120"/>
+              </a:rPr>
+              <a:t>Os erros individuais são grandes, mas não sistemáticos, e se cancelam na média.</a:t>
+            </a:r>
+            <a:endParaRPr lang="en-US" sz="1500" dirty="0"/>
+          </a:p>
+          <a:p>
+            <a:pPr indent="0" marL="0">
+              <a:lnSpc>
+                <a:spcPct val="132000"/>
+              </a:lnSpc>
+              <a:buNone/>
+            </a:pPr>
+            <a:endParaRPr lang="en-US" sz="1500" dirty="0"/>
+          </a:p>
+          <a:p>
+            <a:pPr indent="0" marL="0">
+              <a:lnSpc>
+                <a:spcPct val="132000"/>
+              </a:lnSpc>
+              <a:buNone/>
+            </a:pPr>
+            <a:r>
+              <a:rPr lang="en-US" sz="1500" dirty="0">
+                <a:solidFill>
+                  <a:srgbClr val="1A2B28"/>
+                </a:solidFill>
+                <a:latin typeface="Calibri" pitchFamily="34" charset="0"/>
+                <a:ea typeface="Calibri" pitchFamily="34" charset="-122"/>
+                <a:cs typeface="Calibri" pitchFamily="34" charset="-120"/>
+              </a:rPr>
+              <a:t>O modelo não sabe qual criança não será alfabetizada. Sabe quantas não serão.</a:t>
+            </a:r>
+            <a:endParaRPr lang="en-US" sz="1500" dirty="0"/>
+          </a:p>
+        </p:txBody>
+      </p:sp>
+      <p:pic>
+        <p:nvPicPr>
+          <p:cNvPr id="5" name="Image 0" descr="/Users/thiago/Documents/ARQUIVOS PÓS/FASE 3/tech-challenge-fase3/images/10_agregacao_municipio.png">    </p:cNvPr>
+          <p:cNvPicPr>
+            <a:picLocks noChangeAspect="1"/>
+          </p:cNvPicPr>
+          <p:nvPr/>
+        </p:nvPicPr>
+        <p:blipFill>
+          <a:blip r:embed="rId1"/>
+          <a:stretch>
+            <a:fillRect/>
+          </a:stretch>
+        </p:blipFill>
+        <p:spPr>
+          <a:xfrm>
+            <a:off x="6766560" y="1691640"/>
+            <a:ext cx="4663440" cy="3986784"/>
+          </a:xfrm>
+          <a:prstGeom prst="rect">
+            <a:avLst/>
+          </a:prstGeom>
+        </p:spPr>
+      </p:pic>
+      <p:sp>
+        <p:nvSpPr>
+          <p:cNvPr id="6" name="Text 3"/>
+          <p:cNvSpPr txBox="1"/>
+          <p:nvPr/>
+        </p:nvSpPr>
+        <p:spPr>
+          <a:xfrm>
+            <a:off x="6400800" y="5742432"/>
+            <a:ext cx="5394960" cy="292608"/>
           </a:xfrm>
           <a:prstGeom prst="rect">
             <a:avLst/>
@@ -6817,53 +5096,11 @@
           <a:bodyPr wrap="square" lIns="0" tIns="0" rIns="0" bIns="0" rtlCol="0" anchor="ctr"/>
           <a:lstStyle/>
           <a:p>
-            <a:pPr indent="0" marL="0">
-              <a:buNone/>
-            </a:pPr>
-            <a:r>
-              <a:rPr lang="en-US" sz="3200" b="1" dirty="0">
-                <a:solidFill>
-                  <a:srgbClr val="1B6B5A"/>
-                </a:solidFill>
-                <a:latin typeface="Calibri" pitchFamily="34" charset="0"/>
-                <a:ea typeface="Calibri" pitchFamily="34" charset="-122"/>
-                <a:cs typeface="Calibri" pitchFamily="34" charset="-120"/>
-              </a:rPr>
-              <a:t>0,66</a:t>
-            </a:r>
-            <a:endParaRPr lang="en-US" sz="3200" dirty="0"/>
-          </a:p>
-        </p:txBody>
-      </p:sp>
-      <p:sp>
-        <p:nvSpPr>
-          <p:cNvPr id="7" name="Text 5"/>
-          <p:cNvSpPr txBox="1"/>
-          <p:nvPr/>
-        </p:nvSpPr>
-        <p:spPr>
-          <a:xfrm>
-            <a:off x="7543800" y="2697480"/>
-            <a:ext cx="1737360" cy="640080"/>
-          </a:xfrm>
-          <a:prstGeom prst="rect">
-            <a:avLst/>
-          </a:prstGeom>
-          <a:noFill/>
-          <a:ln/>
-        </p:spPr>
-        <p:txBody>
-          <a:bodyPr wrap="square" lIns="0" tIns="0" rIns="0" bIns="0" rtlCol="0" anchor="ctr"/>
-          <a:lstStyle/>
-          <a:p>
-            <a:pPr indent="0" marL="0">
-              <a:lnSpc>
-                <a:spcPct val="110000"/>
-              </a:lnSpc>
-              <a:buNone/>
-            </a:pPr>
-            <a:r>
-              <a:rPr lang="en-US" sz="1150" dirty="0">
+            <a:pPr algn="ctr" indent="0" marL="0">
+              <a:buNone/>
+            </a:pPr>
+            <a:r>
+              <a:rPr lang="en-US" sz="1050" i="1" dirty="0">
                 <a:solidFill>
                   <a:srgbClr val="6B7C77"/>
                 </a:solidFill>
@@ -6871,225 +5108,9 @@
                 <a:ea typeface="Calibri" pitchFamily="34" charset="-122"/>
                 <a:cs typeface="Calibri" pitchFamily="34" charset="-120"/>
               </a:rPr>
-              <a:t>ROC-AUC no teste</a:t>
-            </a:r>
-            <a:endParaRPr lang="en-US" sz="1150" dirty="0"/>
-          </a:p>
-        </p:txBody>
-      </p:sp>
-      <p:sp>
-        <p:nvSpPr>
-          <p:cNvPr id="8" name="Shape 6"/>
-          <p:cNvSpPr/>
-          <p:nvPr/>
-        </p:nvSpPr>
-        <p:spPr>
-          <a:xfrm>
-            <a:off x="9601200" y="1737360"/>
-            <a:ext cx="2011680" cy="1554480"/>
-          </a:xfrm>
-          <a:prstGeom prst="roundRect">
-            <a:avLst>
-              <a:gd name="adj" fmla="val 4706"/>
-            </a:avLst>
-          </a:prstGeom>
-          <a:solidFill>
-            <a:srgbClr val="F2F6F4"/>
-          </a:solidFill>
-          <a:ln w="12700">
-            <a:solidFill>
-              <a:srgbClr val="F2F6F4"/>
-            </a:solidFill>
-            <a:prstDash val="solid"/>
-          </a:ln>
-        </p:spPr>
-      </p:sp>
-      <p:sp>
-        <p:nvSpPr>
-          <p:cNvPr id="9" name="Text 7"/>
-          <p:cNvSpPr txBox="1"/>
-          <p:nvPr/>
-        </p:nvSpPr>
-        <p:spPr>
-          <a:xfrm>
-            <a:off x="9738360" y="1901952"/>
-            <a:ext cx="1737360" cy="868680"/>
-          </a:xfrm>
-          <a:prstGeom prst="rect">
-            <a:avLst/>
-          </a:prstGeom>
-          <a:noFill/>
-          <a:ln/>
-        </p:spPr>
-        <p:txBody>
-          <a:bodyPr wrap="square" lIns="0" tIns="0" rIns="0" bIns="0" rtlCol="0" anchor="ctr"/>
-          <a:lstStyle/>
-          <a:p>
-            <a:pPr indent="0" marL="0">
-              <a:buNone/>
-            </a:pPr>
-            <a:r>
-              <a:rPr lang="en-US" sz="3200" b="1" dirty="0">
-                <a:solidFill>
-                  <a:srgbClr val="1B6B5A"/>
-                </a:solidFill>
-                <a:latin typeface="Calibri" pitchFamily="34" charset="0"/>
-                <a:ea typeface="Calibri" pitchFamily="34" charset="-122"/>
-                <a:cs typeface="Calibri" pitchFamily="34" charset="-120"/>
-              </a:rPr>
-              <a:t>0,013</a:t>
-            </a:r>
-            <a:endParaRPr lang="en-US" sz="3200" dirty="0"/>
-          </a:p>
-        </p:txBody>
-      </p:sp>
-      <p:sp>
-        <p:nvSpPr>
-          <p:cNvPr id="10" name="Text 8"/>
-          <p:cNvSpPr txBox="1"/>
-          <p:nvPr/>
-        </p:nvSpPr>
-        <p:spPr>
-          <a:xfrm>
-            <a:off x="9738360" y="2697480"/>
-            <a:ext cx="1737360" cy="640080"/>
-          </a:xfrm>
-          <a:prstGeom prst="rect">
-            <a:avLst/>
-          </a:prstGeom>
-          <a:noFill/>
-          <a:ln/>
-        </p:spPr>
-        <p:txBody>
-          <a:bodyPr wrap="square" lIns="0" tIns="0" rIns="0" bIns="0" rtlCol="0" anchor="ctr"/>
-          <a:lstStyle/>
-          <a:p>
-            <a:pPr indent="0" marL="0">
-              <a:lnSpc>
-                <a:spcPct val="110000"/>
-              </a:lnSpc>
-              <a:buNone/>
-            </a:pPr>
-            <a:r>
-              <a:rPr lang="en-US" sz="1150" dirty="0">
-                <a:solidFill>
-                  <a:srgbClr val="6B7C77"/>
-                </a:solidFill>
-                <a:latin typeface="Calibri" pitchFamily="34" charset="0"/>
-                <a:ea typeface="Calibri" pitchFamily="34" charset="-122"/>
-                <a:cs typeface="Calibri" pitchFamily="34" charset="-120"/>
-              </a:rPr>
-              <a:t>diferença treino-teste</a:t>
-            </a:r>
-            <a:endParaRPr lang="en-US" sz="1150" dirty="0"/>
-          </a:p>
-        </p:txBody>
-      </p:sp>
-      <p:sp>
-        <p:nvSpPr>
-          <p:cNvPr id="11" name="Shape 9"/>
-          <p:cNvSpPr/>
-          <p:nvPr/>
-        </p:nvSpPr>
-        <p:spPr>
-          <a:xfrm>
-            <a:off x="7406640" y="3566160"/>
-            <a:ext cx="4206240" cy="1554480"/>
-          </a:xfrm>
-          <a:prstGeom prst="roundRect">
-            <a:avLst>
-              <a:gd name="adj" fmla="val 4706"/>
-            </a:avLst>
-          </a:prstGeom>
-          <a:solidFill>
-            <a:srgbClr val="F2F6F4"/>
-          </a:solidFill>
-          <a:ln w="12700">
-            <a:solidFill>
-              <a:srgbClr val="F2F6F4"/>
-            </a:solidFill>
-            <a:prstDash val="solid"/>
-          </a:ln>
-        </p:spPr>
-      </p:sp>
-      <p:sp>
-        <p:nvSpPr>
-          <p:cNvPr id="12" name="Text 10"/>
-          <p:cNvSpPr txBox="1"/>
-          <p:nvPr/>
-        </p:nvSpPr>
-        <p:spPr>
-          <a:xfrm>
-            <a:off x="7543800" y="3730752"/>
-            <a:ext cx="3931920" cy="868680"/>
-          </a:xfrm>
-          <a:prstGeom prst="rect">
-            <a:avLst/>
-          </a:prstGeom>
-          <a:noFill/>
-          <a:ln/>
-        </p:spPr>
-        <p:txBody>
-          <a:bodyPr wrap="square" lIns="0" tIns="0" rIns="0" bIns="0" rtlCol="0" anchor="ctr"/>
-          <a:lstStyle/>
-          <a:p>
-            <a:pPr indent="0" marL="0">
-              <a:buNone/>
-            </a:pPr>
-            <a:r>
-              <a:rPr lang="en-US" sz="3200" b="1" dirty="0">
-                <a:solidFill>
-                  <a:srgbClr val="E8A33D"/>
-                </a:solidFill>
-                <a:latin typeface="Calibri" pitchFamily="34" charset="0"/>
-                <a:ea typeface="Calibri" pitchFamily="34" charset="-122"/>
-                <a:cs typeface="Calibri" pitchFamily="34" charset="-120"/>
-              </a:rPr>
-              <a:t>84%</a:t>
-            </a:r>
-            <a:endParaRPr lang="en-US" sz="3200" dirty="0"/>
-          </a:p>
-        </p:txBody>
-      </p:sp>
-      <p:sp>
-        <p:nvSpPr>
-          <p:cNvPr id="13" name="Text 11"/>
-          <p:cNvSpPr txBox="1"/>
-          <p:nvPr/>
-        </p:nvSpPr>
-        <p:spPr>
-          <a:xfrm>
-            <a:off x="7543800" y="4526280"/>
-            <a:ext cx="3931920" cy="640080"/>
-          </a:xfrm>
-          <a:prstGeom prst="rect">
-            <a:avLst/>
-          </a:prstGeom>
-          <a:noFill/>
-          <a:ln/>
-        </p:spPr>
-        <p:txBody>
-          <a:bodyPr wrap="square" lIns="0" tIns="0" rIns="0" bIns="0" rtlCol="0" anchor="ctr"/>
-          <a:lstStyle/>
-          <a:p>
-            <a:pPr indent="0" marL="0">
-              <a:lnSpc>
-                <a:spcPct val="110000"/>
-              </a:lnSpc>
-              <a:buNone/>
-            </a:pPr>
-            <a:r>
-              <a:rPr lang="en-US" sz="1150" dirty="0">
-                <a:solidFill>
-                  <a:srgbClr val="6B7C77"/>
-                </a:solidFill>
-                <a:latin typeface="Calibri" pitchFamily="34" charset="0"/>
-                <a:ea typeface="Calibri" pitchFamily="34" charset="-122"/>
-                <a:cs typeface="Calibri" pitchFamily="34" charset="-120"/>
-              </a:rPr>
-              <a:t>do teto alcançável com informação municipal</a:t>
-            </a:r>
-            <a:endParaRPr lang="en-US" sz="1150" dirty="0"/>
+              <a:t>Cada ponto é um município: previsto no eixo X, real no eixo Y.</a:t>
+            </a:r>
+            <a:endParaRPr lang="en-US" sz="1050" dirty="0"/>
           </a:p>
         </p:txBody>
       </p:sp>
@@ -7151,7 +5172,7 @@
                 <a:ea typeface="Calibri" pitchFamily="34" charset="-122"/>
                 <a:cs typeface="Calibri" pitchFamily="34" charset="-120"/>
               </a:rPr>
-              <a:t>O ACHADO CENTRAL</a:t>
+              <a:t>INTERPRETABILIDADE</a:t>
             </a:r>
             <a:endParaRPr lang="en-US" sz="1200" dirty="0"/>
           </a:p>
@@ -7182,7 +5203,7 @@
               <a:buNone/>
             </a:pPr>
             <a:r>
-              <a:rPr lang="en-US" sz="3400" b="1" dirty="0">
+              <a:rPr lang="en-US" sz="3200" b="1" dirty="0">
                 <a:solidFill>
                   <a:srgbClr val="1A2B28"/>
                 </a:solidFill>
@@ -7190,9 +5211,9 @@
                 <a:ea typeface="Calibri" pitchFamily="34" charset="-122"/>
                 <a:cs typeface="Calibri" pitchFamily="34" charset="-120"/>
               </a:rPr>
-              <a:t>Erra no aluno, acerta no município</a:t>
-            </a:r>
-            <a:endParaRPr lang="en-US" sz="3400" dirty="0"/>
+              <a:t>O que mais pesa na predição</a:t>
+            </a:r>
+            <a:endParaRPr lang="en-US" sz="3200" dirty="0"/>
           </a:p>
         </p:txBody>
       </p:sp>
@@ -7204,8 +5225,8 @@
         </p:nvSpPr>
         <p:spPr>
           <a:xfrm>
-            <a:off x="548640" y="1554480"/>
-            <a:ext cx="6309360" cy="4023360"/>
+            <a:off x="548640" y="1600200"/>
+            <a:ext cx="4480560" cy="4206240"/>
           </a:xfrm>
           <a:prstGeom prst="rect">
             <a:avLst/>
@@ -7219,12 +5240,12 @@
           <a:p>
             <a:pPr indent="0" marL="0">
               <a:lnSpc>
-                <a:spcPct val="130000"/>
+                <a:spcPct val="132000"/>
               </a:lnSpc>
               <a:buNone/>
             </a:pPr>
             <a:r>
-              <a:rPr lang="en-US" sz="1600" dirty="0">
+              <a:rPr lang="en-US" sz="1500" dirty="0">
                 <a:solidFill>
                   <a:srgbClr val="1A2B28"/>
                 </a:solidFill>
@@ -7232,28 +5253,28 @@
                 <a:ea typeface="Calibri" pitchFamily="34" charset="-122"/>
                 <a:cs typeface="Calibri" pitchFamily="34" charset="-120"/>
               </a:rPr>
-              <a:t>No aluno o modelo é modesto. Agregado por município, a correlação com a taxa real é 0,83.</a:t>
-            </a:r>
-            <a:endParaRPr lang="en-US" sz="1600" dirty="0"/>
+              <a:t>A história do próprio município domina, com o dobro do peso da segunda variável.</a:t>
+            </a:r>
+            <a:endParaRPr lang="en-US" sz="1500" dirty="0"/>
           </a:p>
           <a:p>
             <a:pPr indent="0" marL="0">
               <a:lnSpc>
-                <a:spcPct val="130000"/>
+                <a:spcPct val="132000"/>
               </a:lnSpc>
               <a:buNone/>
             </a:pPr>
-            <a:endParaRPr lang="en-US" sz="1600" dirty="0"/>
+            <a:endParaRPr lang="en-US" sz="1500" dirty="0"/>
           </a:p>
           <a:p>
             <a:pPr indent="0" marL="0">
               <a:lnSpc>
-                <a:spcPct val="130000"/>
+                <a:spcPct val="132000"/>
               </a:lnSpc>
               <a:buNone/>
             </a:pPr>
             <a:r>
-              <a:rPr lang="en-US" sz="1600" dirty="0">
+              <a:rPr lang="en-US" sz="1500" dirty="0">
                 <a:solidFill>
                   <a:srgbClr val="1A2B28"/>
                 </a:solidFill>
@@ -7261,28 +5282,28 @@
                 <a:ea typeface="Calibri" pitchFamily="34" charset="-122"/>
                 <a:cs typeface="Calibri" pitchFamily="34" charset="-120"/>
               </a:rPr>
-              <a:t>Os erros individuais se cancelam na média. O modelo não sabe qual criança não será alfabetizada; sabe quantas não serão.</a:t>
-            </a:r>
-            <a:endParaRPr lang="en-US" sz="1600" dirty="0"/>
+              <a:t>As cinco mais influentes são territoriais. O que descreve o aluno quase não pesa.</a:t>
+            </a:r>
+            <a:endParaRPr lang="en-US" sz="1500" dirty="0"/>
           </a:p>
           <a:p>
             <a:pPr indent="0" marL="0">
               <a:lnSpc>
-                <a:spcPct val="130000"/>
+                <a:spcPct val="132000"/>
               </a:lnSpc>
               <a:buNone/>
             </a:pPr>
-            <a:endParaRPr lang="en-US" sz="1600" dirty="0"/>
+            <a:endParaRPr lang="en-US" sz="1500" dirty="0"/>
           </a:p>
           <a:p>
             <a:pPr indent="0" marL="0">
               <a:lnSpc>
-                <a:spcPct val="130000"/>
+                <a:spcPct val="132000"/>
               </a:lnSpc>
               <a:buNone/>
             </a:pPr>
             <a:r>
-              <a:rPr lang="en-US" sz="1600" dirty="0">
+              <a:rPr lang="en-US" sz="1500" dirty="0">
                 <a:solidFill>
                   <a:srgbClr val="1A2B28"/>
                 </a:solidFill>
@@ -7290,49 +5311,46 @@
                 <a:ea typeface="Calibri" pitchFamily="34" charset="-122"/>
                 <a:cs typeface="Calibri" pitchFamily="34" charset="-120"/>
               </a:rPr>
-              <a:t>O uso certo é ordenar territórios.</a:t>
-            </a:r>
-            <a:endParaRPr lang="en-US" sz="1600" dirty="0"/>
-          </a:p>
-        </p:txBody>
-      </p:sp>
-      <p:sp>
-        <p:nvSpPr>
-          <p:cNvPr id="5" name="Shape 3"/>
-          <p:cNvSpPr/>
-          <p:nvPr/>
-        </p:nvSpPr>
-        <p:spPr>
-          <a:xfrm>
-            <a:off x="7406640" y="1737360"/>
-            <a:ext cx="2011680" cy="1554480"/>
-          </a:xfrm>
-          <a:prstGeom prst="roundRect">
-            <a:avLst>
-              <a:gd name="adj" fmla="val 4706"/>
-            </a:avLst>
-          </a:prstGeom>
-          <a:solidFill>
-            <a:srgbClr val="F2F6F4"/>
-          </a:solidFill>
-          <a:ln w="12700">
-            <a:solidFill>
-              <a:srgbClr val="F2F6F4"/>
-            </a:solidFill>
-            <a:prstDash val="solid"/>
-          </a:ln>
-        </p:spPr>
-      </p:sp>
-      <p:sp>
-        <p:nvSpPr>
-          <p:cNvPr id="6" name="Text 4"/>
-          <p:cNvSpPr txBox="1"/>
-          <p:nvPr/>
-        </p:nvSpPr>
-        <p:spPr>
-          <a:xfrm>
-            <a:off x="7543800" y="1901952"/>
-            <a:ext cx="1737360" cy="868680"/>
+              <a:t>Uma ressalva: o modelo mede associação, e associação não é causa. Sem dados de professor, turma ou família, o território acaba representando tudo isso junto.</a:t>
+            </a:r>
+            <a:endParaRPr lang="en-US" sz="1500" dirty="0"/>
+          </a:p>
+        </p:txBody>
+      </p:sp>
+      <p:pic>
+        <p:nvPicPr>
+          <p:cNvPr id="5" name="Image 0" descr="/Users/thiago/Documents/ARQUIVOS PÓS/FASE 3/tech-challenge-fase3/images/12_importancia_permutacao.png">    </p:cNvPr>
+          <p:cNvPicPr>
+            <a:picLocks noChangeAspect="1"/>
+          </p:cNvPicPr>
+          <p:nvPr/>
+        </p:nvPicPr>
+        <p:blipFill>
+          <a:blip r:embed="rId1"/>
+          <a:stretch>
+            <a:fillRect/>
+          </a:stretch>
+        </p:blipFill>
+        <p:spPr>
+          <a:xfrm>
+            <a:off x="5394960" y="1828800"/>
+            <a:ext cx="6400800" cy="3593592"/>
+          </a:xfrm>
+          <a:prstGeom prst="rect">
+            <a:avLst/>
+          </a:prstGeom>
+        </p:spPr>
+      </p:pic>
+      <p:sp>
+        <p:nvSpPr>
+          <p:cNvPr id="6" name="Text 3"/>
+          <p:cNvSpPr txBox="1"/>
+          <p:nvPr/>
+        </p:nvSpPr>
+        <p:spPr>
+          <a:xfrm>
+            <a:off x="5394960" y="5513832"/>
+            <a:ext cx="6400800" cy="292608"/>
           </a:xfrm>
           <a:prstGeom prst="rect">
             <a:avLst/>
@@ -7344,11 +5362,11 @@
           <a:bodyPr wrap="square" lIns="0" tIns="0" rIns="0" bIns="0" rtlCol="0" anchor="ctr"/>
           <a:lstStyle/>
           <a:p>
-            <a:pPr indent="0" marL="0">
-              <a:buNone/>
-            </a:pPr>
-            <a:r>
-              <a:rPr lang="en-US" sz="3200" b="1" dirty="0">
+            <a:pPr algn="ctr" indent="0" marL="0">
+              <a:buNone/>
+            </a:pPr>
+            <a:r>
+              <a:rPr lang="en-US" sz="1050" i="1" dirty="0">
                 <a:solidFill>
                   <a:srgbClr val="6B7C77"/>
                 </a:solidFill>
@@ -7356,267 +5374,9 @@
                 <a:ea typeface="Calibri" pitchFamily="34" charset="-122"/>
                 <a:cs typeface="Calibri" pitchFamily="34" charset="-120"/>
               </a:rPr>
-              <a:t>0,66</a:t>
-            </a:r>
-            <a:endParaRPr lang="en-US" sz="3200" dirty="0"/>
-          </a:p>
-        </p:txBody>
-      </p:sp>
-      <p:sp>
-        <p:nvSpPr>
-          <p:cNvPr id="7" name="Text 5"/>
-          <p:cNvSpPr txBox="1"/>
-          <p:nvPr/>
-        </p:nvSpPr>
-        <p:spPr>
-          <a:xfrm>
-            <a:off x="7543800" y="2697480"/>
-            <a:ext cx="1737360" cy="640080"/>
-          </a:xfrm>
-          <a:prstGeom prst="rect">
-            <a:avLst/>
-          </a:prstGeom>
-          <a:noFill/>
-          <a:ln/>
-        </p:spPr>
-        <p:txBody>
-          <a:bodyPr wrap="square" lIns="0" tIns="0" rIns="0" bIns="0" rtlCol="0" anchor="ctr"/>
-          <a:lstStyle/>
-          <a:p>
-            <a:pPr indent="0" marL="0">
-              <a:lnSpc>
-                <a:spcPct val="110000"/>
-              </a:lnSpc>
-              <a:buNone/>
-            </a:pPr>
-            <a:r>
-              <a:rPr lang="en-US" sz="1150" dirty="0">
-                <a:solidFill>
-                  <a:srgbClr val="6B7C77"/>
-                </a:solidFill>
-                <a:latin typeface="Calibri" pitchFamily="34" charset="0"/>
-                <a:ea typeface="Calibri" pitchFamily="34" charset="-122"/>
-                <a:cs typeface="Calibri" pitchFamily="34" charset="-120"/>
-              </a:rPr>
-              <a:t>por aluno</a:t>
-            </a:r>
-            <a:endParaRPr lang="en-US" sz="1150" dirty="0"/>
-          </a:p>
-        </p:txBody>
-      </p:sp>
-      <p:sp>
-        <p:nvSpPr>
-          <p:cNvPr id="8" name="Shape 6"/>
-          <p:cNvSpPr/>
-          <p:nvPr/>
-        </p:nvSpPr>
-        <p:spPr>
-          <a:xfrm>
-            <a:off x="9601200" y="1737360"/>
-            <a:ext cx="2011680" cy="1554480"/>
-          </a:xfrm>
-          <a:prstGeom prst="roundRect">
-            <a:avLst>
-              <a:gd name="adj" fmla="val 4706"/>
-            </a:avLst>
-          </a:prstGeom>
-          <a:solidFill>
-            <a:srgbClr val="F2F6F4"/>
-          </a:solidFill>
-          <a:ln w="12700">
-            <a:solidFill>
-              <a:srgbClr val="F2F6F4"/>
-            </a:solidFill>
-            <a:prstDash val="solid"/>
-          </a:ln>
-        </p:spPr>
-      </p:sp>
-      <p:sp>
-        <p:nvSpPr>
-          <p:cNvPr id="9" name="Text 7"/>
-          <p:cNvSpPr txBox="1"/>
-          <p:nvPr/>
-        </p:nvSpPr>
-        <p:spPr>
-          <a:xfrm>
-            <a:off x="9738360" y="1901952"/>
-            <a:ext cx="1737360" cy="868680"/>
-          </a:xfrm>
-          <a:prstGeom prst="rect">
-            <a:avLst/>
-          </a:prstGeom>
-          <a:noFill/>
-          <a:ln/>
-        </p:spPr>
-        <p:txBody>
-          <a:bodyPr wrap="square" lIns="0" tIns="0" rIns="0" bIns="0" rtlCol="0" anchor="ctr"/>
-          <a:lstStyle/>
-          <a:p>
-            <a:pPr indent="0" marL="0">
-              <a:buNone/>
-            </a:pPr>
-            <a:r>
-              <a:rPr lang="en-US" sz="3200" b="1" dirty="0">
-                <a:solidFill>
-                  <a:srgbClr val="E8A33D"/>
-                </a:solidFill>
-                <a:latin typeface="Calibri" pitchFamily="34" charset="0"/>
-                <a:ea typeface="Calibri" pitchFamily="34" charset="-122"/>
-                <a:cs typeface="Calibri" pitchFamily="34" charset="-120"/>
-              </a:rPr>
-              <a:t>0,83</a:t>
-            </a:r>
-            <a:endParaRPr lang="en-US" sz="3200" dirty="0"/>
-          </a:p>
-        </p:txBody>
-      </p:sp>
-      <p:sp>
-        <p:nvSpPr>
-          <p:cNvPr id="10" name="Text 8"/>
-          <p:cNvSpPr txBox="1"/>
-          <p:nvPr/>
-        </p:nvSpPr>
-        <p:spPr>
-          <a:xfrm>
-            <a:off x="9738360" y="2697480"/>
-            <a:ext cx="1737360" cy="640080"/>
-          </a:xfrm>
-          <a:prstGeom prst="rect">
-            <a:avLst/>
-          </a:prstGeom>
-          <a:noFill/>
-          <a:ln/>
-        </p:spPr>
-        <p:txBody>
-          <a:bodyPr wrap="square" lIns="0" tIns="0" rIns="0" bIns="0" rtlCol="0" anchor="ctr"/>
-          <a:lstStyle/>
-          <a:p>
-            <a:pPr indent="0" marL="0">
-              <a:lnSpc>
-                <a:spcPct val="110000"/>
-              </a:lnSpc>
-              <a:buNone/>
-            </a:pPr>
-            <a:r>
-              <a:rPr lang="en-US" sz="1150" dirty="0">
-                <a:solidFill>
-                  <a:srgbClr val="6B7C77"/>
-                </a:solidFill>
-                <a:latin typeface="Calibri" pitchFamily="34" charset="0"/>
-                <a:ea typeface="Calibri" pitchFamily="34" charset="-122"/>
-                <a:cs typeface="Calibri" pitchFamily="34" charset="-120"/>
-              </a:rPr>
-              <a:t>por município</a:t>
-            </a:r>
-            <a:endParaRPr lang="en-US" sz="1150" dirty="0"/>
-          </a:p>
-        </p:txBody>
-      </p:sp>
-      <p:sp>
-        <p:nvSpPr>
-          <p:cNvPr id="11" name="Shape 9"/>
-          <p:cNvSpPr/>
-          <p:nvPr/>
-        </p:nvSpPr>
-        <p:spPr>
-          <a:xfrm>
-            <a:off x="7406640" y="3566160"/>
-            <a:ext cx="4206240" cy="1554480"/>
-          </a:xfrm>
-          <a:prstGeom prst="roundRect">
-            <a:avLst>
-              <a:gd name="adj" fmla="val 4706"/>
-            </a:avLst>
-          </a:prstGeom>
-          <a:solidFill>
-            <a:srgbClr val="F2F6F4"/>
-          </a:solidFill>
-          <a:ln w="12700">
-            <a:solidFill>
-              <a:srgbClr val="F2F6F4"/>
-            </a:solidFill>
-            <a:prstDash val="solid"/>
-          </a:ln>
-        </p:spPr>
-      </p:sp>
-      <p:sp>
-        <p:nvSpPr>
-          <p:cNvPr id="12" name="Text 10"/>
-          <p:cNvSpPr txBox="1"/>
-          <p:nvPr/>
-        </p:nvSpPr>
-        <p:spPr>
-          <a:xfrm>
-            <a:off x="7543800" y="3730752"/>
-            <a:ext cx="3931920" cy="868680"/>
-          </a:xfrm>
-          <a:prstGeom prst="rect">
-            <a:avLst/>
-          </a:prstGeom>
-          <a:noFill/>
-          <a:ln/>
-        </p:spPr>
-        <p:txBody>
-          <a:bodyPr wrap="square" lIns="0" tIns="0" rIns="0" bIns="0" rtlCol="0" anchor="ctr"/>
-          <a:lstStyle/>
-          <a:p>
-            <a:pPr indent="0" marL="0">
-              <a:buNone/>
-            </a:pPr>
-            <a:r>
-              <a:rPr lang="en-US" sz="3200" b="1" dirty="0">
-                <a:solidFill>
-                  <a:srgbClr val="1B6B5A"/>
-                </a:solidFill>
-                <a:latin typeface="Calibri" pitchFamily="34" charset="0"/>
-                <a:ea typeface="Calibri" pitchFamily="34" charset="-122"/>
-                <a:cs typeface="Calibri" pitchFamily="34" charset="-120"/>
-              </a:rPr>
-              <a:t>7,5 p.p.</a:t>
-            </a:r>
-            <a:endParaRPr lang="en-US" sz="3200" dirty="0"/>
-          </a:p>
-        </p:txBody>
-      </p:sp>
-      <p:sp>
-        <p:nvSpPr>
-          <p:cNvPr id="13" name="Text 11"/>
-          <p:cNvSpPr txBox="1"/>
-          <p:nvPr/>
-        </p:nvSpPr>
-        <p:spPr>
-          <a:xfrm>
-            <a:off x="7543800" y="4526280"/>
-            <a:ext cx="3931920" cy="640080"/>
-          </a:xfrm>
-          <a:prstGeom prst="rect">
-            <a:avLst/>
-          </a:prstGeom>
-          <a:noFill/>
-          <a:ln/>
-        </p:spPr>
-        <p:txBody>
-          <a:bodyPr wrap="square" lIns="0" tIns="0" rIns="0" bIns="0" rtlCol="0" anchor="ctr"/>
-          <a:lstStyle/>
-          <a:p>
-            <a:pPr indent="0" marL="0">
-              <a:lnSpc>
-                <a:spcPct val="110000"/>
-              </a:lnSpc>
-              <a:buNone/>
-            </a:pPr>
-            <a:r>
-              <a:rPr lang="en-US" sz="1150" dirty="0">
-                <a:solidFill>
-                  <a:srgbClr val="6B7C77"/>
-                </a:solidFill>
-                <a:latin typeface="Calibri" pitchFamily="34" charset="0"/>
-                <a:ea typeface="Calibri" pitchFamily="34" charset="-122"/>
-                <a:cs typeface="Calibri" pitchFamily="34" charset="-120"/>
-              </a:rPr>
-              <a:t>erro médio na taxa do município</a:t>
-            </a:r>
-            <a:endParaRPr lang="en-US" sz="1150" dirty="0"/>
+              <a:t>Queda no ROC-AUC ao embaralhar cada variável.</a:t>
+            </a:r>
+            <a:endParaRPr lang="en-US" sz="1050" dirty="0"/>
           </a:p>
         </p:txBody>
       </p:sp>
@@ -7678,7 +5438,7 @@
                 <a:ea typeface="Calibri" pitchFamily="34" charset="-122"/>
                 <a:cs typeface="Calibri" pitchFamily="34" charset="-120"/>
               </a:rPr>
-              <a:t>INTERPRETABILIDADE</a:t>
+              <a:t>INSIGHT DE POLÍTICA</a:t>
             </a:r>
             <a:endParaRPr lang="en-US" sz="1200" dirty="0"/>
           </a:p>
@@ -7709,7 +5469,7 @@
               <a:buNone/>
             </a:pPr>
             <a:r>
-              <a:rPr lang="en-US" sz="3400" b="1" dirty="0">
+              <a:rPr lang="en-US" sz="3200" b="1" dirty="0">
                 <a:solidFill>
                   <a:srgbClr val="1A2B28"/>
                 </a:solidFill>
@@ -7717,9 +5477,9 @@
                 <a:ea typeface="Calibri" pitchFamily="34" charset="-122"/>
                 <a:cs typeface="Calibri" pitchFamily="34" charset="-120"/>
               </a:rPr>
-              <a:t>O que mais pesa na predição</a:t>
-            </a:r>
-            <a:endParaRPr lang="en-US" sz="3400" dirty="0"/>
+              <a:t>Mesma renda, vinte e sete pontos de diferença</a:t>
+            </a:r>
+            <a:endParaRPr lang="en-US" sz="3200" dirty="0"/>
           </a:p>
         </p:txBody>
       </p:sp>
@@ -7731,8 +5491,8 @@
         </p:nvSpPr>
         <p:spPr>
           <a:xfrm>
-            <a:off x="548640" y="1554480"/>
-            <a:ext cx="6309360" cy="3108960"/>
+            <a:off x="548640" y="1600200"/>
+            <a:ext cx="6309360" cy="4206240"/>
           </a:xfrm>
           <a:prstGeom prst="rect">
             <a:avLst/>
@@ -7746,12 +5506,12 @@
           <a:p>
             <a:pPr indent="0" marL="0">
               <a:lnSpc>
-                <a:spcPct val="130000"/>
+                <a:spcPct val="132000"/>
               </a:lnSpc>
               <a:buNone/>
             </a:pPr>
             <a:r>
-              <a:rPr lang="en-US" sz="1600" dirty="0">
+              <a:rPr lang="en-US" sz="1500" dirty="0">
                 <a:solidFill>
                   <a:srgbClr val="1A2B28"/>
                 </a:solidFill>
@@ -7759,28 +5519,28 @@
                 <a:ea typeface="Calibri" pitchFamily="34" charset="-122"/>
                 <a:cs typeface="Calibri" pitchFamily="34" charset="-120"/>
               </a:rPr>
-              <a:t>A história do próprio município domina, com peso duas vezes maior que a segunda variável. As cinco mais influentes são territoriais.</a:t>
-            </a:r>
-            <a:endParaRPr lang="en-US" sz="1600" dirty="0"/>
+              <a:t>O agrupamento separou os municípios em quatro perfis. Dois deles têm exatamente o mesmo PIB per capita.</a:t>
+            </a:r>
+            <a:endParaRPr lang="en-US" sz="1500" dirty="0"/>
           </a:p>
           <a:p>
             <a:pPr indent="0" marL="0">
               <a:lnSpc>
-                <a:spcPct val="130000"/>
+                <a:spcPct val="132000"/>
               </a:lnSpc>
               <a:buNone/>
             </a:pPr>
-            <a:endParaRPr lang="en-US" sz="1600" dirty="0"/>
+            <a:endParaRPr lang="en-US" sz="1500" dirty="0"/>
           </a:p>
           <a:p>
             <a:pPr indent="0" marL="0">
               <a:lnSpc>
-                <a:spcPct val="130000"/>
+                <a:spcPct val="132000"/>
               </a:lnSpc>
               <a:buNone/>
             </a:pPr>
             <a:r>
-              <a:rPr lang="en-US" sz="1600" dirty="0">
+              <a:rPr lang="en-US" sz="1500" dirty="0">
                 <a:solidFill>
                   <a:srgbClr val="1A2B28"/>
                 </a:solidFill>
@@ -7788,9 +5548,38 @@
                 <a:ea typeface="Calibri" pitchFamily="34" charset="-122"/>
                 <a:cs typeface="Calibri" pitchFamily="34" charset="-120"/>
               </a:rPr>
-              <a:t>O modelo mede associação. Sem variáveis de professor, turma ou família, o território representa tudo isso junto.</a:t>
-            </a:r>
-            <a:endParaRPr lang="en-US" sz="1600" dirty="0"/>
+              <a:t>São 1.351 municípios de baixa renda alfabetizando acima da média nacional.</a:t>
+            </a:r>
+            <a:endParaRPr lang="en-US" sz="1500" dirty="0"/>
+          </a:p>
+          <a:p>
+            <a:pPr indent="0" marL="0">
+              <a:lnSpc>
+                <a:spcPct val="132000"/>
+              </a:lnSpc>
+              <a:buNone/>
+            </a:pPr>
+            <a:endParaRPr lang="en-US" sz="1500" dirty="0"/>
+          </a:p>
+          <a:p>
+            <a:pPr indent="0" marL="0">
+              <a:lnSpc>
+                <a:spcPct val="132000"/>
+              </a:lnSpc>
+              <a:buNone/>
+            </a:pPr>
+            <a:r>
+              <a:rPr lang="en-US" sz="1500" dirty="0">
+                <a:solidFill>
+                  <a:srgbClr val="1A2B28"/>
+                </a:solidFill>
+                <a:latin typeface="Calibri" pitchFamily="34" charset="0"/>
+                <a:ea typeface="Calibri" pitchFamily="34" charset="-122"/>
+                <a:cs typeface="Calibri" pitchFamily="34" charset="-120"/>
+              </a:rPr>
+              <a:t>A renda não determina o resultado. Em vez de explicar o fracasso pela pobreza, vale investigar o que esses municípios fazem que os outros não fazem.</a:t>
+            </a:r>
+            <a:endParaRPr lang="en-US" sz="1500" dirty="0"/>
           </a:p>
         </p:txBody>
       </p:sp>
@@ -7802,117 +5591,12 @@
         </p:nvSpPr>
         <p:spPr>
           <a:xfrm>
-            <a:off x="7406640" y="1783080"/>
-            <a:ext cx="4206240" cy="566928"/>
+            <a:off x="7406640" y="1737360"/>
+            <a:ext cx="2011680" cy="1828800"/>
           </a:xfrm>
           <a:prstGeom prst="roundRect">
             <a:avLst>
-              <a:gd name="adj" fmla="val 9677"/>
-            </a:avLst>
-          </a:prstGeom>
-          <a:solidFill>
-            <a:srgbClr val="E8EFEC"/>
-          </a:solidFill>
-          <a:ln w="12700">
-            <a:solidFill>
-              <a:srgbClr val="F2F6F4"/>
-            </a:solidFill>
-            <a:prstDash val="solid"/>
-          </a:ln>
-        </p:spPr>
-      </p:sp>
-      <p:sp>
-        <p:nvSpPr>
-          <p:cNvPr id="6" name="Text 4"/>
-          <p:cNvSpPr txBox="1"/>
-          <p:nvPr/>
-        </p:nvSpPr>
-        <p:spPr>
-          <a:xfrm>
-            <a:off x="7543800" y="1901952"/>
-            <a:ext cx="2926080" cy="329184"/>
-          </a:xfrm>
-          <a:prstGeom prst="rect">
-            <a:avLst/>
-          </a:prstGeom>
-          <a:noFill/>
-          <a:ln/>
-        </p:spPr>
-        <p:txBody>
-          <a:bodyPr wrap="square" lIns="0" tIns="0" rIns="0" bIns="0" rtlCol="0" anchor="ctr"/>
-          <a:lstStyle/>
-          <a:p>
-            <a:pPr indent="0" marL="0">
-              <a:buNone/>
-            </a:pPr>
-            <a:r>
-              <a:rPr lang="en-US" sz="1150" b="1" dirty="0">
-                <a:solidFill>
-                  <a:srgbClr val="1A2B28"/>
-                </a:solidFill>
-                <a:latin typeface="Calibri" pitchFamily="34" charset="0"/>
-                <a:ea typeface="Calibri" pitchFamily="34" charset="-122"/>
-                <a:cs typeface="Calibri" pitchFamily="34" charset="-120"/>
-              </a:rPr>
-              <a:t>Taxa histórica do município</a:t>
-            </a:r>
-            <a:endParaRPr lang="en-US" sz="1150" dirty="0"/>
-          </a:p>
-        </p:txBody>
-      </p:sp>
-      <p:sp>
-        <p:nvSpPr>
-          <p:cNvPr id="7" name="Text 5"/>
-          <p:cNvSpPr txBox="1"/>
-          <p:nvPr/>
-        </p:nvSpPr>
-        <p:spPr>
-          <a:xfrm>
-            <a:off x="10515600" y="1901952"/>
-            <a:ext cx="960120" cy="329184"/>
-          </a:xfrm>
-          <a:prstGeom prst="rect">
-            <a:avLst/>
-          </a:prstGeom>
-          <a:noFill/>
-          <a:ln/>
-        </p:spPr>
-        <p:txBody>
-          <a:bodyPr wrap="square" lIns="0" tIns="0" rIns="0" bIns="0" rtlCol="0" anchor="ctr"/>
-          <a:lstStyle/>
-          <a:p>
-            <a:pPr algn="r" indent="0" marL="0">
-              <a:buNone/>
-            </a:pPr>
-            <a:r>
-              <a:rPr lang="en-US" sz="1150" b="1" dirty="0">
-                <a:solidFill>
-                  <a:srgbClr val="E8A33D"/>
-                </a:solidFill>
-                <a:latin typeface="Calibri" pitchFamily="34" charset="0"/>
-                <a:ea typeface="Calibri" pitchFamily="34" charset="-122"/>
-                <a:cs typeface="Calibri" pitchFamily="34" charset="-120"/>
-              </a:rPr>
-              <a:t>0,037</a:t>
-            </a:r>
-            <a:endParaRPr lang="en-US" sz="1150" dirty="0"/>
-          </a:p>
-        </p:txBody>
-      </p:sp>
-      <p:sp>
-        <p:nvSpPr>
-          <p:cNvPr id="8" name="Shape 6"/>
-          <p:cNvSpPr/>
-          <p:nvPr/>
-        </p:nvSpPr>
-        <p:spPr>
-          <a:xfrm>
-            <a:off x="7406640" y="2441448"/>
-            <a:ext cx="4206240" cy="566928"/>
-          </a:xfrm>
-          <a:prstGeom prst="roundRect">
-            <a:avLst>
-              <a:gd name="adj" fmla="val 9677"/>
+              <a:gd name="adj" fmla="val 4000"/>
             </a:avLst>
           </a:prstGeom>
           <a:solidFill>
@@ -7928,14 +5612,14 @@
       </p:sp>
       <p:sp>
         <p:nvSpPr>
-          <p:cNvPr id="9" name="Text 7"/>
-          <p:cNvSpPr txBox="1"/>
-          <p:nvPr/>
-        </p:nvSpPr>
-        <p:spPr>
-          <a:xfrm>
-            <a:off x="7543800" y="2560320"/>
-            <a:ext cx="2926080" cy="329184"/>
+          <p:cNvPr id="6" name="Text 4"/>
+          <p:cNvSpPr txBox="1"/>
+          <p:nvPr/>
+        </p:nvSpPr>
+        <p:spPr>
+          <a:xfrm>
+            <a:off x="7543800" y="1901952"/>
+            <a:ext cx="1737360" cy="868680"/>
           </a:xfrm>
           <a:prstGeom prst="rect">
             <a:avLst/>
@@ -7951,46 +5635,69 @@
               <a:buNone/>
             </a:pPr>
             <a:r>
+              <a:rPr lang="en-US" sz="3200" b="1" dirty="0">
+                <a:solidFill>
+                  <a:srgbClr val="C0504D"/>
+                </a:solidFill>
+                <a:latin typeface="Calibri" pitchFamily="34" charset="0"/>
+                <a:ea typeface="Calibri" pitchFamily="34" charset="-122"/>
+                <a:cs typeface="Calibri" pitchFamily="34" charset="-120"/>
+              </a:rPr>
+              <a:t>47,3%</a:t>
+            </a:r>
+            <a:endParaRPr lang="en-US" sz="3200" dirty="0"/>
+          </a:p>
+        </p:txBody>
+      </p:sp>
+      <p:sp>
+        <p:nvSpPr>
+          <p:cNvPr id="7" name="Text 5"/>
+          <p:cNvSpPr txBox="1"/>
+          <p:nvPr/>
+        </p:nvSpPr>
+        <p:spPr>
+          <a:xfrm>
+            <a:off x="7543800" y="2697480"/>
+            <a:ext cx="1737360" cy="640080"/>
+          </a:xfrm>
+          <a:prstGeom prst="rect">
+            <a:avLst/>
+          </a:prstGeom>
+          <a:noFill/>
+          <a:ln/>
+        </p:spPr>
+        <p:txBody>
+          <a:bodyPr wrap="square" lIns="0" tIns="0" rIns="0" bIns="0" rtlCol="0" anchor="ctr"/>
+          <a:lstStyle/>
+          <a:p>
+            <a:pPr indent="0" marL="0">
+              <a:lnSpc>
+                <a:spcPct val="110000"/>
+              </a:lnSpc>
+              <a:buNone/>
+            </a:pPr>
+            <a:r>
               <a:rPr lang="en-US" sz="1150" dirty="0">
                 <a:solidFill>
-                  <a:srgbClr val="1A2B28"/>
-                </a:solidFill>
-                <a:latin typeface="Calibri" pitchFamily="34" charset="0"/>
-                <a:ea typeface="Calibri" pitchFamily="34" charset="-122"/>
-                <a:cs typeface="Calibri" pitchFamily="34" charset="-120"/>
-              </a:rPr>
-              <a:t>UF</a:t>
+                  <a:srgbClr val="6B7C77"/>
+                </a:solidFill>
+                <a:latin typeface="Calibri" pitchFamily="34" charset="0"/>
+                <a:ea typeface="Calibri" pitchFamily="34" charset="-122"/>
+                <a:cs typeface="Calibri" pitchFamily="34" charset="-120"/>
+              </a:rPr>
+              <a:t>baixa renda,</a:t>
             </a:r>
             <a:endParaRPr lang="en-US" sz="1150" dirty="0"/>
           </a:p>
-        </p:txBody>
-      </p:sp>
-      <p:sp>
-        <p:nvSpPr>
-          <p:cNvPr id="10" name="Text 8"/>
-          <p:cNvSpPr txBox="1"/>
-          <p:nvPr/>
-        </p:nvSpPr>
-        <p:spPr>
-          <a:xfrm>
-            <a:off x="10515600" y="2560320"/>
-            <a:ext cx="960120" cy="329184"/>
-          </a:xfrm>
-          <a:prstGeom prst="rect">
-            <a:avLst/>
-          </a:prstGeom>
-          <a:noFill/>
-          <a:ln/>
-        </p:spPr>
-        <p:txBody>
-          <a:bodyPr wrap="square" lIns="0" tIns="0" rIns="0" bIns="0" rtlCol="0" anchor="ctr"/>
-          <a:lstStyle/>
-          <a:p>
-            <a:pPr algn="r" indent="0" marL="0">
-              <a:buNone/>
-            </a:pPr>
-            <a:r>
-              <a:rPr lang="en-US" sz="1150" b="1" dirty="0">
+          <a:p>
+            <a:pPr indent="0" marL="0">
+              <a:lnSpc>
+                <a:spcPct val="110000"/>
+              </a:lnSpc>
+              <a:buNone/>
+            </a:pPr>
+            <a:r>
+              <a:rPr lang="en-US" sz="1150" dirty="0">
                 <a:solidFill>
                   <a:srgbClr val="6B7C77"/>
                 </a:solidFill>
@@ -7998,7 +5705,7 @@
                 <a:ea typeface="Calibri" pitchFamily="34" charset="-122"/>
                 <a:cs typeface="Calibri" pitchFamily="34" charset="-120"/>
               </a:rPr>
-              <a:t>0,016</a:t>
+              <a:t>desempenho crítico</a:t>
             </a:r>
             <a:endParaRPr lang="en-US" sz="1150" dirty="0"/>
           </a:p>
@@ -8006,18 +5713,18 @@
       </p:sp>
       <p:sp>
         <p:nvSpPr>
-          <p:cNvPr id="11" name="Shape 9"/>
+          <p:cNvPr id="8" name="Shape 6"/>
           <p:cNvSpPr/>
           <p:nvPr/>
         </p:nvSpPr>
         <p:spPr>
           <a:xfrm>
-            <a:off x="7406640" y="3099816"/>
-            <a:ext cx="4206240" cy="566928"/>
+            <a:off x="9601200" y="1737360"/>
+            <a:ext cx="2011680" cy="1828800"/>
           </a:xfrm>
           <a:prstGeom prst="roundRect">
             <a:avLst>
-              <a:gd name="adj" fmla="val 9677"/>
+              <a:gd name="adj" fmla="val 4000"/>
             </a:avLst>
           </a:prstGeom>
           <a:solidFill>
@@ -8033,14 +5740,14 @@
       </p:sp>
       <p:sp>
         <p:nvSpPr>
-          <p:cNvPr id="12" name="Text 10"/>
-          <p:cNvSpPr txBox="1"/>
-          <p:nvPr/>
-        </p:nvSpPr>
-        <p:spPr>
-          <a:xfrm>
-            <a:off x="7543800" y="3218688"/>
-            <a:ext cx="2926080" cy="329184"/>
+          <p:cNvPr id="9" name="Text 7"/>
+          <p:cNvSpPr txBox="1"/>
+          <p:nvPr/>
+        </p:nvSpPr>
+        <p:spPr>
+          <a:xfrm>
+            <a:off x="9738360" y="1901952"/>
+            <a:ext cx="1737360" cy="868680"/>
           </a:xfrm>
           <a:prstGeom prst="rect">
             <a:avLst/>
@@ -8056,46 +5763,69 @@
               <a:buNone/>
             </a:pPr>
             <a:r>
+              <a:rPr lang="en-US" sz="3200" b="1" dirty="0">
+                <a:solidFill>
+                  <a:srgbClr val="1B6B5A"/>
+                </a:solidFill>
+                <a:latin typeface="Calibri" pitchFamily="34" charset="0"/>
+                <a:ea typeface="Calibri" pitchFamily="34" charset="-122"/>
+                <a:cs typeface="Calibri" pitchFamily="34" charset="-120"/>
+              </a:rPr>
+              <a:t>74,0%</a:t>
+            </a:r>
+            <a:endParaRPr lang="en-US" sz="3200" dirty="0"/>
+          </a:p>
+        </p:txBody>
+      </p:sp>
+      <p:sp>
+        <p:nvSpPr>
+          <p:cNvPr id="10" name="Text 8"/>
+          <p:cNvSpPr txBox="1"/>
+          <p:nvPr/>
+        </p:nvSpPr>
+        <p:spPr>
+          <a:xfrm>
+            <a:off x="9738360" y="2697480"/>
+            <a:ext cx="1737360" cy="640080"/>
+          </a:xfrm>
+          <a:prstGeom prst="rect">
+            <a:avLst/>
+          </a:prstGeom>
+          <a:noFill/>
+          <a:ln/>
+        </p:spPr>
+        <p:txBody>
+          <a:bodyPr wrap="square" lIns="0" tIns="0" rIns="0" bIns="0" rtlCol="0" anchor="ctr"/>
+          <a:lstStyle/>
+          <a:p>
+            <a:pPr indent="0" marL="0">
+              <a:lnSpc>
+                <a:spcPct val="110000"/>
+              </a:lnSpc>
+              <a:buNone/>
+            </a:pPr>
+            <a:r>
               <a:rPr lang="en-US" sz="1150" dirty="0">
                 <a:solidFill>
-                  <a:srgbClr val="1A2B28"/>
-                </a:solidFill>
-                <a:latin typeface="Calibri" pitchFamily="34" charset="0"/>
-                <a:ea typeface="Calibri" pitchFamily="34" charset="-122"/>
-                <a:cs typeface="Calibri" pitchFamily="34" charset="-120"/>
-              </a:rPr>
-              <a:t>Meta municipal</a:t>
+                  <a:srgbClr val="6B7C77"/>
+                </a:solidFill>
+                <a:latin typeface="Calibri" pitchFamily="34" charset="0"/>
+                <a:ea typeface="Calibri" pitchFamily="34" charset="-122"/>
+                <a:cs typeface="Calibri" pitchFamily="34" charset="-120"/>
+              </a:rPr>
+              <a:t>baixa renda,</a:t>
             </a:r>
             <a:endParaRPr lang="en-US" sz="1150" dirty="0"/>
           </a:p>
-        </p:txBody>
-      </p:sp>
-      <p:sp>
-        <p:nvSpPr>
-          <p:cNvPr id="13" name="Text 11"/>
-          <p:cNvSpPr txBox="1"/>
-          <p:nvPr/>
-        </p:nvSpPr>
-        <p:spPr>
-          <a:xfrm>
-            <a:off x="10515600" y="3218688"/>
-            <a:ext cx="960120" cy="329184"/>
-          </a:xfrm>
-          <a:prstGeom prst="rect">
-            <a:avLst/>
-          </a:prstGeom>
-          <a:noFill/>
-          <a:ln/>
-        </p:spPr>
-        <p:txBody>
-          <a:bodyPr wrap="square" lIns="0" tIns="0" rIns="0" bIns="0" rtlCol="0" anchor="ctr"/>
-          <a:lstStyle/>
-          <a:p>
-            <a:pPr algn="r" indent="0" marL="0">
-              <a:buNone/>
-            </a:pPr>
-            <a:r>
-              <a:rPr lang="en-US" sz="1150" b="1" dirty="0">
+          <a:p>
+            <a:pPr indent="0" marL="0">
+              <a:lnSpc>
+                <a:spcPct val="110000"/>
+              </a:lnSpc>
+              <a:buNone/>
+            </a:pPr>
+            <a:r>
+              <a:rPr lang="en-US" sz="1150" dirty="0">
                 <a:solidFill>
                   <a:srgbClr val="6B7C77"/>
                 </a:solidFill>
@@ -8103,7 +5833,7 @@
                 <a:ea typeface="Calibri" pitchFamily="34" charset="-122"/>
                 <a:cs typeface="Calibri" pitchFamily="34" charset="-120"/>
               </a:rPr>
-              <a:t>0,015</a:t>
+              <a:t>bom desempenho</a:t>
             </a:r>
             <a:endParaRPr lang="en-US" sz="1150" dirty="0"/>
           </a:p>
@@ -8111,18 +5841,18 @@
       </p:sp>
       <p:sp>
         <p:nvSpPr>
-          <p:cNvPr id="14" name="Shape 12"/>
+          <p:cNvPr id="11" name="Shape 9"/>
           <p:cNvSpPr/>
           <p:nvPr/>
         </p:nvSpPr>
         <p:spPr>
           <a:xfrm>
-            <a:off x="7406640" y="3758184"/>
-            <a:ext cx="4206240" cy="566928"/>
+            <a:off x="7406640" y="3840480"/>
+            <a:ext cx="4206240" cy="1554480"/>
           </a:xfrm>
           <a:prstGeom prst="roundRect">
             <a:avLst>
-              <a:gd name="adj" fmla="val 9677"/>
+              <a:gd name="adj" fmla="val 4706"/>
             </a:avLst>
           </a:prstGeom>
           <a:solidFill>
@@ -8138,14 +5868,14 @@
       </p:sp>
       <p:sp>
         <p:nvSpPr>
-          <p:cNvPr id="15" name="Text 13"/>
-          <p:cNvSpPr txBox="1"/>
-          <p:nvPr/>
-        </p:nvSpPr>
-        <p:spPr>
-          <a:xfrm>
-            <a:off x="7543800" y="3877056"/>
-            <a:ext cx="2926080" cy="329184"/>
+          <p:cNvPr id="12" name="Text 10"/>
+          <p:cNvSpPr txBox="1"/>
+          <p:nvPr/>
+        </p:nvSpPr>
+        <p:spPr>
+          <a:xfrm>
+            <a:off x="7543800" y="4005072"/>
+            <a:ext cx="3931920" cy="868680"/>
           </a:xfrm>
           <a:prstGeom prst="rect">
             <a:avLst/>
@@ -8161,200 +5891,59 @@
               <a:buNone/>
             </a:pPr>
             <a:r>
+              <a:rPr lang="en-US" sz="3200" b="1" dirty="0">
+                <a:solidFill>
+                  <a:srgbClr val="E8A33D"/>
+                </a:solidFill>
+                <a:latin typeface="Calibri" pitchFamily="34" charset="0"/>
+                <a:ea typeface="Calibri" pitchFamily="34" charset="-122"/>
+                <a:cs typeface="Calibri" pitchFamily="34" charset="-120"/>
+              </a:rPr>
+              <a:t>R$ 16,6 mil</a:t>
+            </a:r>
+            <a:endParaRPr lang="en-US" sz="3200" dirty="0"/>
+          </a:p>
+        </p:txBody>
+      </p:sp>
+      <p:sp>
+        <p:nvSpPr>
+          <p:cNvPr id="13" name="Text 11"/>
+          <p:cNvSpPr txBox="1"/>
+          <p:nvPr/>
+        </p:nvSpPr>
+        <p:spPr>
+          <a:xfrm>
+            <a:off x="7543800" y="4800600"/>
+            <a:ext cx="3931920" cy="640080"/>
+          </a:xfrm>
+          <a:prstGeom prst="rect">
+            <a:avLst/>
+          </a:prstGeom>
+          <a:noFill/>
+          <a:ln/>
+        </p:spPr>
+        <p:txBody>
+          <a:bodyPr wrap="square" lIns="0" tIns="0" rIns="0" bIns="0" rtlCol="0" anchor="ctr"/>
+          <a:lstStyle/>
+          <a:p>
+            <a:pPr indent="0" marL="0">
+              <a:lnSpc>
+                <a:spcPct val="110000"/>
+              </a:lnSpc>
+              <a:buNone/>
+            </a:pPr>
+            <a:r>
               <a:rPr lang="en-US" sz="1150" dirty="0">
                 <a:solidFill>
-                  <a:srgbClr val="1A2B28"/>
-                </a:solidFill>
-                <a:latin typeface="Calibri" pitchFamily="34" charset="0"/>
-                <a:ea typeface="Calibri" pitchFamily="34" charset="-122"/>
-                <a:cs typeface="Calibri" pitchFamily="34" charset="-120"/>
-              </a:rPr>
-              <a:t>IDEB do município</a:t>
+                  <a:srgbClr val="6B7C77"/>
+                </a:solidFill>
+                <a:latin typeface="Calibri" pitchFamily="34" charset="0"/>
+                <a:ea typeface="Calibri" pitchFamily="34" charset="-122"/>
+                <a:cs typeface="Calibri" pitchFamily="34" charset="-120"/>
+              </a:rPr>
+              <a:t>o mesmo PIB per capita nos dois grupos</a:t>
             </a:r>
             <a:endParaRPr lang="en-US" sz="1150" dirty="0"/>
-          </a:p>
-        </p:txBody>
-      </p:sp>
-      <p:sp>
-        <p:nvSpPr>
-          <p:cNvPr id="16" name="Text 14"/>
-          <p:cNvSpPr txBox="1"/>
-          <p:nvPr/>
-        </p:nvSpPr>
-        <p:spPr>
-          <a:xfrm>
-            <a:off x="10515600" y="3877056"/>
-            <a:ext cx="960120" cy="329184"/>
-          </a:xfrm>
-          <a:prstGeom prst="rect">
-            <a:avLst/>
-          </a:prstGeom>
-          <a:noFill/>
-          <a:ln/>
-        </p:spPr>
-        <p:txBody>
-          <a:bodyPr wrap="square" lIns="0" tIns="0" rIns="0" bIns="0" rtlCol="0" anchor="ctr"/>
-          <a:lstStyle/>
-          <a:p>
-            <a:pPr algn="r" indent="0" marL="0">
-              <a:buNone/>
-            </a:pPr>
-            <a:r>
-              <a:rPr lang="en-US" sz="1150" b="1" dirty="0">
-                <a:solidFill>
-                  <a:srgbClr val="6B7C77"/>
-                </a:solidFill>
-                <a:latin typeface="Calibri" pitchFamily="34" charset="0"/>
-                <a:ea typeface="Calibri" pitchFamily="34" charset="-122"/>
-                <a:cs typeface="Calibri" pitchFamily="34" charset="-120"/>
-              </a:rPr>
-              <a:t>0,006</a:t>
-            </a:r>
-            <a:endParaRPr lang="en-US" sz="1150" dirty="0"/>
-          </a:p>
-        </p:txBody>
-      </p:sp>
-      <p:sp>
-        <p:nvSpPr>
-          <p:cNvPr id="17" name="Shape 15"/>
-          <p:cNvSpPr/>
-          <p:nvPr/>
-        </p:nvSpPr>
-        <p:spPr>
-          <a:xfrm>
-            <a:off x="7406640" y="4416552"/>
-            <a:ext cx="4206240" cy="566928"/>
-          </a:xfrm>
-          <a:prstGeom prst="roundRect">
-            <a:avLst>
-              <a:gd name="adj" fmla="val 9677"/>
-            </a:avLst>
-          </a:prstGeom>
-          <a:solidFill>
-            <a:srgbClr val="F2F6F4"/>
-          </a:solidFill>
-          <a:ln w="12700">
-            <a:solidFill>
-              <a:srgbClr val="F2F6F4"/>
-            </a:solidFill>
-            <a:prstDash val="solid"/>
-          </a:ln>
-        </p:spPr>
-      </p:sp>
-      <p:sp>
-        <p:nvSpPr>
-          <p:cNvPr id="18" name="Text 16"/>
-          <p:cNvSpPr txBox="1"/>
-          <p:nvPr/>
-        </p:nvSpPr>
-        <p:spPr>
-          <a:xfrm>
-            <a:off x="7543800" y="4535424"/>
-            <a:ext cx="2926080" cy="329184"/>
-          </a:xfrm>
-          <a:prstGeom prst="rect">
-            <a:avLst/>
-          </a:prstGeom>
-          <a:noFill/>
-          <a:ln/>
-        </p:spPr>
-        <p:txBody>
-          <a:bodyPr wrap="square" lIns="0" tIns="0" rIns="0" bIns="0" rtlCol="0" anchor="ctr"/>
-          <a:lstStyle/>
-          <a:p>
-            <a:pPr indent="0" marL="0">
-              <a:buNone/>
-            </a:pPr>
-            <a:r>
-              <a:rPr lang="en-US" sz="1150" dirty="0">
-                <a:solidFill>
-                  <a:srgbClr val="1A2B28"/>
-                </a:solidFill>
-                <a:latin typeface="Calibri" pitchFamily="34" charset="0"/>
-                <a:ea typeface="Calibri" pitchFamily="34" charset="-122"/>
-                <a:cs typeface="Calibri" pitchFamily="34" charset="-120"/>
-              </a:rPr>
-              <a:t>Taxa histórica da UF</a:t>
-            </a:r>
-            <a:endParaRPr lang="en-US" sz="1150" dirty="0"/>
-          </a:p>
-        </p:txBody>
-      </p:sp>
-      <p:sp>
-        <p:nvSpPr>
-          <p:cNvPr id="19" name="Text 17"/>
-          <p:cNvSpPr txBox="1"/>
-          <p:nvPr/>
-        </p:nvSpPr>
-        <p:spPr>
-          <a:xfrm>
-            <a:off x="10515600" y="4535424"/>
-            <a:ext cx="960120" cy="329184"/>
-          </a:xfrm>
-          <a:prstGeom prst="rect">
-            <a:avLst/>
-          </a:prstGeom>
-          <a:noFill/>
-          <a:ln/>
-        </p:spPr>
-        <p:txBody>
-          <a:bodyPr wrap="square" lIns="0" tIns="0" rIns="0" bIns="0" rtlCol="0" anchor="ctr"/>
-          <a:lstStyle/>
-          <a:p>
-            <a:pPr algn="r" indent="0" marL="0">
-              <a:buNone/>
-            </a:pPr>
-            <a:r>
-              <a:rPr lang="en-US" sz="1150" b="1" dirty="0">
-                <a:solidFill>
-                  <a:srgbClr val="6B7C77"/>
-                </a:solidFill>
-                <a:latin typeface="Calibri" pitchFamily="34" charset="0"/>
-                <a:ea typeface="Calibri" pitchFamily="34" charset="-122"/>
-                <a:cs typeface="Calibri" pitchFamily="34" charset="-120"/>
-              </a:rPr>
-              <a:t>0,005</a:t>
-            </a:r>
-            <a:endParaRPr lang="en-US" sz="1150" dirty="0"/>
-          </a:p>
-        </p:txBody>
-      </p:sp>
-      <p:sp>
-        <p:nvSpPr>
-          <p:cNvPr id="20" name="Text 18"/>
-          <p:cNvSpPr txBox="1"/>
-          <p:nvPr/>
-        </p:nvSpPr>
-        <p:spPr>
-          <a:xfrm>
-            <a:off x="548640" y="6263640"/>
-            <a:ext cx="11064240" cy="274320"/>
-          </a:xfrm>
-          <a:prstGeom prst="rect">
-            <a:avLst/>
-          </a:prstGeom>
-          <a:noFill/>
-          <a:ln/>
-        </p:spPr>
-        <p:txBody>
-          <a:bodyPr wrap="square" lIns="0" tIns="0" rIns="0" bIns="0" rtlCol="0" anchor="ctr"/>
-          <a:lstStyle/>
-          <a:p>
-            <a:pPr indent="0" marL="0">
-              <a:buNone/>
-            </a:pPr>
-            <a:r>
-              <a:rPr lang="en-US" sz="1050" i="1" dirty="0">
-                <a:solidFill>
-                  <a:srgbClr val="6B7C77"/>
-                </a:solidFill>
-                <a:latin typeface="Calibri" pitchFamily="34" charset="0"/>
-                <a:ea typeface="Calibri" pitchFamily="34" charset="-122"/>
-                <a:cs typeface="Calibri" pitchFamily="34" charset="-120"/>
-              </a:rPr>
-              <a:t>Queda no ROC-AUC ao embaralhar cada variável.</a:t>
-            </a:r>
-            <a:endParaRPr lang="en-US" sz="1050" dirty="0"/>
           </a:p>
         </p:txBody>
       </p:sp>

--- a/docs/apresentacao.pptx
+++ b/docs/apresentacao.pptx
@@ -3055,7 +3055,7 @@
                 <a:ea typeface="Calibri" pitchFamily="34" charset="-122"/>
                 <a:cs typeface="Calibri" pitchFamily="34" charset="-120"/>
               </a:rPr>
-              <a:t>Dá para saber antes?</a:t>
+              <a:t>Quis responder uma pergunta: dá para saber antes?</a:t>
             </a:r>
             <a:endParaRPr lang="en-US" sz="1500" dirty="0"/>
           </a:p>
@@ -3374,7 +3374,7 @@
                 <a:ea typeface="Calibri" pitchFamily="34" charset="-122"/>
                 <a:cs typeface="Calibri" pitchFamily="34" charset="-120"/>
               </a:rPr>
-              <a:t>O que foi construído</a:t>
+              <a:t>O que eu construí</a:t>
             </a:r>
             <a:endParaRPr lang="en-US" sz="3200" dirty="0"/>
           </a:p>
@@ -3416,7 +3416,7 @@
                 <a:ea typeface="Calibri" pitchFamily="34" charset="-122"/>
                 <a:cs typeface="Calibri" pitchFamily="34" charset="-120"/>
               </a:rPr>
-              <a:t>Um modelo que estima a probabilidade de uma criança ser alfabetizada.</a:t>
+              <a:t>Construí um modelo que estima a chance de uma criança ser alfabetizada.</a:t>
             </a:r>
             <a:endParaRPr lang="en-US" sz="1500" dirty="0"/>
           </a:p>
@@ -3445,7 +3445,7 @@
                 <a:ea typeface="Calibri" pitchFamily="34" charset="-122"/>
                 <a:cs typeface="Calibri" pitchFamily="34" charset="-120"/>
               </a:rPr>
-              <a:t>A Gold da Fase 2 servia a relatório, no grão de município. Construímos uma nova camada Gold no grão de aluno.</a:t>
+              <a:t>A base que eu tinha da Fase 2 guardava uma linha por município. Como preciso prever criança por criança, montei uma base nova, com uma linha por aluno.</a:t>
             </a:r>
             <a:endParaRPr lang="en-US" sz="1500" dirty="0"/>
           </a:p>
@@ -3474,7 +3474,7 @@
                 <a:ea typeface="Calibri" pitchFamily="34" charset="-122"/>
                 <a:cs typeface="Calibri" pitchFamily="34" charset="-120"/>
               </a:rPr>
-              <a:t>Um comando roda as nove etapas, da extração à publicação, e para sozinho se a qualidade cair.</a:t>
+              <a:t>Um comando roda tudo, da busca dos dados até a publicação do resultado.</a:t>
             </a:r>
             <a:endParaRPr lang="en-US" sz="1500" dirty="0"/>
           </a:p>
@@ -3864,7 +3864,7 @@
                 <a:ea typeface="Calibri" pitchFamily="34" charset="-122"/>
                 <a:cs typeface="Calibri" pitchFamily="34" charset="-120"/>
               </a:rPr>
-              <a:t>2</a:t>
+              <a:t>9</a:t>
             </a:r>
             <a:endParaRPr lang="en-US" sz="3200" dirty="0"/>
           </a:p>
@@ -3906,7 +3906,7 @@
                 <a:ea typeface="Calibri" pitchFamily="34" charset="-122"/>
                 <a:cs typeface="Calibri" pitchFamily="34" charset="-120"/>
               </a:rPr>
-              <a:t>tabelas Gold novas</a:t>
+              <a:t>etapas automatizadas</a:t>
             </a:r>
             <a:endParaRPr lang="en-US" sz="1150" dirty="0"/>
           </a:p>
@@ -4051,7 +4051,7 @@
                 <a:ea typeface="Calibri" pitchFamily="34" charset="-122"/>
                 <a:cs typeface="Calibri" pitchFamily="34" charset="-120"/>
               </a:rPr>
-              <a:t>A proficiência define o alvo: acima de 743, alfabetizada. Um modelo com ela acertaria 100% e não serviria para nada, porque antes da prova esse número não existe.</a:t>
+              <a:t>Comecei jogando fora a variável mais forte da base.</a:t>
             </a:r>
             <a:endParaRPr lang="en-US" sz="1500" dirty="0"/>
           </a:p>
@@ -4080,7 +4080,7 @@
                 <a:ea typeface="Calibri" pitchFamily="34" charset="-122"/>
                 <a:cs typeface="Calibri" pitchFamily="34" charset="-120"/>
               </a:rPr>
-              <a:t>Ao investigar, descobrimos que todo aluno ausente entra como não alfabetizado.</a:t>
+              <a:t>A proficiência é a própria resposta: acima de 743, a criança é alfabetizada. Com ela o modelo acertaria tudo e não serviria para nada, porque antes da prova esse número não existe.</a:t>
             </a:r>
             <a:endParaRPr lang="en-US" sz="1500" dirty="0"/>
           </a:p>
@@ -4109,7 +4109,7 @@
                 <a:ea typeface="Calibri" pitchFamily="34" charset="-122"/>
                 <a:cs typeface="Calibri" pitchFamily="34" charset="-120"/>
               </a:rPr>
-              <a:t>Saem do treino:</a:t>
+              <a:t>Descobri também que todo aluno faltante entra como não alfabetizado. Tirei quatro colunas:</a:t>
             </a:r>
             <a:endParaRPr lang="en-US" sz="1500" dirty="0"/>
           </a:p>
@@ -4252,7 +4252,7 @@
                 <a:ea typeface="Calibri" pitchFamily="34" charset="-122"/>
                 <a:cs typeface="Calibri" pitchFamily="34" charset="-120"/>
               </a:rPr>
-              <a:t>As duas classes se separam exatamente no corte, sem uma única exceção.</a:t>
+              <a:t>As duas cores se separam exatamente no corte, sem uma única exceção.</a:t>
             </a:r>
             <a:endParaRPr lang="en-US" sz="1050" dirty="0"/>
           </a:p>
@@ -4355,7 +4355,7 @@
                 <a:ea typeface="Calibri" pitchFamily="34" charset="-122"/>
                 <a:cs typeface="Calibri" pitchFamily="34" charset="-120"/>
               </a:rPr>
-              <a:t>Um quarto da classe negativa nunca fez a prova</a:t>
+              <a:t>Um quarto deles nunca fez a prova</a:t>
             </a:r>
             <a:endParaRPr lang="en-US" sz="3200" dirty="0"/>
           </a:p>
@@ -4397,7 +4397,7 @@
                 <a:ea typeface="Calibri" pitchFamily="34" charset="-122"/>
                 <a:cs typeface="Calibri" pitchFamily="34" charset="-120"/>
               </a:rPr>
-              <a:t>Dos 1,88 milhão de alunos contados como não alfabetizados, 513 mil nunca fizeram a prova. São 27% do problema.</a:t>
+              <a:t>De 1,88 milhão de alunos contados como não alfabetizados, 513 mil nunca fizeram a prova. É um quarto do problema.</a:t>
             </a:r>
             <a:endParaRPr lang="en-US" sz="1500" dirty="0"/>
           </a:p>
@@ -4426,7 +4426,7 @@
                 <a:ea typeface="Calibri" pitchFamily="34" charset="-122"/>
                 <a:cs typeface="Calibri" pitchFamily="34" charset="-120"/>
               </a:rPr>
-              <a:t>Separando aprendizagem de participação, o ranking das regiões muda.</a:t>
+              <a:t>Separei aprendizagem de participação, e o retrato do país mudou.</a:t>
             </a:r>
             <a:endParaRPr lang="en-US" sz="1500" dirty="0"/>
           </a:p>
@@ -4455,7 +4455,7 @@
                 <a:ea typeface="Calibri" pitchFamily="34" charset="-122"/>
                 <a:cs typeface="Calibri" pitchFamily="34" charset="-120"/>
               </a:rPr>
-              <a:t>O Sul lidera entre quem faz a prova e cai para terceiro no indicador oficial: tem a maior ausência do país.</a:t>
+              <a:t>O Sul tem o melhor desempenho entre quem faz a prova e cai para terceiro no indicador oficial: é a região com mais ausência.</a:t>
             </a:r>
             <a:endParaRPr lang="en-US" sz="1500" dirty="0"/>
           </a:p>
@@ -4663,7 +4663,7 @@
                 <a:ea typeface="Calibri" pitchFamily="34" charset="-122"/>
                 <a:cs typeface="Calibri" pitchFamily="34" charset="-120"/>
               </a:rPr>
-              <a:t>Antes de treinar, definimos a nota mínima: superar o chute em 5 pontos de acurácia.</a:t>
+              <a:t>Antes de treinar, escrevi a nota mínima que o modelo teria de alcançar.</a:t>
             </a:r>
             <a:endParaRPr lang="en-US" sz="1500" dirty="0"/>
           </a:p>
@@ -4692,7 +4692,7 @@
                 <a:ea typeface="Calibri" pitchFamily="34" charset="-122"/>
                 <a:cs typeface="Calibri" pitchFamily="34" charset="-120"/>
               </a:rPr>
-              <a:t>O modelo entregou 3,8 e reprovou. A pipeline parou.</a:t>
+              <a:t>Ele não alcançou, e a execução parou sozinha.</a:t>
             </a:r>
             <a:endParaRPr lang="en-US" sz="1500" dirty="0"/>
           </a:p>
@@ -4721,7 +4721,7 @@
                 <a:ea typeface="Calibri" pitchFamily="34" charset="-122"/>
                 <a:cs typeface="Calibri" pitchFamily="34" charset="-120"/>
               </a:rPr>
-              <a:t>Fomos medir o teto. Nem a taxa real do município alcançaria os 5 pontos: o critério era impossível.</a:t>
+              <a:t>Fui medir o limite do que era possível. Nem sabendo o resultado real de cada município eu chegaria naquela nota. Ou seja, quem estava mal calibrado era o critério.</a:t>
             </a:r>
             <a:endParaRPr lang="en-US" sz="1500" dirty="0"/>
           </a:p>
@@ -4750,7 +4750,7 @@
                 <a:ea typeface="Calibri" pitchFamily="34" charset="-122"/>
                 <a:cs typeface="Calibri" pitchFamily="34" charset="-120"/>
               </a:rPr>
-              <a:t>A curva confirma que mais dados não ajudariam.</a:t>
+              <a:t>A curva mostra que mais dados também não ajudariam.</a:t>
             </a:r>
             <a:endParaRPr lang="en-US" sz="1500" dirty="0"/>
           </a:p>
@@ -4813,7 +4813,7 @@
                 <a:ea typeface="Calibri" pitchFamily="34" charset="-122"/>
                 <a:cs typeface="Calibri" pitchFamily="34" charset="-120"/>
               </a:rPr>
-              <a:t>ROC-AUC por volume de treino: de 224 mil a 1,49 milhão de alunos.</a:t>
+              <a:t>A nota do modelo conforme aumento o treino.</a:t>
             </a:r>
             <a:endParaRPr lang="en-US" sz="1050" dirty="0"/>
           </a:p>
@@ -4958,7 +4958,7 @@
                 <a:ea typeface="Calibri" pitchFamily="34" charset="-122"/>
                 <a:cs typeface="Calibri" pitchFamily="34" charset="-120"/>
               </a:rPr>
-              <a:t>No grão da criança o modelo é modesto: ROC-AUC de 0,66.</a:t>
+              <a:t>Para prever uma criança, o modelo é fraco.</a:t>
             </a:r>
             <a:endParaRPr lang="en-US" sz="1500" dirty="0"/>
           </a:p>
@@ -4987,7 +4987,7 @@
                 <a:ea typeface="Calibri" pitchFamily="34" charset="-122"/>
                 <a:cs typeface="Calibri" pitchFamily="34" charset="-120"/>
               </a:rPr>
-              <a:t>Agregando as predições por município, a correlação com o resultado real é de 0,83.</a:t>
+              <a:t>Mas quando somo as previsões de cada município, a correlação com o resultado real chega a 0,83.</a:t>
             </a:r>
             <a:endParaRPr lang="en-US" sz="1500" dirty="0"/>
           </a:p>
@@ -5016,7 +5016,7 @@
                 <a:ea typeface="Calibri" pitchFamily="34" charset="-122"/>
                 <a:cs typeface="Calibri" pitchFamily="34" charset="-120"/>
               </a:rPr>
-              <a:t>Os erros individuais são grandes, mas não sistemáticos, e se cancelam na média.</a:t>
+              <a:t>Os erros individuais são grandes e se cancelam na média.</a:t>
             </a:r>
             <a:endParaRPr lang="en-US" sz="1500" dirty="0"/>
           </a:p>
@@ -5108,7 +5108,7 @@
                 <a:ea typeface="Calibri" pitchFamily="34" charset="-122"/>
                 <a:cs typeface="Calibri" pitchFamily="34" charset="-120"/>
               </a:rPr>
-              <a:t>Cada ponto é um município: previsto no eixo X, real no eixo Y.</a:t>
+              <a:t>Cada ponto é um município: o que previ no eixo X, o que aconteceu no eixo Y.</a:t>
             </a:r>
             <a:endParaRPr lang="en-US" sz="1050" dirty="0"/>
           </a:p>
@@ -5253,7 +5253,7 @@
                 <a:ea typeface="Calibri" pitchFamily="34" charset="-122"/>
                 <a:cs typeface="Calibri" pitchFamily="34" charset="-120"/>
               </a:rPr>
-              <a:t>A história do próprio município domina, com o dobro do peso da segunda variável.</a:t>
+              <a:t>O que mais pesa é a história do próprio município, com o dobro da segunda variável.</a:t>
             </a:r>
             <a:endParaRPr lang="en-US" sz="1500" dirty="0"/>
           </a:p>
@@ -5282,7 +5282,7 @@
                 <a:ea typeface="Calibri" pitchFamily="34" charset="-122"/>
                 <a:cs typeface="Calibri" pitchFamily="34" charset="-120"/>
               </a:rPr>
-              <a:t>As cinco mais influentes são territoriais. O que descreve o aluno quase não pesa.</a:t>
+              <a:t>As cinco primeiras são todas territoriais. O que descreve o aluno quase não conta.</a:t>
             </a:r>
             <a:endParaRPr lang="en-US" sz="1500" dirty="0"/>
           </a:p>
@@ -5311,7 +5311,7 @@
                 <a:ea typeface="Calibri" pitchFamily="34" charset="-122"/>
                 <a:cs typeface="Calibri" pitchFamily="34" charset="-120"/>
               </a:rPr>
-              <a:t>Uma ressalva: o modelo mede associação, e associação não é causa. Sem dados de professor, turma ou família, o território acaba representando tudo isso junto.</a:t>
+              <a:t>Uma ressalva: isso mostra associação, e associação é diferente de causa. Como não tenho dados de professor, turma ou família, o território acaba representando tudo isso.</a:t>
             </a:r>
             <a:endParaRPr lang="en-US" sz="1500" dirty="0"/>
           </a:p>
@@ -5374,7 +5374,7 @@
                 <a:ea typeface="Calibri" pitchFamily="34" charset="-122"/>
                 <a:cs typeface="Calibri" pitchFamily="34" charset="-120"/>
               </a:rPr>
-              <a:t>Queda no ROC-AUC ao embaralhar cada variável.</a:t>
+              <a:t>O quanto o modelo piora quando embaralho cada variável.</a:t>
             </a:r>
             <a:endParaRPr lang="en-US" sz="1050" dirty="0"/>
           </a:p>
@@ -5519,7 +5519,7 @@
                 <a:ea typeface="Calibri" pitchFamily="34" charset="-122"/>
                 <a:cs typeface="Calibri" pitchFamily="34" charset="-120"/>
               </a:rPr>
-              <a:t>O agrupamento separou os municípios em quatro perfis. Dois deles têm exatamente o mesmo PIB per capita.</a:t>
+              <a:t>Agrupei os municípios por perfil. Dois grupos têm exatamente a mesma renda por habitante.</a:t>
             </a:r>
             <a:endParaRPr lang="en-US" sz="1500" dirty="0"/>
           </a:p>
@@ -5548,7 +5548,7 @@
                 <a:ea typeface="Calibri" pitchFamily="34" charset="-122"/>
                 <a:cs typeface="Calibri" pitchFamily="34" charset="-120"/>
               </a:rPr>
-              <a:t>São 1.351 municípios de baixa renda alfabetizando acima da média nacional.</a:t>
+              <a:t>Um alfabetiza 47% das crianças. O outro, 74%.</a:t>
             </a:r>
             <a:endParaRPr lang="en-US" sz="1500" dirty="0"/>
           </a:p>
@@ -5577,7 +5577,7 @@
                 <a:ea typeface="Calibri" pitchFamily="34" charset="-122"/>
                 <a:cs typeface="Calibri" pitchFamily="34" charset="-120"/>
               </a:rPr>
-              <a:t>A renda não determina o resultado. Em vez de explicar o fracasso pela pobreza, vale investigar o que esses municípios fazem que os outros não fazem.</a:t>
+              <a:t>São 1.351 municípios pobres acima da média nacional. A renda não decide o resultado, e vale investigar o que esses municípios fazem de diferente.</a:t>
             </a:r>
             <a:endParaRPr lang="en-US" sz="1500" dirty="0"/>
           </a:p>

--- a/docs/apresentacao.pptx
+++ b/docs/apresentacao.pptx
@@ -2120,11 +2120,11 @@
         <p:spPr>
           <a:xfrm>
             <a:off x="548640" y="1600200"/>
-            <a:ext cx="11064240" cy="841248"/>
+            <a:ext cx="11064240" cy="886968"/>
           </a:xfrm>
           <a:prstGeom prst="roundRect">
             <a:avLst>
-              <a:gd name="adj" fmla="val 6522"/>
+              <a:gd name="adj" fmla="val 6186"/>
             </a:avLst>
           </a:prstGeom>
           <a:solidFill>
@@ -2146,8 +2146,8 @@
         </p:nvSpPr>
         <p:spPr>
           <a:xfrm>
-            <a:off x="777240" y="1682496"/>
-            <a:ext cx="4572000" cy="676656"/>
+            <a:off x="777240" y="1691640"/>
+            <a:ext cx="4114800" cy="713232"/>
           </a:xfrm>
           <a:prstGeom prst="rect">
             <a:avLst/>
@@ -2163,7 +2163,7 @@
               <a:buNone/>
             </a:pPr>
             <a:r>
-              <a:rPr lang="en-US" sz="1350" b="1" dirty="0">
+              <a:rPr lang="en-US" sz="1300" b="1" dirty="0">
                 <a:solidFill>
                   <a:srgbClr val="1B6B5A"/>
                 </a:solidFill>
@@ -2173,7 +2173,7 @@
               </a:rPr>
               <a:t>Quais fatores mais impactam a alfabetização?</a:t>
             </a:r>
-            <a:endParaRPr lang="en-US" sz="1350" dirty="0"/>
+            <a:endParaRPr lang="en-US" sz="1300" dirty="0"/>
           </a:p>
         </p:txBody>
       </p:sp>
@@ -2185,8 +2185,8 @@
         </p:nvSpPr>
         <p:spPr>
           <a:xfrm>
-            <a:off x="5577840" y="1682496"/>
-            <a:ext cx="5852160" cy="676656"/>
+            <a:off x="5120640" y="1691640"/>
+            <a:ext cx="6309360" cy="713232"/>
           </a:xfrm>
           <a:prstGeom prst="rect">
             <a:avLst/>
@@ -2202,7 +2202,7 @@
               <a:buNone/>
             </a:pPr>
             <a:r>
-              <a:rPr lang="en-US" sz="1300" dirty="0">
+              <a:rPr lang="en-US" sz="1250" dirty="0">
                 <a:solidFill>
                   <a:srgbClr val="1A2B28"/>
                 </a:solidFill>
@@ -2210,9 +2210,9 @@
                 <a:ea typeface="Calibri" pitchFamily="34" charset="-122"/>
                 <a:cs typeface="Calibri" pitchFamily="34" charset="-120"/>
               </a:rPr>
-              <a:t>A história do município, com o dobro do peso da segunda variável</a:t>
-            </a:r>
-            <a:endParaRPr lang="en-US" sz="1300" dirty="0"/>
+              <a:t>Onde a criança estuda. O desempenho do município no ano anterior é o fator mais forte.</a:t>
+            </a:r>
+            <a:endParaRPr lang="en-US" sz="1250" dirty="0"/>
           </a:p>
         </p:txBody>
       </p:sp>
@@ -2224,12 +2224,12 @@
         </p:nvSpPr>
         <p:spPr>
           <a:xfrm>
-            <a:off x="548640" y="2514600"/>
-            <a:ext cx="11064240" cy="841248"/>
+            <a:off x="548640" y="2560320"/>
+            <a:ext cx="11064240" cy="886968"/>
           </a:xfrm>
           <a:prstGeom prst="roundRect">
             <a:avLst>
-              <a:gd name="adj" fmla="val 6522"/>
+              <a:gd name="adj" fmla="val 6186"/>
             </a:avLst>
           </a:prstGeom>
           <a:solidFill>
@@ -2251,8 +2251,8 @@
         </p:nvSpPr>
         <p:spPr>
           <a:xfrm>
-            <a:off x="777240" y="2596896"/>
-            <a:ext cx="4572000" cy="676656"/>
+            <a:off x="777240" y="2651760"/>
+            <a:ext cx="4114800" cy="713232"/>
           </a:xfrm>
           <a:prstGeom prst="rect">
             <a:avLst/>
@@ -2268,7 +2268,7 @@
               <a:buNone/>
             </a:pPr>
             <a:r>
-              <a:rPr lang="en-US" sz="1350" b="1" dirty="0">
+              <a:rPr lang="en-US" sz="1300" b="1" dirty="0">
                 <a:solidFill>
                   <a:srgbClr val="1B6B5A"/>
                 </a:solidFill>
@@ -2278,7 +2278,7 @@
               </a:rPr>
               <a:t>Quais variáveis influenciam mais o modelo?</a:t>
             </a:r>
-            <a:endParaRPr lang="en-US" sz="1350" dirty="0"/>
+            <a:endParaRPr lang="en-US" sz="1300" dirty="0"/>
           </a:p>
         </p:txBody>
       </p:sp>
@@ -2290,8 +2290,8 @@
         </p:nvSpPr>
         <p:spPr>
           <a:xfrm>
-            <a:off x="5577840" y="2596896"/>
-            <a:ext cx="5852160" cy="676656"/>
+            <a:off x="5120640" y="2651760"/>
+            <a:ext cx="6309360" cy="713232"/>
           </a:xfrm>
           <a:prstGeom prst="rect">
             <a:avLst/>
@@ -2307,7 +2307,7 @@
               <a:buNone/>
             </a:pPr>
             <a:r>
-              <a:rPr lang="en-US" sz="1300" dirty="0">
+              <a:rPr lang="en-US" sz="1250" dirty="0">
                 <a:solidFill>
                   <a:srgbClr val="1A2B28"/>
                 </a:solidFill>
@@ -2315,9 +2315,9 @@
                 <a:ea typeface="Calibri" pitchFamily="34" charset="-122"/>
                 <a:cs typeface="Calibri" pitchFamily="34" charset="-120"/>
               </a:rPr>
-              <a:t>Taxa histórica, UF e meta municipal; as cinco primeiras são territoriais</a:t>
-            </a:r>
-            <a:endParaRPr lang="en-US" sz="1300" dirty="0"/>
+              <a:t>As cinco maiores são todas de território. O que descreve o aluno quase não pesa.</a:t>
+            </a:r>
+            <a:endParaRPr lang="en-US" sz="1250" dirty="0"/>
           </a:p>
         </p:txBody>
       </p:sp>
@@ -2329,12 +2329,12 @@
         </p:nvSpPr>
         <p:spPr>
           <a:xfrm>
-            <a:off x="548640" y="3429000"/>
-            <a:ext cx="11064240" cy="841248"/>
+            <a:off x="548640" y="3520440"/>
+            <a:ext cx="11064240" cy="886968"/>
           </a:xfrm>
           <a:prstGeom prst="roundRect">
             <a:avLst>
-              <a:gd name="adj" fmla="val 6522"/>
+              <a:gd name="adj" fmla="val 6186"/>
             </a:avLst>
           </a:prstGeom>
           <a:solidFill>
@@ -2356,8 +2356,8 @@
         </p:nvSpPr>
         <p:spPr>
           <a:xfrm>
-            <a:off x="777240" y="3511296"/>
-            <a:ext cx="4572000" cy="676656"/>
+            <a:off x="777240" y="3611880"/>
+            <a:ext cx="4114800" cy="713232"/>
           </a:xfrm>
           <a:prstGeom prst="rect">
             <a:avLst/>
@@ -2373,7 +2373,7 @@
               <a:buNone/>
             </a:pPr>
             <a:r>
-              <a:rPr lang="en-US" sz="1350" b="1" dirty="0">
+              <a:rPr lang="en-US" sz="1300" b="1" dirty="0">
                 <a:solidFill>
                   <a:srgbClr val="1B6B5A"/>
                 </a:solidFill>
@@ -2383,7 +2383,7 @@
               </a:rPr>
               <a:t>Quais municípios apresentam maior risco?</a:t>
             </a:r>
-            <a:endParaRPr lang="en-US" sz="1350" dirty="0"/>
+            <a:endParaRPr lang="en-US" sz="1300" dirty="0"/>
           </a:p>
         </p:txBody>
       </p:sp>
@@ -2395,8 +2395,8 @@
         </p:nvSpPr>
         <p:spPr>
           <a:xfrm>
-            <a:off x="5577840" y="3511296"/>
-            <a:ext cx="5852160" cy="676656"/>
+            <a:off x="5120640" y="3611880"/>
+            <a:ext cx="6309360" cy="713232"/>
           </a:xfrm>
           <a:prstGeom prst="rect">
             <a:avLst/>
@@ -2412,7 +2412,7 @@
               <a:buNone/>
             </a:pPr>
             <a:r>
-              <a:rPr lang="en-US" sz="1300" dirty="0">
+              <a:rPr lang="en-US" sz="1250" dirty="0">
                 <a:solidFill>
                   <a:srgbClr val="1A2B28"/>
                 </a:solidFill>
@@ -2420,9 +2420,9 @@
                 <a:ea typeface="Calibri" pitchFamily="34" charset="-122"/>
                 <a:cs typeface="Calibri" pitchFamily="34" charset="-120"/>
               </a:rPr>
-              <a:t>1.028 no quinto mais crítico, 690 deles no Nordeste</a:t>
-            </a:r>
-            <a:endParaRPr lang="en-US" sz="1300" dirty="0"/>
+              <a:t>Os 1.028 com a menor taxa prevista. Quase 90% ficam no Nordeste e no Norte.</a:t>
+            </a:r>
+            <a:endParaRPr lang="en-US" sz="1250" dirty="0"/>
           </a:p>
         </p:txBody>
       </p:sp>
@@ -2434,12 +2434,12 @@
         </p:nvSpPr>
         <p:spPr>
           <a:xfrm>
-            <a:off x="548640" y="4343400"/>
-            <a:ext cx="11064240" cy="841248"/>
+            <a:off x="548640" y="4480560"/>
+            <a:ext cx="11064240" cy="886968"/>
           </a:xfrm>
           <a:prstGeom prst="roundRect">
             <a:avLst>
-              <a:gd name="adj" fmla="val 6522"/>
+              <a:gd name="adj" fmla="val 6186"/>
             </a:avLst>
           </a:prstGeom>
           <a:solidFill>
@@ -2461,8 +2461,8 @@
         </p:nvSpPr>
         <p:spPr>
           <a:xfrm>
-            <a:off x="777240" y="4425696"/>
-            <a:ext cx="4572000" cy="676656"/>
+            <a:off x="777240" y="4572000"/>
+            <a:ext cx="4114800" cy="713232"/>
           </a:xfrm>
           <a:prstGeom prst="rect">
             <a:avLst/>
@@ -2478,7 +2478,7 @@
               <a:buNone/>
             </a:pPr>
             <a:r>
-              <a:rPr lang="en-US" sz="1350" b="1" dirty="0">
+              <a:rPr lang="en-US" sz="1300" b="1" dirty="0">
                 <a:solidFill>
                   <a:srgbClr val="1B6B5A"/>
                 </a:solidFill>
@@ -2488,7 +2488,7 @@
               </a:rPr>
               <a:t>Quais regiões têm padrões semelhantes?</a:t>
             </a:r>
-            <a:endParaRPr lang="en-US" sz="1350" dirty="0"/>
+            <a:endParaRPr lang="en-US" sz="1300" dirty="0"/>
           </a:p>
         </p:txBody>
       </p:sp>
@@ -2500,8 +2500,8 @@
         </p:nvSpPr>
         <p:spPr>
           <a:xfrm>
-            <a:off x="5577840" y="4425696"/>
-            <a:ext cx="5852160" cy="676656"/>
+            <a:off x="5120640" y="4572000"/>
+            <a:ext cx="6309360" cy="713232"/>
           </a:xfrm>
           <a:prstGeom prst="rect">
             <a:avLst/>
@@ -2517,7 +2517,7 @@
               <a:buNone/>
             </a:pPr>
             <a:r>
-              <a:rPr lang="en-US" sz="1300" dirty="0">
+              <a:rPr lang="en-US" sz="1250" dirty="0">
                 <a:solidFill>
                   <a:srgbClr val="1A2B28"/>
                 </a:solidFill>
@@ -2525,9 +2525,9 @@
                 <a:ea typeface="Calibri" pitchFamily="34" charset="-122"/>
                 <a:cs typeface="Calibri" pitchFamily="34" charset="-120"/>
               </a:rPr>
-              <a:t>Quatro perfis; dois com a mesma renda e 27 pontos de diferença</a:t>
-            </a:r>
-            <a:endParaRPr lang="en-US" sz="1300" dirty="0"/>
+              <a:t>Os municípios formam quatro perfis. Dois têm a mesma renda e taxas de 47% e 74%.</a:t>
+            </a:r>
+            <a:endParaRPr lang="en-US" sz="1250" dirty="0"/>
           </a:p>
         </p:txBody>
       </p:sp>
@@ -2539,12 +2539,12 @@
         </p:nvSpPr>
         <p:spPr>
           <a:xfrm>
-            <a:off x="548640" y="5257800"/>
-            <a:ext cx="11064240" cy="841248"/>
+            <a:off x="548640" y="5440680"/>
+            <a:ext cx="11064240" cy="886968"/>
           </a:xfrm>
           <a:prstGeom prst="roundRect">
             <a:avLst>
-              <a:gd name="adj" fmla="val 6522"/>
+              <a:gd name="adj" fmla="val 6186"/>
             </a:avLst>
           </a:prstGeom>
           <a:solidFill>
@@ -2566,8 +2566,8 @@
         </p:nvSpPr>
         <p:spPr>
           <a:xfrm>
-            <a:off x="777240" y="5340096"/>
-            <a:ext cx="4572000" cy="676656"/>
+            <a:off x="777240" y="5532120"/>
+            <a:ext cx="4114800" cy="713232"/>
           </a:xfrm>
           <a:prstGeom prst="rect">
             <a:avLst/>
@@ -2583,7 +2583,7 @@
               <a:buNone/>
             </a:pPr>
             <a:r>
-              <a:rPr lang="en-US" sz="1350" b="1" dirty="0">
+              <a:rPr lang="en-US" sz="1300" b="1" dirty="0">
                 <a:solidFill>
                   <a:srgbClr val="1B6B5A"/>
                 </a:solidFill>
@@ -2593,7 +2593,7 @@
               </a:rPr>
               <a:t>Como prever quem não atinge a meta de 2030?</a:t>
             </a:r>
-            <a:endParaRPr lang="en-US" sz="1350" dirty="0"/>
+            <a:endParaRPr lang="en-US" sz="1300" dirty="0"/>
           </a:p>
         </p:txBody>
       </p:sp>
@@ -2605,8 +2605,8 @@
         </p:nvSpPr>
         <p:spPr>
           <a:xfrm>
-            <a:off x="5577840" y="5340096"/>
-            <a:ext cx="5852160" cy="676656"/>
+            <a:off x="5120640" y="5532120"/>
+            <a:ext cx="6309360" cy="713232"/>
           </a:xfrm>
           <a:prstGeom prst="rect">
             <a:avLst/>
@@ -2622,7 +2622,7 @@
               <a:buNone/>
             </a:pPr>
             <a:r>
-              <a:rPr lang="en-US" sz="1300" dirty="0">
+              <a:rPr lang="en-US" sz="1250" dirty="0">
                 <a:solidFill>
                   <a:srgbClr val="1A2B28"/>
                 </a:solidFill>
@@ -2630,9 +2630,9 @@
                 <a:ea typeface="Calibri" pitchFamily="34" charset="-122"/>
                 <a:cs typeface="Calibri" pitchFamily="34" charset="-120"/>
               </a:rPr>
-              <a:t>O país avança 2,68 p.p./ano e a meta pede 2,76</a:t>
-            </a:r>
-            <a:endParaRPr lang="en-US" sz="1300" dirty="0"/>
+              <a:t>Comparando o avanço de cada ano com o necessário. O país sobe 2,68 pontos ao ano e a meta pede 2,76.</a:t>
+            </a:r>
+            <a:endParaRPr lang="en-US" sz="1250" dirty="0"/>
           </a:p>
         </p:txBody>
       </p:sp>

--- a/docs/apresentacao.pptx
+++ b/docs/apresentacao.pptx
@@ -16,9 +16,10 @@
     <p:sldId id="264" r:id="rId10"/>
     <p:sldId id="265" r:id="rId11"/>
     <p:sldId id="266" r:id="rId12"/>
+    <p:sldId id="267" r:id="rId13"/>
   </p:sldIdLst>
   <p:notesMasterIdLst>
-    <p:notesMasterId r:id="rId13"/>
+    <p:notesMasterId r:id="rId14"/>
   </p:notesMasterIdLst>
   <p:sldSz cx="12192000" cy="6858000"/>
   <p:notesSz cx="6858000" cy="12192000"/>
@@ -712,6 +713,94 @@
             <a:fld id="{F7021451-1387-4CA6-816F-3879F97B5CBC}" type="slidenum">
               <a:rPr lang="en-US"/>
               <a:t>11</a:t>
+            </a:fld>
+            <a:endParaRPr lang="en-US"/>
+          </a:p>
+        </p:txBody>
+      </p:sp>
+    </p:spTree>
+    <p:extLst>
+      <p:ext uri="{BB962C8B-B14F-4D97-AF65-F5344CB8AC3E}">
+        <p14:creationId xmlns:p14="http://schemas.microsoft.com/office/powerpoint/2010/main" val="1024086991"/>
+      </p:ext>
+    </p:extLst>
+  </p:cSld>
+  <p:clrMapOvr>
+    <a:masterClrMapping/>
+  </p:clrMapOvr>
+</p:notes>
+</file>
+
+<file path=ppt/notesSlides/notesSlide12.xml><?xml version="1.0" encoding="utf-8"?>
+<p:notes xmlns:a="http://schemas.openxmlformats.org/drawingml/2006/main" xmlns:r="http://schemas.openxmlformats.org/officeDocument/2006/relationships" xmlns:p="http://schemas.openxmlformats.org/presentationml/2006/main">
+  <p:cSld>
+    <p:spTree>
+      <p:nvGrpSpPr>
+        <p:cNvPr id="1" name=""/>
+        <p:cNvGrpSpPr/>
+        <p:nvPr/>
+      </p:nvGrpSpPr>
+      <p:grpSpPr>
+        <a:xfrm>
+          <a:off x="0" y="0"/>
+          <a:ext cx="0" cy="0"/>
+          <a:chOff x="0" y="0"/>
+          <a:chExt cx="0" cy="0"/>
+        </a:xfrm>
+      </p:grpSpPr>
+      <p:sp>
+        <p:nvSpPr>
+          <p:cNvPr id="2" name="Slide Image Placeholder 1"/>
+          <p:cNvSpPr>
+            <a:spLocks noGrp="1" noRot="1" noChangeAspect="1"/>
+          </p:cNvSpPr>
+          <p:nvPr>
+            <p:ph type="sldImg"/>
+          </p:nvPr>
+        </p:nvSpPr>
+        <p:spPr/>
+      </p:sp>
+      <p:sp>
+        <p:nvSpPr>
+          <p:cNvPr id="3" name="Notes Placeholder 2"/>
+          <p:cNvSpPr>
+            <a:spLocks noGrp="1"/>
+          </p:cNvSpPr>
+          <p:nvPr>
+            <p:ph type="body" idx="1"/>
+          </p:nvPr>
+        </p:nvSpPr>
+        <p:spPr/>
+        <p:txBody>
+          <a:bodyPr/>
+          <a:lstStyle/>
+          <a:p>
+            <a:r>
+              <a:rPr lang="en-US" dirty="0"/>
+              <a:t/>
+            </a:r>
+            <a:endParaRPr lang="en-US" dirty="0"/>
+          </a:p>
+        </p:txBody>
+      </p:sp>
+      <p:sp>
+        <p:nvSpPr>
+          <p:cNvPr id="4" name="Slide Number Placeholder 3"/>
+          <p:cNvSpPr>
+            <a:spLocks noGrp="1"/>
+          </p:cNvSpPr>
+          <p:nvPr>
+            <p:ph type="sldNum" sz="quarter" idx="10"/>
+          </p:nvPr>
+        </p:nvSpPr>
+        <p:spPr/>
+        <p:txBody>
+          <a:bodyPr/>
+          <a:lstStyle/>
+          <a:p>
+            <a:fld id="{F7021451-1387-4CA6-816F-3879F97B5CBC}" type="slidenum">
+              <a:rPr lang="en-US"/>
+              <a:t>12</a:t>
             </a:fld>
             <a:endParaRPr lang="en-US"/>
           </a:p>
@@ -2066,7 +2155,7 @@
                 <a:ea typeface="Calibri" pitchFamily="34" charset="-122"/>
                 <a:cs typeface="Calibri" pitchFamily="34" charset="-120"/>
               </a:rPr>
-              <a:t>CONCLUSÃO</a:t>
+              <a:t>APLICAÇÃO</a:t>
             </a:r>
             <a:endParaRPr lang="en-US" sz="1200" dirty="0"/>
           </a:p>
@@ -2105,7 +2194,7 @@
                 <a:ea typeface="Calibri" pitchFamily="34" charset="-122"/>
                 <a:cs typeface="Calibri" pitchFamily="34" charset="-120"/>
               </a:rPr>
-              <a:t>As cinco perguntas, respondidas</a:t>
+              <a:t>Onde a política precisa chegar primeiro</a:t>
             </a:r>
             <a:endParaRPr lang="en-US" sz="3200" dirty="0"/>
           </a:p>
@@ -2113,41 +2202,138 @@
       </p:sp>
       <p:sp>
         <p:nvSpPr>
-          <p:cNvPr id="4" name="Shape 2"/>
-          <p:cNvSpPr/>
+          <p:cNvPr id="4" name="Text 2"/>
+          <p:cNvSpPr txBox="1"/>
           <p:nvPr/>
         </p:nvSpPr>
         <p:spPr>
           <a:xfrm>
             <a:off x="548640" y="1600200"/>
-            <a:ext cx="11064240" cy="886968"/>
-          </a:xfrm>
-          <a:prstGeom prst="roundRect">
-            <a:avLst>
-              <a:gd name="adj" fmla="val 6186"/>
-            </a:avLst>
-          </a:prstGeom>
-          <a:solidFill>
-            <a:srgbClr val="EDF3F0"/>
-          </a:solidFill>
-          <a:ln w="12700">
-            <a:solidFill>
-              <a:srgbClr val="F2F6F4"/>
-            </a:solidFill>
-            <a:prstDash val="solid"/>
-          </a:ln>
-        </p:spPr>
-      </p:sp>
-      <p:sp>
-        <p:nvSpPr>
-          <p:cNvPr id="5" name="Text 3"/>
-          <p:cNvSpPr txBox="1"/>
-          <p:nvPr/>
-        </p:nvSpPr>
-        <p:spPr>
-          <a:xfrm>
-            <a:off x="777240" y="1691640"/>
-            <a:ext cx="4114800" cy="713232"/>
+            <a:ext cx="4572000" cy="4206240"/>
+          </a:xfrm>
+          <a:prstGeom prst="rect">
+            <a:avLst/>
+          </a:prstGeom>
+          <a:noFill/>
+          <a:ln/>
+        </p:spPr>
+        <p:txBody>
+          <a:bodyPr wrap="square" lIns="0" tIns="0" rIns="0" bIns="0" rtlCol="0" anchor="t"/>
+          <a:lstStyle/>
+          <a:p>
+            <a:pPr indent="0" marL="0">
+              <a:lnSpc>
+                <a:spcPct val="132000"/>
+              </a:lnSpc>
+              <a:buNone/>
+            </a:pPr>
+            <a:r>
+              <a:rPr lang="en-US" sz="1500" dirty="0">
+                <a:solidFill>
+                  <a:srgbClr val="1A2B28"/>
+                </a:solidFill>
+                <a:latin typeface="Calibri" pitchFamily="34" charset="0"/>
+                <a:ea typeface="Calibri" pitchFamily="34" charset="-122"/>
+                <a:cs typeface="Calibri" pitchFamily="34" charset="-120"/>
+              </a:rPr>
+              <a:t>Ordenei os 5.517 municípios pela taxa prevista e separei o quinto mais crítico: 1.028 municípios.</a:t>
+            </a:r>
+            <a:endParaRPr lang="en-US" sz="1500" dirty="0"/>
+          </a:p>
+          <a:p>
+            <a:pPr indent="0" marL="0">
+              <a:lnSpc>
+                <a:spcPct val="132000"/>
+              </a:lnSpc>
+              <a:buNone/>
+            </a:pPr>
+            <a:endParaRPr lang="en-US" sz="1500" dirty="0"/>
+          </a:p>
+          <a:p>
+            <a:pPr indent="0" marL="0">
+              <a:lnSpc>
+                <a:spcPct val="132000"/>
+              </a:lnSpc>
+              <a:buNone/>
+            </a:pPr>
+            <a:r>
+              <a:rPr lang="en-US" sz="1500" dirty="0">
+                <a:solidFill>
+                  <a:srgbClr val="1A2B28"/>
+                </a:solidFill>
+                <a:latin typeface="Calibri" pitchFamily="34" charset="0"/>
+                <a:ea typeface="Calibri" pitchFamily="34" charset="-122"/>
+                <a:cs typeface="Calibri" pitchFamily="34" charset="-120"/>
+              </a:rPr>
+              <a:t>Quase 90% deles estão no Nordeste e no Norte.</a:t>
+            </a:r>
+            <a:endParaRPr lang="en-US" sz="1500" dirty="0"/>
+          </a:p>
+          <a:p>
+            <a:pPr indent="0" marL="0">
+              <a:lnSpc>
+                <a:spcPct val="132000"/>
+              </a:lnSpc>
+              <a:buNone/>
+            </a:pPr>
+            <a:endParaRPr lang="en-US" sz="1500" dirty="0"/>
+          </a:p>
+          <a:p>
+            <a:pPr indent="0" marL="0">
+              <a:lnSpc>
+                <a:spcPct val="132000"/>
+              </a:lnSpc>
+              <a:buNone/>
+            </a:pPr>
+            <a:r>
+              <a:rPr lang="en-US" sz="1500" dirty="0">
+                <a:solidFill>
+                  <a:srgbClr val="1A2B28"/>
+                </a:solidFill>
+                <a:latin typeface="Calibri" pitchFamily="34" charset="0"/>
+                <a:ea typeface="Calibri" pitchFamily="34" charset="-122"/>
+                <a:cs typeface="Calibri" pitchFamily="34" charset="-120"/>
+              </a:rPr>
+              <a:t>Para a meta de 2030, comparo o avanço de cada ano com o necessário: o país sobe 2,68 pontos ao ano e precisaria de 2,76.</a:t>
+            </a:r>
+            <a:endParaRPr lang="en-US" sz="1500" dirty="0"/>
+          </a:p>
+        </p:txBody>
+      </p:sp>
+      <p:pic>
+        <p:nvPicPr>
+          <p:cNvPr id="5" name="Image 0" descr="/Users/thiago/Documents/ARQUIVOS PÓS/FASE 3/tech-challenge-fase3/images/15_risco_municipios.png">    </p:cNvPr>
+          <p:cNvPicPr>
+            <a:picLocks noChangeAspect="1"/>
+          </p:cNvPicPr>
+          <p:nvPr/>
+        </p:nvPicPr>
+        <p:blipFill>
+          <a:blip r:embed="rId1"/>
+          <a:stretch>
+            <a:fillRect/>
+          </a:stretch>
+        </p:blipFill>
+        <p:spPr>
+          <a:xfrm>
+            <a:off x="5486400" y="1828800"/>
+            <a:ext cx="6309360" cy="3739896"/>
+          </a:xfrm>
+          <a:prstGeom prst="rect">
+            <a:avLst/>
+          </a:prstGeom>
+        </p:spPr>
+      </p:pic>
+      <p:sp>
+        <p:nvSpPr>
+          <p:cNvPr id="6" name="Text 3"/>
+          <p:cNvSpPr txBox="1"/>
+          <p:nvPr/>
+        </p:nvSpPr>
+        <p:spPr>
+          <a:xfrm>
+            <a:off x="5486400" y="5614416"/>
+            <a:ext cx="6309360" cy="292608"/>
           </a:xfrm>
           <a:prstGeom prst="rect">
             <a:avLst/>
@@ -2159,480 +2345,21 @@
           <a:bodyPr wrap="square" lIns="0" tIns="0" rIns="0" bIns="0" rtlCol="0" anchor="ctr"/>
           <a:lstStyle/>
           <a:p>
-            <a:pPr indent="0" marL="0">
-              <a:buNone/>
-            </a:pPr>
-            <a:r>
-              <a:rPr lang="en-US" sz="1300" b="1" dirty="0">
-                <a:solidFill>
-                  <a:srgbClr val="1B6B5A"/>
-                </a:solidFill>
-                <a:latin typeface="Calibri" pitchFamily="34" charset="0"/>
-                <a:ea typeface="Calibri" pitchFamily="34" charset="-122"/>
-                <a:cs typeface="Calibri" pitchFamily="34" charset="-120"/>
-              </a:rPr>
-              <a:t>Quais fatores mais impactam a alfabetização?</a:t>
-            </a:r>
-            <a:endParaRPr lang="en-US" sz="1300" dirty="0"/>
-          </a:p>
-        </p:txBody>
-      </p:sp>
-      <p:sp>
-        <p:nvSpPr>
-          <p:cNvPr id="6" name="Text 4"/>
-          <p:cNvSpPr txBox="1"/>
-          <p:nvPr/>
-        </p:nvSpPr>
-        <p:spPr>
-          <a:xfrm>
-            <a:off x="5120640" y="1691640"/>
-            <a:ext cx="6309360" cy="713232"/>
-          </a:xfrm>
-          <a:prstGeom prst="rect">
-            <a:avLst/>
-          </a:prstGeom>
-          <a:noFill/>
-          <a:ln/>
-        </p:spPr>
-        <p:txBody>
-          <a:bodyPr wrap="square" lIns="0" tIns="0" rIns="0" bIns="0" rtlCol="0" anchor="ctr"/>
-          <a:lstStyle/>
-          <a:p>
-            <a:pPr indent="0" marL="0">
-              <a:buNone/>
-            </a:pPr>
-            <a:r>
-              <a:rPr lang="en-US" sz="1250" dirty="0">
-                <a:solidFill>
-                  <a:srgbClr val="1A2B28"/>
-                </a:solidFill>
-                <a:latin typeface="Calibri" pitchFamily="34" charset="0"/>
-                <a:ea typeface="Calibri" pitchFamily="34" charset="-122"/>
-                <a:cs typeface="Calibri" pitchFamily="34" charset="-120"/>
-              </a:rPr>
-              <a:t>Onde a criança estuda. O desempenho do município no ano anterior é o fator mais forte.</a:t>
-            </a:r>
-            <a:endParaRPr lang="en-US" sz="1250" dirty="0"/>
-          </a:p>
-        </p:txBody>
-      </p:sp>
-      <p:sp>
-        <p:nvSpPr>
-          <p:cNvPr id="7" name="Shape 5"/>
-          <p:cNvSpPr/>
-          <p:nvPr/>
-        </p:nvSpPr>
-        <p:spPr>
-          <a:xfrm>
-            <a:off x="548640" y="2560320"/>
-            <a:ext cx="11064240" cy="886968"/>
-          </a:xfrm>
-          <a:prstGeom prst="roundRect">
-            <a:avLst>
-              <a:gd name="adj" fmla="val 6186"/>
-            </a:avLst>
-          </a:prstGeom>
-          <a:solidFill>
-            <a:srgbClr val="F2F6F4"/>
-          </a:solidFill>
-          <a:ln w="12700">
-            <a:solidFill>
-              <a:srgbClr val="F2F6F4"/>
-            </a:solidFill>
-            <a:prstDash val="solid"/>
-          </a:ln>
-        </p:spPr>
-      </p:sp>
-      <p:sp>
-        <p:nvSpPr>
-          <p:cNvPr id="8" name="Text 6"/>
-          <p:cNvSpPr txBox="1"/>
-          <p:nvPr/>
-        </p:nvSpPr>
-        <p:spPr>
-          <a:xfrm>
-            <a:off x="777240" y="2651760"/>
-            <a:ext cx="4114800" cy="713232"/>
-          </a:xfrm>
-          <a:prstGeom prst="rect">
-            <a:avLst/>
-          </a:prstGeom>
-          <a:noFill/>
-          <a:ln/>
-        </p:spPr>
-        <p:txBody>
-          <a:bodyPr wrap="square" lIns="0" tIns="0" rIns="0" bIns="0" rtlCol="0" anchor="ctr"/>
-          <a:lstStyle/>
-          <a:p>
-            <a:pPr indent="0" marL="0">
-              <a:buNone/>
-            </a:pPr>
-            <a:r>
-              <a:rPr lang="en-US" sz="1300" b="1" dirty="0">
-                <a:solidFill>
-                  <a:srgbClr val="1B6B5A"/>
-                </a:solidFill>
-                <a:latin typeface="Calibri" pitchFamily="34" charset="0"/>
-                <a:ea typeface="Calibri" pitchFamily="34" charset="-122"/>
-                <a:cs typeface="Calibri" pitchFamily="34" charset="-120"/>
-              </a:rPr>
-              <a:t>Quais variáveis influenciam mais o modelo?</a:t>
-            </a:r>
-            <a:endParaRPr lang="en-US" sz="1300" dirty="0"/>
-          </a:p>
-        </p:txBody>
-      </p:sp>
-      <p:sp>
-        <p:nvSpPr>
-          <p:cNvPr id="9" name="Text 7"/>
-          <p:cNvSpPr txBox="1"/>
-          <p:nvPr/>
-        </p:nvSpPr>
-        <p:spPr>
-          <a:xfrm>
-            <a:off x="5120640" y="2651760"/>
-            <a:ext cx="6309360" cy="713232"/>
-          </a:xfrm>
-          <a:prstGeom prst="rect">
-            <a:avLst/>
-          </a:prstGeom>
-          <a:noFill/>
-          <a:ln/>
-        </p:spPr>
-        <p:txBody>
-          <a:bodyPr wrap="square" lIns="0" tIns="0" rIns="0" bIns="0" rtlCol="0" anchor="ctr"/>
-          <a:lstStyle/>
-          <a:p>
-            <a:pPr indent="0" marL="0">
-              <a:buNone/>
-            </a:pPr>
-            <a:r>
-              <a:rPr lang="en-US" sz="1250" dirty="0">
-                <a:solidFill>
-                  <a:srgbClr val="1A2B28"/>
-                </a:solidFill>
-                <a:latin typeface="Calibri" pitchFamily="34" charset="0"/>
-                <a:ea typeface="Calibri" pitchFamily="34" charset="-122"/>
-                <a:cs typeface="Calibri" pitchFamily="34" charset="-120"/>
-              </a:rPr>
-              <a:t>As cinco maiores são todas de território. O que descreve o aluno quase não pesa.</a:t>
-            </a:r>
-            <a:endParaRPr lang="en-US" sz="1250" dirty="0"/>
-          </a:p>
-        </p:txBody>
-      </p:sp>
-      <p:sp>
-        <p:nvSpPr>
-          <p:cNvPr id="10" name="Shape 8"/>
-          <p:cNvSpPr/>
-          <p:nvPr/>
-        </p:nvSpPr>
-        <p:spPr>
-          <a:xfrm>
-            <a:off x="548640" y="3520440"/>
-            <a:ext cx="11064240" cy="886968"/>
-          </a:xfrm>
-          <a:prstGeom prst="roundRect">
-            <a:avLst>
-              <a:gd name="adj" fmla="val 6186"/>
-            </a:avLst>
-          </a:prstGeom>
-          <a:solidFill>
-            <a:srgbClr val="EDF3F0"/>
-          </a:solidFill>
-          <a:ln w="12700">
-            <a:solidFill>
-              <a:srgbClr val="F2F6F4"/>
-            </a:solidFill>
-            <a:prstDash val="solid"/>
-          </a:ln>
-        </p:spPr>
-      </p:sp>
-      <p:sp>
-        <p:nvSpPr>
-          <p:cNvPr id="11" name="Text 9"/>
-          <p:cNvSpPr txBox="1"/>
-          <p:nvPr/>
-        </p:nvSpPr>
-        <p:spPr>
-          <a:xfrm>
-            <a:off x="777240" y="3611880"/>
-            <a:ext cx="4114800" cy="713232"/>
-          </a:xfrm>
-          <a:prstGeom prst="rect">
-            <a:avLst/>
-          </a:prstGeom>
-          <a:noFill/>
-          <a:ln/>
-        </p:spPr>
-        <p:txBody>
-          <a:bodyPr wrap="square" lIns="0" tIns="0" rIns="0" bIns="0" rtlCol="0" anchor="ctr"/>
-          <a:lstStyle/>
-          <a:p>
-            <a:pPr indent="0" marL="0">
-              <a:buNone/>
-            </a:pPr>
-            <a:r>
-              <a:rPr lang="en-US" sz="1300" b="1" dirty="0">
-                <a:solidFill>
-                  <a:srgbClr val="1B6B5A"/>
-                </a:solidFill>
-                <a:latin typeface="Calibri" pitchFamily="34" charset="0"/>
-                <a:ea typeface="Calibri" pitchFamily="34" charset="-122"/>
-                <a:cs typeface="Calibri" pitchFamily="34" charset="-120"/>
-              </a:rPr>
-              <a:t>Quais municípios apresentam maior risco?</a:t>
-            </a:r>
-            <a:endParaRPr lang="en-US" sz="1300" dirty="0"/>
-          </a:p>
-        </p:txBody>
-      </p:sp>
-      <p:sp>
-        <p:nvSpPr>
-          <p:cNvPr id="12" name="Text 10"/>
-          <p:cNvSpPr txBox="1"/>
-          <p:nvPr/>
-        </p:nvSpPr>
-        <p:spPr>
-          <a:xfrm>
-            <a:off x="5120640" y="3611880"/>
-            <a:ext cx="6309360" cy="713232"/>
-          </a:xfrm>
-          <a:prstGeom prst="rect">
-            <a:avLst/>
-          </a:prstGeom>
-          <a:noFill/>
-          <a:ln/>
-        </p:spPr>
-        <p:txBody>
-          <a:bodyPr wrap="square" lIns="0" tIns="0" rIns="0" bIns="0" rtlCol="0" anchor="ctr"/>
-          <a:lstStyle/>
-          <a:p>
-            <a:pPr indent="0" marL="0">
-              <a:buNone/>
-            </a:pPr>
-            <a:r>
-              <a:rPr lang="en-US" sz="1250" dirty="0">
-                <a:solidFill>
-                  <a:srgbClr val="1A2B28"/>
-                </a:solidFill>
-                <a:latin typeface="Calibri" pitchFamily="34" charset="0"/>
-                <a:ea typeface="Calibri" pitchFamily="34" charset="-122"/>
-                <a:cs typeface="Calibri" pitchFamily="34" charset="-120"/>
-              </a:rPr>
-              <a:t>Os 1.028 com a menor taxa prevista. Quase 90% ficam no Nordeste e no Norte.</a:t>
-            </a:r>
-            <a:endParaRPr lang="en-US" sz="1250" dirty="0"/>
-          </a:p>
-        </p:txBody>
-      </p:sp>
-      <p:sp>
-        <p:nvSpPr>
-          <p:cNvPr id="13" name="Shape 11"/>
-          <p:cNvSpPr/>
-          <p:nvPr/>
-        </p:nvSpPr>
-        <p:spPr>
-          <a:xfrm>
-            <a:off x="548640" y="4480560"/>
-            <a:ext cx="11064240" cy="886968"/>
-          </a:xfrm>
-          <a:prstGeom prst="roundRect">
-            <a:avLst>
-              <a:gd name="adj" fmla="val 6186"/>
-            </a:avLst>
-          </a:prstGeom>
-          <a:solidFill>
-            <a:srgbClr val="F2F6F4"/>
-          </a:solidFill>
-          <a:ln w="12700">
-            <a:solidFill>
-              <a:srgbClr val="F2F6F4"/>
-            </a:solidFill>
-            <a:prstDash val="solid"/>
-          </a:ln>
-        </p:spPr>
-      </p:sp>
-      <p:sp>
-        <p:nvSpPr>
-          <p:cNvPr id="14" name="Text 12"/>
-          <p:cNvSpPr txBox="1"/>
-          <p:nvPr/>
-        </p:nvSpPr>
-        <p:spPr>
-          <a:xfrm>
-            <a:off x="777240" y="4572000"/>
-            <a:ext cx="4114800" cy="713232"/>
-          </a:xfrm>
-          <a:prstGeom prst="rect">
-            <a:avLst/>
-          </a:prstGeom>
-          <a:noFill/>
-          <a:ln/>
-        </p:spPr>
-        <p:txBody>
-          <a:bodyPr wrap="square" lIns="0" tIns="0" rIns="0" bIns="0" rtlCol="0" anchor="ctr"/>
-          <a:lstStyle/>
-          <a:p>
-            <a:pPr indent="0" marL="0">
-              <a:buNone/>
-            </a:pPr>
-            <a:r>
-              <a:rPr lang="en-US" sz="1300" b="1" dirty="0">
-                <a:solidFill>
-                  <a:srgbClr val="1B6B5A"/>
-                </a:solidFill>
-                <a:latin typeface="Calibri" pitchFamily="34" charset="0"/>
-                <a:ea typeface="Calibri" pitchFamily="34" charset="-122"/>
-                <a:cs typeface="Calibri" pitchFamily="34" charset="-120"/>
-              </a:rPr>
-              <a:t>Quais regiões têm padrões semelhantes?</a:t>
-            </a:r>
-            <a:endParaRPr lang="en-US" sz="1300" dirty="0"/>
-          </a:p>
-        </p:txBody>
-      </p:sp>
-      <p:sp>
-        <p:nvSpPr>
-          <p:cNvPr id="15" name="Text 13"/>
-          <p:cNvSpPr txBox="1"/>
-          <p:nvPr/>
-        </p:nvSpPr>
-        <p:spPr>
-          <a:xfrm>
-            <a:off x="5120640" y="4572000"/>
-            <a:ext cx="6309360" cy="713232"/>
-          </a:xfrm>
-          <a:prstGeom prst="rect">
-            <a:avLst/>
-          </a:prstGeom>
-          <a:noFill/>
-          <a:ln/>
-        </p:spPr>
-        <p:txBody>
-          <a:bodyPr wrap="square" lIns="0" tIns="0" rIns="0" bIns="0" rtlCol="0" anchor="ctr"/>
-          <a:lstStyle/>
-          <a:p>
-            <a:pPr indent="0" marL="0">
-              <a:buNone/>
-            </a:pPr>
-            <a:r>
-              <a:rPr lang="en-US" sz="1250" dirty="0">
-                <a:solidFill>
-                  <a:srgbClr val="1A2B28"/>
-                </a:solidFill>
-                <a:latin typeface="Calibri" pitchFamily="34" charset="0"/>
-                <a:ea typeface="Calibri" pitchFamily="34" charset="-122"/>
-                <a:cs typeface="Calibri" pitchFamily="34" charset="-120"/>
-              </a:rPr>
-              <a:t>Os municípios formam quatro perfis. Dois têm a mesma renda e taxas de 47% e 74%.</a:t>
-            </a:r>
-            <a:endParaRPr lang="en-US" sz="1250" dirty="0"/>
-          </a:p>
-        </p:txBody>
-      </p:sp>
-      <p:sp>
-        <p:nvSpPr>
-          <p:cNvPr id="16" name="Shape 14"/>
-          <p:cNvSpPr/>
-          <p:nvPr/>
-        </p:nvSpPr>
-        <p:spPr>
-          <a:xfrm>
-            <a:off x="548640" y="5440680"/>
-            <a:ext cx="11064240" cy="886968"/>
-          </a:xfrm>
-          <a:prstGeom prst="roundRect">
-            <a:avLst>
-              <a:gd name="adj" fmla="val 6186"/>
-            </a:avLst>
-          </a:prstGeom>
-          <a:solidFill>
-            <a:srgbClr val="EDF3F0"/>
-          </a:solidFill>
-          <a:ln w="12700">
-            <a:solidFill>
-              <a:srgbClr val="F2F6F4"/>
-            </a:solidFill>
-            <a:prstDash val="solid"/>
-          </a:ln>
-        </p:spPr>
-      </p:sp>
-      <p:sp>
-        <p:nvSpPr>
-          <p:cNvPr id="17" name="Text 15"/>
-          <p:cNvSpPr txBox="1"/>
-          <p:nvPr/>
-        </p:nvSpPr>
-        <p:spPr>
-          <a:xfrm>
-            <a:off x="777240" y="5532120"/>
-            <a:ext cx="4114800" cy="713232"/>
-          </a:xfrm>
-          <a:prstGeom prst="rect">
-            <a:avLst/>
-          </a:prstGeom>
-          <a:noFill/>
-          <a:ln/>
-        </p:spPr>
-        <p:txBody>
-          <a:bodyPr wrap="square" lIns="0" tIns="0" rIns="0" bIns="0" rtlCol="0" anchor="ctr"/>
-          <a:lstStyle/>
-          <a:p>
-            <a:pPr indent="0" marL="0">
-              <a:buNone/>
-            </a:pPr>
-            <a:r>
-              <a:rPr lang="en-US" sz="1300" b="1" dirty="0">
-                <a:solidFill>
-                  <a:srgbClr val="1B6B5A"/>
-                </a:solidFill>
-                <a:latin typeface="Calibri" pitchFamily="34" charset="0"/>
-                <a:ea typeface="Calibri" pitchFamily="34" charset="-122"/>
-                <a:cs typeface="Calibri" pitchFamily="34" charset="-120"/>
-              </a:rPr>
-              <a:t>Como prever quem não atinge a meta de 2030?</a:t>
-            </a:r>
-            <a:endParaRPr lang="en-US" sz="1300" dirty="0"/>
-          </a:p>
-        </p:txBody>
-      </p:sp>
-      <p:sp>
-        <p:nvSpPr>
-          <p:cNvPr id="18" name="Text 16"/>
-          <p:cNvSpPr txBox="1"/>
-          <p:nvPr/>
-        </p:nvSpPr>
-        <p:spPr>
-          <a:xfrm>
-            <a:off x="5120640" y="5532120"/>
-            <a:ext cx="6309360" cy="713232"/>
-          </a:xfrm>
-          <a:prstGeom prst="rect">
-            <a:avLst/>
-          </a:prstGeom>
-          <a:noFill/>
-          <a:ln/>
-        </p:spPr>
-        <p:txBody>
-          <a:bodyPr wrap="square" lIns="0" tIns="0" rIns="0" bIns="0" rtlCol="0" anchor="ctr"/>
-          <a:lstStyle/>
-          <a:p>
-            <a:pPr indent="0" marL="0">
-              <a:buNone/>
-            </a:pPr>
-            <a:r>
-              <a:rPr lang="en-US" sz="1250" dirty="0">
-                <a:solidFill>
-                  <a:srgbClr val="1A2B28"/>
-                </a:solidFill>
-                <a:latin typeface="Calibri" pitchFamily="34" charset="0"/>
-                <a:ea typeface="Calibri" pitchFamily="34" charset="-122"/>
-                <a:cs typeface="Calibri" pitchFamily="34" charset="-120"/>
-              </a:rPr>
-              <a:t>Comparando o avanço de cada ano com o necessário. O país sobe 2,68 pontos ao ano e a meta pede 2,76.</a:t>
-            </a:r>
-            <a:endParaRPr lang="en-US" sz="1250" dirty="0"/>
+            <a:pPr algn="ctr" indent="0" marL="0">
+              <a:buNone/>
+            </a:pPr>
+            <a:r>
+              <a:rPr lang="en-US" sz="1050" i="1" dirty="0">
+                <a:solidFill>
+                  <a:srgbClr val="6B7C77"/>
+                </a:solidFill>
+                <a:latin typeface="Calibri" pitchFamily="34" charset="0"/>
+                <a:ea typeface="Calibri" pitchFamily="34" charset="-122"/>
+                <a:cs typeface="Calibri" pitchFamily="34" charset="-120"/>
+              </a:rPr>
+              <a:t>Distribuição dos municípios pela taxa prevista; em vermelho, o quinto mais crítico.</a:t>
+            </a:r>
+            <a:endParaRPr lang="en-US" sz="1050" dirty="0"/>
           </a:p>
         </p:txBody>
       </p:sp>
@@ -2647,6 +2374,634 @@
 <file path=ppt/slides/slide11.xml><?xml version="1.0" encoding="utf-8"?>
 <p:sld xmlns:a="http://schemas.openxmlformats.org/drawingml/2006/main" xmlns:r="http://schemas.openxmlformats.org/officeDocument/2006/relationships" xmlns:p="http://schemas.openxmlformats.org/presentationml/2006/main">
   <p:cSld name="Slide 11">
+    <p:spTree>
+      <p:nvGrpSpPr>
+        <p:cNvPr id="1" name=""/>
+        <p:cNvGrpSpPr/>
+        <p:nvPr/>
+      </p:nvGrpSpPr>
+      <p:grpSpPr>
+        <a:xfrm>
+          <a:off x="0" y="0"/>
+          <a:ext cx="0" cy="0"/>
+          <a:chOff x="0" y="0"/>
+          <a:chExt cx="0" cy="0"/>
+        </a:xfrm>
+      </p:grpSpPr>
+      <p:sp>
+        <p:nvSpPr>
+          <p:cNvPr id="2" name="Text 0"/>
+          <p:cNvSpPr txBox="1"/>
+          <p:nvPr/>
+        </p:nvSpPr>
+        <p:spPr>
+          <a:xfrm>
+            <a:off x="548640" y="274320"/>
+            <a:ext cx="10972800" cy="274320"/>
+          </a:xfrm>
+          <a:prstGeom prst="rect">
+            <a:avLst/>
+          </a:prstGeom>
+          <a:noFill/>
+          <a:ln/>
+        </p:spPr>
+        <p:txBody>
+          <a:bodyPr wrap="square" lIns="0" tIns="0" rIns="0" bIns="0" rtlCol="0" anchor="ctr"/>
+          <a:lstStyle/>
+          <a:p>
+            <a:pPr indent="0" marL="0">
+              <a:buNone/>
+            </a:pPr>
+            <a:r>
+              <a:rPr lang="en-US" sz="1200" b="1" dirty="0">
+                <a:solidFill>
+                  <a:srgbClr val="E8A33D"/>
+                </a:solidFill>
+                <a:latin typeface="Calibri" pitchFamily="34" charset="0"/>
+                <a:ea typeface="Calibri" pitchFamily="34" charset="-122"/>
+                <a:cs typeface="Calibri" pitchFamily="34" charset="-120"/>
+              </a:rPr>
+              <a:t>CONCLUSÃO</a:t>
+            </a:r>
+            <a:endParaRPr lang="en-US" sz="1200" dirty="0"/>
+          </a:p>
+        </p:txBody>
+      </p:sp>
+      <p:sp>
+        <p:nvSpPr>
+          <p:cNvPr id="3" name="Text 1"/>
+          <p:cNvSpPr txBox="1"/>
+          <p:nvPr/>
+        </p:nvSpPr>
+        <p:spPr>
+          <a:xfrm>
+            <a:off x="548640" y="502920"/>
+            <a:ext cx="11064240" cy="822960"/>
+          </a:xfrm>
+          <a:prstGeom prst="rect">
+            <a:avLst/>
+          </a:prstGeom>
+          <a:noFill/>
+          <a:ln/>
+        </p:spPr>
+        <p:txBody>
+          <a:bodyPr wrap="square" lIns="0" tIns="0" rIns="0" bIns="0" rtlCol="0" anchor="ctr"/>
+          <a:lstStyle/>
+          <a:p>
+            <a:pPr indent="0" marL="0">
+              <a:buNone/>
+            </a:pPr>
+            <a:r>
+              <a:rPr lang="en-US" sz="3200" b="1" dirty="0">
+                <a:solidFill>
+                  <a:srgbClr val="1A2B28"/>
+                </a:solidFill>
+                <a:latin typeface="Calibri" pitchFamily="34" charset="0"/>
+                <a:ea typeface="Calibri" pitchFamily="34" charset="-122"/>
+                <a:cs typeface="Calibri" pitchFamily="34" charset="-120"/>
+              </a:rPr>
+              <a:t>As cinco perguntas, respondidas</a:t>
+            </a:r>
+            <a:endParaRPr lang="en-US" sz="3200" dirty="0"/>
+          </a:p>
+        </p:txBody>
+      </p:sp>
+      <p:sp>
+        <p:nvSpPr>
+          <p:cNvPr id="4" name="Shape 2"/>
+          <p:cNvSpPr/>
+          <p:nvPr/>
+        </p:nvSpPr>
+        <p:spPr>
+          <a:xfrm>
+            <a:off x="548640" y="1600200"/>
+            <a:ext cx="11064240" cy="886968"/>
+          </a:xfrm>
+          <a:prstGeom prst="roundRect">
+            <a:avLst>
+              <a:gd name="adj" fmla="val 6186"/>
+            </a:avLst>
+          </a:prstGeom>
+          <a:solidFill>
+            <a:srgbClr val="EDF3F0"/>
+          </a:solidFill>
+          <a:ln w="12700">
+            <a:solidFill>
+              <a:srgbClr val="F2F6F4"/>
+            </a:solidFill>
+            <a:prstDash val="solid"/>
+          </a:ln>
+        </p:spPr>
+      </p:sp>
+      <p:sp>
+        <p:nvSpPr>
+          <p:cNvPr id="5" name="Text 3"/>
+          <p:cNvSpPr txBox="1"/>
+          <p:nvPr/>
+        </p:nvSpPr>
+        <p:spPr>
+          <a:xfrm>
+            <a:off x="777240" y="1691640"/>
+            <a:ext cx="4114800" cy="713232"/>
+          </a:xfrm>
+          <a:prstGeom prst="rect">
+            <a:avLst/>
+          </a:prstGeom>
+          <a:noFill/>
+          <a:ln/>
+        </p:spPr>
+        <p:txBody>
+          <a:bodyPr wrap="square" lIns="0" tIns="0" rIns="0" bIns="0" rtlCol="0" anchor="ctr"/>
+          <a:lstStyle/>
+          <a:p>
+            <a:pPr indent="0" marL="0">
+              <a:buNone/>
+            </a:pPr>
+            <a:r>
+              <a:rPr lang="en-US" sz="1300" b="1" dirty="0">
+                <a:solidFill>
+                  <a:srgbClr val="1B6B5A"/>
+                </a:solidFill>
+                <a:latin typeface="Calibri" pitchFamily="34" charset="0"/>
+                <a:ea typeface="Calibri" pitchFamily="34" charset="-122"/>
+                <a:cs typeface="Calibri" pitchFamily="34" charset="-120"/>
+              </a:rPr>
+              <a:t>Quais fatores mais impactam a alfabetização?</a:t>
+            </a:r>
+            <a:endParaRPr lang="en-US" sz="1300" dirty="0"/>
+          </a:p>
+        </p:txBody>
+      </p:sp>
+      <p:sp>
+        <p:nvSpPr>
+          <p:cNvPr id="6" name="Text 4"/>
+          <p:cNvSpPr txBox="1"/>
+          <p:nvPr/>
+        </p:nvSpPr>
+        <p:spPr>
+          <a:xfrm>
+            <a:off x="5120640" y="1691640"/>
+            <a:ext cx="6309360" cy="713232"/>
+          </a:xfrm>
+          <a:prstGeom prst="rect">
+            <a:avLst/>
+          </a:prstGeom>
+          <a:noFill/>
+          <a:ln/>
+        </p:spPr>
+        <p:txBody>
+          <a:bodyPr wrap="square" lIns="0" tIns="0" rIns="0" bIns="0" rtlCol="0" anchor="ctr"/>
+          <a:lstStyle/>
+          <a:p>
+            <a:pPr indent="0" marL="0">
+              <a:buNone/>
+            </a:pPr>
+            <a:r>
+              <a:rPr lang="en-US" sz="1250" dirty="0">
+                <a:solidFill>
+                  <a:srgbClr val="1A2B28"/>
+                </a:solidFill>
+                <a:latin typeface="Calibri" pitchFamily="34" charset="0"/>
+                <a:ea typeface="Calibri" pitchFamily="34" charset="-122"/>
+                <a:cs typeface="Calibri" pitchFamily="34" charset="-120"/>
+              </a:rPr>
+              <a:t>Onde a criança estuda. O desempenho do município no ano anterior é o fator mais forte.</a:t>
+            </a:r>
+            <a:endParaRPr lang="en-US" sz="1250" dirty="0"/>
+          </a:p>
+        </p:txBody>
+      </p:sp>
+      <p:sp>
+        <p:nvSpPr>
+          <p:cNvPr id="7" name="Shape 5"/>
+          <p:cNvSpPr/>
+          <p:nvPr/>
+        </p:nvSpPr>
+        <p:spPr>
+          <a:xfrm>
+            <a:off x="548640" y="2560320"/>
+            <a:ext cx="11064240" cy="886968"/>
+          </a:xfrm>
+          <a:prstGeom prst="roundRect">
+            <a:avLst>
+              <a:gd name="adj" fmla="val 6186"/>
+            </a:avLst>
+          </a:prstGeom>
+          <a:solidFill>
+            <a:srgbClr val="F2F6F4"/>
+          </a:solidFill>
+          <a:ln w="12700">
+            <a:solidFill>
+              <a:srgbClr val="F2F6F4"/>
+            </a:solidFill>
+            <a:prstDash val="solid"/>
+          </a:ln>
+        </p:spPr>
+      </p:sp>
+      <p:sp>
+        <p:nvSpPr>
+          <p:cNvPr id="8" name="Text 6"/>
+          <p:cNvSpPr txBox="1"/>
+          <p:nvPr/>
+        </p:nvSpPr>
+        <p:spPr>
+          <a:xfrm>
+            <a:off x="777240" y="2651760"/>
+            <a:ext cx="4114800" cy="713232"/>
+          </a:xfrm>
+          <a:prstGeom prst="rect">
+            <a:avLst/>
+          </a:prstGeom>
+          <a:noFill/>
+          <a:ln/>
+        </p:spPr>
+        <p:txBody>
+          <a:bodyPr wrap="square" lIns="0" tIns="0" rIns="0" bIns="0" rtlCol="0" anchor="ctr"/>
+          <a:lstStyle/>
+          <a:p>
+            <a:pPr indent="0" marL="0">
+              <a:buNone/>
+            </a:pPr>
+            <a:r>
+              <a:rPr lang="en-US" sz="1300" b="1" dirty="0">
+                <a:solidFill>
+                  <a:srgbClr val="1B6B5A"/>
+                </a:solidFill>
+                <a:latin typeface="Calibri" pitchFamily="34" charset="0"/>
+                <a:ea typeface="Calibri" pitchFamily="34" charset="-122"/>
+                <a:cs typeface="Calibri" pitchFamily="34" charset="-120"/>
+              </a:rPr>
+              <a:t>Quais variáveis influenciam mais o modelo?</a:t>
+            </a:r>
+            <a:endParaRPr lang="en-US" sz="1300" dirty="0"/>
+          </a:p>
+        </p:txBody>
+      </p:sp>
+      <p:sp>
+        <p:nvSpPr>
+          <p:cNvPr id="9" name="Text 7"/>
+          <p:cNvSpPr txBox="1"/>
+          <p:nvPr/>
+        </p:nvSpPr>
+        <p:spPr>
+          <a:xfrm>
+            <a:off x="5120640" y="2651760"/>
+            <a:ext cx="6309360" cy="713232"/>
+          </a:xfrm>
+          <a:prstGeom prst="rect">
+            <a:avLst/>
+          </a:prstGeom>
+          <a:noFill/>
+          <a:ln/>
+        </p:spPr>
+        <p:txBody>
+          <a:bodyPr wrap="square" lIns="0" tIns="0" rIns="0" bIns="0" rtlCol="0" anchor="ctr"/>
+          <a:lstStyle/>
+          <a:p>
+            <a:pPr indent="0" marL="0">
+              <a:buNone/>
+            </a:pPr>
+            <a:r>
+              <a:rPr lang="en-US" sz="1250" dirty="0">
+                <a:solidFill>
+                  <a:srgbClr val="1A2B28"/>
+                </a:solidFill>
+                <a:latin typeface="Calibri" pitchFamily="34" charset="0"/>
+                <a:ea typeface="Calibri" pitchFamily="34" charset="-122"/>
+                <a:cs typeface="Calibri" pitchFamily="34" charset="-120"/>
+              </a:rPr>
+              <a:t>As cinco maiores são todas de território. O que descreve o aluno quase não pesa.</a:t>
+            </a:r>
+            <a:endParaRPr lang="en-US" sz="1250" dirty="0"/>
+          </a:p>
+        </p:txBody>
+      </p:sp>
+      <p:sp>
+        <p:nvSpPr>
+          <p:cNvPr id="10" name="Shape 8"/>
+          <p:cNvSpPr/>
+          <p:nvPr/>
+        </p:nvSpPr>
+        <p:spPr>
+          <a:xfrm>
+            <a:off x="548640" y="3520440"/>
+            <a:ext cx="11064240" cy="886968"/>
+          </a:xfrm>
+          <a:prstGeom prst="roundRect">
+            <a:avLst>
+              <a:gd name="adj" fmla="val 6186"/>
+            </a:avLst>
+          </a:prstGeom>
+          <a:solidFill>
+            <a:srgbClr val="EDF3F0"/>
+          </a:solidFill>
+          <a:ln w="12700">
+            <a:solidFill>
+              <a:srgbClr val="F2F6F4"/>
+            </a:solidFill>
+            <a:prstDash val="solid"/>
+          </a:ln>
+        </p:spPr>
+      </p:sp>
+      <p:sp>
+        <p:nvSpPr>
+          <p:cNvPr id="11" name="Text 9"/>
+          <p:cNvSpPr txBox="1"/>
+          <p:nvPr/>
+        </p:nvSpPr>
+        <p:spPr>
+          <a:xfrm>
+            <a:off x="777240" y="3611880"/>
+            <a:ext cx="4114800" cy="713232"/>
+          </a:xfrm>
+          <a:prstGeom prst="rect">
+            <a:avLst/>
+          </a:prstGeom>
+          <a:noFill/>
+          <a:ln/>
+        </p:spPr>
+        <p:txBody>
+          <a:bodyPr wrap="square" lIns="0" tIns="0" rIns="0" bIns="0" rtlCol="0" anchor="ctr"/>
+          <a:lstStyle/>
+          <a:p>
+            <a:pPr indent="0" marL="0">
+              <a:buNone/>
+            </a:pPr>
+            <a:r>
+              <a:rPr lang="en-US" sz="1300" b="1" dirty="0">
+                <a:solidFill>
+                  <a:srgbClr val="1B6B5A"/>
+                </a:solidFill>
+                <a:latin typeface="Calibri" pitchFamily="34" charset="0"/>
+                <a:ea typeface="Calibri" pitchFamily="34" charset="-122"/>
+                <a:cs typeface="Calibri" pitchFamily="34" charset="-120"/>
+              </a:rPr>
+              <a:t>Quais municípios apresentam maior risco?</a:t>
+            </a:r>
+            <a:endParaRPr lang="en-US" sz="1300" dirty="0"/>
+          </a:p>
+        </p:txBody>
+      </p:sp>
+      <p:sp>
+        <p:nvSpPr>
+          <p:cNvPr id="12" name="Text 10"/>
+          <p:cNvSpPr txBox="1"/>
+          <p:nvPr/>
+        </p:nvSpPr>
+        <p:spPr>
+          <a:xfrm>
+            <a:off x="5120640" y="3611880"/>
+            <a:ext cx="6309360" cy="713232"/>
+          </a:xfrm>
+          <a:prstGeom prst="rect">
+            <a:avLst/>
+          </a:prstGeom>
+          <a:noFill/>
+          <a:ln/>
+        </p:spPr>
+        <p:txBody>
+          <a:bodyPr wrap="square" lIns="0" tIns="0" rIns="0" bIns="0" rtlCol="0" anchor="ctr"/>
+          <a:lstStyle/>
+          <a:p>
+            <a:pPr indent="0" marL="0">
+              <a:buNone/>
+            </a:pPr>
+            <a:r>
+              <a:rPr lang="en-US" sz="1250" dirty="0">
+                <a:solidFill>
+                  <a:srgbClr val="1A2B28"/>
+                </a:solidFill>
+                <a:latin typeface="Calibri" pitchFamily="34" charset="0"/>
+                <a:ea typeface="Calibri" pitchFamily="34" charset="-122"/>
+                <a:cs typeface="Calibri" pitchFamily="34" charset="-120"/>
+              </a:rPr>
+              <a:t>Os 1.028 com a menor taxa prevista. Quase 90% ficam no Nordeste e no Norte.</a:t>
+            </a:r>
+            <a:endParaRPr lang="en-US" sz="1250" dirty="0"/>
+          </a:p>
+        </p:txBody>
+      </p:sp>
+      <p:sp>
+        <p:nvSpPr>
+          <p:cNvPr id="13" name="Shape 11"/>
+          <p:cNvSpPr/>
+          <p:nvPr/>
+        </p:nvSpPr>
+        <p:spPr>
+          <a:xfrm>
+            <a:off x="548640" y="4480560"/>
+            <a:ext cx="11064240" cy="886968"/>
+          </a:xfrm>
+          <a:prstGeom prst="roundRect">
+            <a:avLst>
+              <a:gd name="adj" fmla="val 6186"/>
+            </a:avLst>
+          </a:prstGeom>
+          <a:solidFill>
+            <a:srgbClr val="F2F6F4"/>
+          </a:solidFill>
+          <a:ln w="12700">
+            <a:solidFill>
+              <a:srgbClr val="F2F6F4"/>
+            </a:solidFill>
+            <a:prstDash val="solid"/>
+          </a:ln>
+        </p:spPr>
+      </p:sp>
+      <p:sp>
+        <p:nvSpPr>
+          <p:cNvPr id="14" name="Text 12"/>
+          <p:cNvSpPr txBox="1"/>
+          <p:nvPr/>
+        </p:nvSpPr>
+        <p:spPr>
+          <a:xfrm>
+            <a:off x="777240" y="4572000"/>
+            <a:ext cx="4114800" cy="713232"/>
+          </a:xfrm>
+          <a:prstGeom prst="rect">
+            <a:avLst/>
+          </a:prstGeom>
+          <a:noFill/>
+          <a:ln/>
+        </p:spPr>
+        <p:txBody>
+          <a:bodyPr wrap="square" lIns="0" tIns="0" rIns="0" bIns="0" rtlCol="0" anchor="ctr"/>
+          <a:lstStyle/>
+          <a:p>
+            <a:pPr indent="0" marL="0">
+              <a:buNone/>
+            </a:pPr>
+            <a:r>
+              <a:rPr lang="en-US" sz="1300" b="1" dirty="0">
+                <a:solidFill>
+                  <a:srgbClr val="1B6B5A"/>
+                </a:solidFill>
+                <a:latin typeface="Calibri" pitchFamily="34" charset="0"/>
+                <a:ea typeface="Calibri" pitchFamily="34" charset="-122"/>
+                <a:cs typeface="Calibri" pitchFamily="34" charset="-120"/>
+              </a:rPr>
+              <a:t>Quais regiões têm padrões semelhantes?</a:t>
+            </a:r>
+            <a:endParaRPr lang="en-US" sz="1300" dirty="0"/>
+          </a:p>
+        </p:txBody>
+      </p:sp>
+      <p:sp>
+        <p:nvSpPr>
+          <p:cNvPr id="15" name="Text 13"/>
+          <p:cNvSpPr txBox="1"/>
+          <p:nvPr/>
+        </p:nvSpPr>
+        <p:spPr>
+          <a:xfrm>
+            <a:off x="5120640" y="4572000"/>
+            <a:ext cx="6309360" cy="713232"/>
+          </a:xfrm>
+          <a:prstGeom prst="rect">
+            <a:avLst/>
+          </a:prstGeom>
+          <a:noFill/>
+          <a:ln/>
+        </p:spPr>
+        <p:txBody>
+          <a:bodyPr wrap="square" lIns="0" tIns="0" rIns="0" bIns="0" rtlCol="0" anchor="ctr"/>
+          <a:lstStyle/>
+          <a:p>
+            <a:pPr indent="0" marL="0">
+              <a:buNone/>
+            </a:pPr>
+            <a:r>
+              <a:rPr lang="en-US" sz="1250" dirty="0">
+                <a:solidFill>
+                  <a:srgbClr val="1A2B28"/>
+                </a:solidFill>
+                <a:latin typeface="Calibri" pitchFamily="34" charset="0"/>
+                <a:ea typeface="Calibri" pitchFamily="34" charset="-122"/>
+                <a:cs typeface="Calibri" pitchFamily="34" charset="-120"/>
+              </a:rPr>
+              <a:t>Os municípios formam quatro perfis. Dois têm a mesma renda e taxas de 47% e 74%.</a:t>
+            </a:r>
+            <a:endParaRPr lang="en-US" sz="1250" dirty="0"/>
+          </a:p>
+        </p:txBody>
+      </p:sp>
+      <p:sp>
+        <p:nvSpPr>
+          <p:cNvPr id="16" name="Shape 14"/>
+          <p:cNvSpPr/>
+          <p:nvPr/>
+        </p:nvSpPr>
+        <p:spPr>
+          <a:xfrm>
+            <a:off x="548640" y="5440680"/>
+            <a:ext cx="11064240" cy="886968"/>
+          </a:xfrm>
+          <a:prstGeom prst="roundRect">
+            <a:avLst>
+              <a:gd name="adj" fmla="val 6186"/>
+            </a:avLst>
+          </a:prstGeom>
+          <a:solidFill>
+            <a:srgbClr val="EDF3F0"/>
+          </a:solidFill>
+          <a:ln w="12700">
+            <a:solidFill>
+              <a:srgbClr val="F2F6F4"/>
+            </a:solidFill>
+            <a:prstDash val="solid"/>
+          </a:ln>
+        </p:spPr>
+      </p:sp>
+      <p:sp>
+        <p:nvSpPr>
+          <p:cNvPr id="17" name="Text 15"/>
+          <p:cNvSpPr txBox="1"/>
+          <p:nvPr/>
+        </p:nvSpPr>
+        <p:spPr>
+          <a:xfrm>
+            <a:off x="777240" y="5532120"/>
+            <a:ext cx="4114800" cy="713232"/>
+          </a:xfrm>
+          <a:prstGeom prst="rect">
+            <a:avLst/>
+          </a:prstGeom>
+          <a:noFill/>
+          <a:ln/>
+        </p:spPr>
+        <p:txBody>
+          <a:bodyPr wrap="square" lIns="0" tIns="0" rIns="0" bIns="0" rtlCol="0" anchor="ctr"/>
+          <a:lstStyle/>
+          <a:p>
+            <a:pPr indent="0" marL="0">
+              <a:buNone/>
+            </a:pPr>
+            <a:r>
+              <a:rPr lang="en-US" sz="1300" b="1" dirty="0">
+                <a:solidFill>
+                  <a:srgbClr val="1B6B5A"/>
+                </a:solidFill>
+                <a:latin typeface="Calibri" pitchFamily="34" charset="0"/>
+                <a:ea typeface="Calibri" pitchFamily="34" charset="-122"/>
+                <a:cs typeface="Calibri" pitchFamily="34" charset="-120"/>
+              </a:rPr>
+              <a:t>Como prever quem não atinge a meta de 2030?</a:t>
+            </a:r>
+            <a:endParaRPr lang="en-US" sz="1300" dirty="0"/>
+          </a:p>
+        </p:txBody>
+      </p:sp>
+      <p:sp>
+        <p:nvSpPr>
+          <p:cNvPr id="18" name="Text 16"/>
+          <p:cNvSpPr txBox="1"/>
+          <p:nvPr/>
+        </p:nvSpPr>
+        <p:spPr>
+          <a:xfrm>
+            <a:off x="5120640" y="5532120"/>
+            <a:ext cx="6309360" cy="713232"/>
+          </a:xfrm>
+          <a:prstGeom prst="rect">
+            <a:avLst/>
+          </a:prstGeom>
+          <a:noFill/>
+          <a:ln/>
+        </p:spPr>
+        <p:txBody>
+          <a:bodyPr wrap="square" lIns="0" tIns="0" rIns="0" bIns="0" rtlCol="0" anchor="ctr"/>
+          <a:lstStyle/>
+          <a:p>
+            <a:pPr indent="0" marL="0">
+              <a:buNone/>
+            </a:pPr>
+            <a:r>
+              <a:rPr lang="en-US" sz="1250" dirty="0">
+                <a:solidFill>
+                  <a:srgbClr val="1A2B28"/>
+                </a:solidFill>
+                <a:latin typeface="Calibri" pitchFamily="34" charset="0"/>
+                <a:ea typeface="Calibri" pitchFamily="34" charset="-122"/>
+                <a:cs typeface="Calibri" pitchFamily="34" charset="-120"/>
+              </a:rPr>
+              <a:t>Comparando o avanço de cada ano com o necessário. O país sobe 2,68 pontos ao ano e a meta pede 2,76.</a:t>
+            </a:r>
+            <a:endParaRPr lang="en-US" sz="1250" dirty="0"/>
+          </a:p>
+        </p:txBody>
+      </p:sp>
+    </p:spTree>
+  </p:cSld>
+  <p:clrMapOvr>
+    <a:masterClrMapping/>
+  </p:clrMapOvr>
+</p:sld>
+</file>
+
+<file path=ppt/slides/slide12.xml><?xml version="1.0" encoding="utf-8"?>
+<p:sld xmlns:a="http://schemas.openxmlformats.org/drawingml/2006/main" xmlns:r="http://schemas.openxmlformats.org/officeDocument/2006/relationships" xmlns:p="http://schemas.openxmlformats.org/presentationml/2006/main">
+  <p:cSld name="Slide 12">
     <p:bg>
       <p:bgPr>
         <a:solidFill>
@@ -4958,7 +5313,7 @@
                 <a:ea typeface="Calibri" pitchFamily="34" charset="-122"/>
                 <a:cs typeface="Calibri" pitchFamily="34" charset="-120"/>
               </a:rPr>
-              <a:t>Para prever uma criança, o modelo é fraco.</a:t>
+              <a:t>Esse teto não torna o modelo inútil. Muda a pergunta que ele responde bem.</a:t>
             </a:r>
             <a:endParaRPr lang="en-US" sz="1500" dirty="0"/>
           </a:p>
@@ -4987,7 +5342,7 @@
                 <a:ea typeface="Calibri" pitchFamily="34" charset="-122"/>
                 <a:cs typeface="Calibri" pitchFamily="34" charset="-120"/>
               </a:rPr>
-              <a:t>Mas quando somo as previsões de cada município, a correlação com o resultado real chega a 0,83.</a:t>
+              <a:t>Para prever uma criança, ele é fraco. Mas quando somo as previsões de cada município, a correlação com o resultado real chega a 0,83.</a:t>
             </a:r>
             <a:endParaRPr lang="en-US" sz="1500" dirty="0"/>
           </a:p>
@@ -5492,7 +5847,7 @@
         <p:spPr>
           <a:xfrm>
             <a:off x="548640" y="1600200"/>
-            <a:ext cx="6309360" cy="4206240"/>
+            <a:ext cx="4572000" cy="4206240"/>
           </a:xfrm>
           <a:prstGeom prst="rect">
             <a:avLst/>
@@ -5519,7 +5874,7 @@
                 <a:ea typeface="Calibri" pitchFamily="34" charset="-122"/>
                 <a:cs typeface="Calibri" pitchFamily="34" charset="-120"/>
               </a:rPr>
-              <a:t>Agrupei os municípios por perfil. Dois grupos têm exatamente a mesma renda por habitante.</a:t>
+              <a:t>Agrupei os municípios por perfil, sem usar o resultado.</a:t>
             </a:r>
             <a:endParaRPr lang="en-US" sz="1500" dirty="0"/>
           </a:p>
@@ -5548,6 +5903,35 @@
                 <a:ea typeface="Calibri" pitchFamily="34" charset="-122"/>
                 <a:cs typeface="Calibri" pitchFamily="34" charset="-120"/>
               </a:rPr>
+              <a:t>Dois grupos caíram na mesma faixa de renda: cerca de 15 mil reais por habitante.</a:t>
+            </a:r>
+            <a:endParaRPr lang="en-US" sz="1500" dirty="0"/>
+          </a:p>
+          <a:p>
+            <a:pPr indent="0" marL="0">
+              <a:lnSpc>
+                <a:spcPct val="132000"/>
+              </a:lnSpc>
+              <a:buNone/>
+            </a:pPr>
+            <a:endParaRPr lang="en-US" sz="1500" dirty="0"/>
+          </a:p>
+          <a:p>
+            <a:pPr indent="0" marL="0">
+              <a:lnSpc>
+                <a:spcPct val="132000"/>
+              </a:lnSpc>
+              <a:buNone/>
+            </a:pPr>
+            <a:r>
+              <a:rPr lang="en-US" sz="1500" dirty="0">
+                <a:solidFill>
+                  <a:srgbClr val="1A2B28"/>
+                </a:solidFill>
+                <a:latin typeface="Calibri" pitchFamily="34" charset="0"/>
+                <a:ea typeface="Calibri" pitchFamily="34" charset="-122"/>
+                <a:cs typeface="Calibri" pitchFamily="34" charset="-120"/>
+              </a:rPr>
               <a:t>Um alfabetiza 47% das crianças. O outro, 74%.</a:t>
             </a:r>
             <a:endParaRPr lang="en-US" sz="1500" dirty="0"/>
@@ -5577,49 +5961,46 @@
                 <a:ea typeface="Calibri" pitchFamily="34" charset="-122"/>
                 <a:cs typeface="Calibri" pitchFamily="34" charset="-120"/>
               </a:rPr>
-              <a:t>São 1.351 municípios pobres acima da média nacional. A renda não decide o resultado, e vale investigar o que esses municípios fazem de diferente.</a:t>
+              <a:t>São 1.351 municípios pobres acima da média nacional. A renda não decide o resultado.</a:t>
             </a:r>
             <a:endParaRPr lang="en-US" sz="1500" dirty="0"/>
           </a:p>
         </p:txBody>
       </p:sp>
-      <p:sp>
-        <p:nvSpPr>
-          <p:cNvPr id="5" name="Shape 3"/>
-          <p:cNvSpPr/>
-          <p:nvPr/>
-        </p:nvSpPr>
-        <p:spPr>
-          <a:xfrm>
-            <a:off x="7406640" y="1737360"/>
-            <a:ext cx="2011680" cy="1828800"/>
-          </a:xfrm>
-          <a:prstGeom prst="roundRect">
-            <a:avLst>
-              <a:gd name="adj" fmla="val 4000"/>
-            </a:avLst>
-          </a:prstGeom>
-          <a:solidFill>
-            <a:srgbClr val="F2F6F4"/>
-          </a:solidFill>
-          <a:ln w="12700">
-            <a:solidFill>
-              <a:srgbClr val="F2F6F4"/>
-            </a:solidFill>
-            <a:prstDash val="solid"/>
-          </a:ln>
-        </p:spPr>
-      </p:sp>
-      <p:sp>
-        <p:nvSpPr>
-          <p:cNvPr id="6" name="Text 4"/>
-          <p:cNvSpPr txBox="1"/>
-          <p:nvPr/>
-        </p:nvSpPr>
-        <p:spPr>
-          <a:xfrm>
-            <a:off x="7543800" y="1901952"/>
-            <a:ext cx="1737360" cy="868680"/>
+      <p:pic>
+        <p:nvPicPr>
+          <p:cNvPr id="5" name="Image 0" descr="/Users/thiago/Documents/ARQUIVOS PÓS/FASE 3/tech-challenge-fase3/images/18_renda_x_desempenho.png">    </p:cNvPr>
+          <p:cNvPicPr>
+            <a:picLocks noChangeAspect="1"/>
+          </p:cNvPicPr>
+          <p:nvPr/>
+        </p:nvPicPr>
+        <p:blipFill>
+          <a:blip r:embed="rId1"/>
+          <a:stretch>
+            <a:fillRect/>
+          </a:stretch>
+        </p:blipFill>
+        <p:spPr>
+          <a:xfrm>
+            <a:off x="5486400" y="1783080"/>
+            <a:ext cx="6309360" cy="3968496"/>
+          </a:xfrm>
+          <a:prstGeom prst="rect">
+            <a:avLst/>
+          </a:prstGeom>
+        </p:spPr>
+      </p:pic>
+      <p:sp>
+        <p:nvSpPr>
+          <p:cNvPr id="6" name="Text 3"/>
+          <p:cNvSpPr txBox="1"/>
+          <p:nvPr/>
+        </p:nvSpPr>
+        <p:spPr>
+          <a:xfrm>
+            <a:off x="5486400" y="5797296"/>
+            <a:ext cx="6309360" cy="292608"/>
           </a:xfrm>
           <a:prstGeom prst="rect">
             <a:avLst/>
@@ -5631,53 +6012,11 @@
           <a:bodyPr wrap="square" lIns="0" tIns="0" rIns="0" bIns="0" rtlCol="0" anchor="ctr"/>
           <a:lstStyle/>
           <a:p>
-            <a:pPr indent="0" marL="0">
-              <a:buNone/>
-            </a:pPr>
-            <a:r>
-              <a:rPr lang="en-US" sz="3200" b="1" dirty="0">
-                <a:solidFill>
-                  <a:srgbClr val="C0504D"/>
-                </a:solidFill>
-                <a:latin typeface="Calibri" pitchFamily="34" charset="0"/>
-                <a:ea typeface="Calibri" pitchFamily="34" charset="-122"/>
-                <a:cs typeface="Calibri" pitchFamily="34" charset="-120"/>
-              </a:rPr>
-              <a:t>47,3%</a:t>
-            </a:r>
-            <a:endParaRPr lang="en-US" sz="3200" dirty="0"/>
-          </a:p>
-        </p:txBody>
-      </p:sp>
-      <p:sp>
-        <p:nvSpPr>
-          <p:cNvPr id="7" name="Text 5"/>
-          <p:cNvSpPr txBox="1"/>
-          <p:nvPr/>
-        </p:nvSpPr>
-        <p:spPr>
-          <a:xfrm>
-            <a:off x="7543800" y="2697480"/>
-            <a:ext cx="1737360" cy="640080"/>
-          </a:xfrm>
-          <a:prstGeom prst="rect">
-            <a:avLst/>
-          </a:prstGeom>
-          <a:noFill/>
-          <a:ln/>
-        </p:spPr>
-        <p:txBody>
-          <a:bodyPr wrap="square" lIns="0" tIns="0" rIns="0" bIns="0" rtlCol="0" anchor="ctr"/>
-          <a:lstStyle/>
-          <a:p>
-            <a:pPr indent="0" marL="0">
-              <a:lnSpc>
-                <a:spcPct val="110000"/>
-              </a:lnSpc>
-              <a:buNone/>
-            </a:pPr>
-            <a:r>
-              <a:rPr lang="en-US" sz="1150" dirty="0">
+            <a:pPr algn="ctr" indent="0" marL="0">
+              <a:buNone/>
+            </a:pPr>
+            <a:r>
+              <a:rPr lang="en-US" sz="1050" i="1" dirty="0">
                 <a:solidFill>
                   <a:srgbClr val="6B7C77"/>
                 </a:solidFill>
@@ -5685,265 +6024,9 @@
                 <a:ea typeface="Calibri" pitchFamily="34" charset="-122"/>
                 <a:cs typeface="Calibri" pitchFamily="34" charset="-120"/>
               </a:rPr>
-              <a:t>baixa renda,</a:t>
-            </a:r>
-            <a:endParaRPr lang="en-US" sz="1150" dirty="0"/>
-          </a:p>
-          <a:p>
-            <a:pPr indent="0" marL="0">
-              <a:lnSpc>
-                <a:spcPct val="110000"/>
-              </a:lnSpc>
-              <a:buNone/>
-            </a:pPr>
-            <a:r>
-              <a:rPr lang="en-US" sz="1150" dirty="0">
-                <a:solidFill>
-                  <a:srgbClr val="6B7C77"/>
-                </a:solidFill>
-                <a:latin typeface="Calibri" pitchFamily="34" charset="0"/>
-                <a:ea typeface="Calibri" pitchFamily="34" charset="-122"/>
-                <a:cs typeface="Calibri" pitchFamily="34" charset="-120"/>
-              </a:rPr>
-              <a:t>desempenho crítico</a:t>
-            </a:r>
-            <a:endParaRPr lang="en-US" sz="1150" dirty="0"/>
-          </a:p>
-        </p:txBody>
-      </p:sp>
-      <p:sp>
-        <p:nvSpPr>
-          <p:cNvPr id="8" name="Shape 6"/>
-          <p:cNvSpPr/>
-          <p:nvPr/>
-        </p:nvSpPr>
-        <p:spPr>
-          <a:xfrm>
-            <a:off x="9601200" y="1737360"/>
-            <a:ext cx="2011680" cy="1828800"/>
-          </a:xfrm>
-          <a:prstGeom prst="roundRect">
-            <a:avLst>
-              <a:gd name="adj" fmla="val 4000"/>
-            </a:avLst>
-          </a:prstGeom>
-          <a:solidFill>
-            <a:srgbClr val="F2F6F4"/>
-          </a:solidFill>
-          <a:ln w="12700">
-            <a:solidFill>
-              <a:srgbClr val="F2F6F4"/>
-            </a:solidFill>
-            <a:prstDash val="solid"/>
-          </a:ln>
-        </p:spPr>
-      </p:sp>
-      <p:sp>
-        <p:nvSpPr>
-          <p:cNvPr id="9" name="Text 7"/>
-          <p:cNvSpPr txBox="1"/>
-          <p:nvPr/>
-        </p:nvSpPr>
-        <p:spPr>
-          <a:xfrm>
-            <a:off x="9738360" y="1901952"/>
-            <a:ext cx="1737360" cy="868680"/>
-          </a:xfrm>
-          <a:prstGeom prst="rect">
-            <a:avLst/>
-          </a:prstGeom>
-          <a:noFill/>
-          <a:ln/>
-        </p:spPr>
-        <p:txBody>
-          <a:bodyPr wrap="square" lIns="0" tIns="0" rIns="0" bIns="0" rtlCol="0" anchor="ctr"/>
-          <a:lstStyle/>
-          <a:p>
-            <a:pPr indent="0" marL="0">
-              <a:buNone/>
-            </a:pPr>
-            <a:r>
-              <a:rPr lang="en-US" sz="3200" b="1" dirty="0">
-                <a:solidFill>
-                  <a:srgbClr val="1B6B5A"/>
-                </a:solidFill>
-                <a:latin typeface="Calibri" pitchFamily="34" charset="0"/>
-                <a:ea typeface="Calibri" pitchFamily="34" charset="-122"/>
-                <a:cs typeface="Calibri" pitchFamily="34" charset="-120"/>
-              </a:rPr>
-              <a:t>74,0%</a:t>
-            </a:r>
-            <a:endParaRPr lang="en-US" sz="3200" dirty="0"/>
-          </a:p>
-        </p:txBody>
-      </p:sp>
-      <p:sp>
-        <p:nvSpPr>
-          <p:cNvPr id="10" name="Text 8"/>
-          <p:cNvSpPr txBox="1"/>
-          <p:nvPr/>
-        </p:nvSpPr>
-        <p:spPr>
-          <a:xfrm>
-            <a:off x="9738360" y="2697480"/>
-            <a:ext cx="1737360" cy="640080"/>
-          </a:xfrm>
-          <a:prstGeom prst="rect">
-            <a:avLst/>
-          </a:prstGeom>
-          <a:noFill/>
-          <a:ln/>
-        </p:spPr>
-        <p:txBody>
-          <a:bodyPr wrap="square" lIns="0" tIns="0" rIns="0" bIns="0" rtlCol="0" anchor="ctr"/>
-          <a:lstStyle/>
-          <a:p>
-            <a:pPr indent="0" marL="0">
-              <a:lnSpc>
-                <a:spcPct val="110000"/>
-              </a:lnSpc>
-              <a:buNone/>
-            </a:pPr>
-            <a:r>
-              <a:rPr lang="en-US" sz="1150" dirty="0">
-                <a:solidFill>
-                  <a:srgbClr val="6B7C77"/>
-                </a:solidFill>
-                <a:latin typeface="Calibri" pitchFamily="34" charset="0"/>
-                <a:ea typeface="Calibri" pitchFamily="34" charset="-122"/>
-                <a:cs typeface="Calibri" pitchFamily="34" charset="-120"/>
-              </a:rPr>
-              <a:t>baixa renda,</a:t>
-            </a:r>
-            <a:endParaRPr lang="en-US" sz="1150" dirty="0"/>
-          </a:p>
-          <a:p>
-            <a:pPr indent="0" marL="0">
-              <a:lnSpc>
-                <a:spcPct val="110000"/>
-              </a:lnSpc>
-              <a:buNone/>
-            </a:pPr>
-            <a:r>
-              <a:rPr lang="en-US" sz="1150" dirty="0">
-                <a:solidFill>
-                  <a:srgbClr val="6B7C77"/>
-                </a:solidFill>
-                <a:latin typeface="Calibri" pitchFamily="34" charset="0"/>
-                <a:ea typeface="Calibri" pitchFamily="34" charset="-122"/>
-                <a:cs typeface="Calibri" pitchFamily="34" charset="-120"/>
-              </a:rPr>
-              <a:t>bom desempenho</a:t>
-            </a:r>
-            <a:endParaRPr lang="en-US" sz="1150" dirty="0"/>
-          </a:p>
-        </p:txBody>
-      </p:sp>
-      <p:sp>
-        <p:nvSpPr>
-          <p:cNvPr id="11" name="Shape 9"/>
-          <p:cNvSpPr/>
-          <p:nvPr/>
-        </p:nvSpPr>
-        <p:spPr>
-          <a:xfrm>
-            <a:off x="7406640" y="3840480"/>
-            <a:ext cx="4206240" cy="1554480"/>
-          </a:xfrm>
-          <a:prstGeom prst="roundRect">
-            <a:avLst>
-              <a:gd name="adj" fmla="val 4706"/>
-            </a:avLst>
-          </a:prstGeom>
-          <a:solidFill>
-            <a:srgbClr val="F2F6F4"/>
-          </a:solidFill>
-          <a:ln w="12700">
-            <a:solidFill>
-              <a:srgbClr val="F2F6F4"/>
-            </a:solidFill>
-            <a:prstDash val="solid"/>
-          </a:ln>
-        </p:spPr>
-      </p:sp>
-      <p:sp>
-        <p:nvSpPr>
-          <p:cNvPr id="12" name="Text 10"/>
-          <p:cNvSpPr txBox="1"/>
-          <p:nvPr/>
-        </p:nvSpPr>
-        <p:spPr>
-          <a:xfrm>
-            <a:off x="7543800" y="4005072"/>
-            <a:ext cx="3931920" cy="868680"/>
-          </a:xfrm>
-          <a:prstGeom prst="rect">
-            <a:avLst/>
-          </a:prstGeom>
-          <a:noFill/>
-          <a:ln/>
-        </p:spPr>
-        <p:txBody>
-          <a:bodyPr wrap="square" lIns="0" tIns="0" rIns="0" bIns="0" rtlCol="0" anchor="ctr"/>
-          <a:lstStyle/>
-          <a:p>
-            <a:pPr indent="0" marL="0">
-              <a:buNone/>
-            </a:pPr>
-            <a:r>
-              <a:rPr lang="en-US" sz="3200" b="1" dirty="0">
-                <a:solidFill>
-                  <a:srgbClr val="E8A33D"/>
-                </a:solidFill>
-                <a:latin typeface="Calibri" pitchFamily="34" charset="0"/>
-                <a:ea typeface="Calibri" pitchFamily="34" charset="-122"/>
-                <a:cs typeface="Calibri" pitchFamily="34" charset="-120"/>
-              </a:rPr>
-              <a:t>R$ 16,6 mil</a:t>
-            </a:r>
-            <a:endParaRPr lang="en-US" sz="3200" dirty="0"/>
-          </a:p>
-        </p:txBody>
-      </p:sp>
-      <p:sp>
-        <p:nvSpPr>
-          <p:cNvPr id="13" name="Text 11"/>
-          <p:cNvSpPr txBox="1"/>
-          <p:nvPr/>
-        </p:nvSpPr>
-        <p:spPr>
-          <a:xfrm>
-            <a:off x="7543800" y="4800600"/>
-            <a:ext cx="3931920" cy="640080"/>
-          </a:xfrm>
-          <a:prstGeom prst="rect">
-            <a:avLst/>
-          </a:prstGeom>
-          <a:noFill/>
-          <a:ln/>
-        </p:spPr>
-        <p:txBody>
-          <a:bodyPr wrap="square" lIns="0" tIns="0" rIns="0" bIns="0" rtlCol="0" anchor="ctr"/>
-          <a:lstStyle/>
-          <a:p>
-            <a:pPr indent="0" marL="0">
-              <a:lnSpc>
-                <a:spcPct val="110000"/>
-              </a:lnSpc>
-              <a:buNone/>
-            </a:pPr>
-            <a:r>
-              <a:rPr lang="en-US" sz="1150" dirty="0">
-                <a:solidFill>
-                  <a:srgbClr val="6B7C77"/>
-                </a:solidFill>
-                <a:latin typeface="Calibri" pitchFamily="34" charset="0"/>
-                <a:ea typeface="Calibri" pitchFamily="34" charset="-122"/>
-                <a:cs typeface="Calibri" pitchFamily="34" charset="-120"/>
-              </a:rPr>
-              <a:t>o mesmo PIB per capita nos dois grupos</a:t>
-            </a:r>
-            <a:endParaRPr lang="en-US" sz="1150" dirty="0"/>
+              <a:t>Cada ponto é um município. Os cinzas são os outros dois perfis.</a:t>
+            </a:r>
+            <a:endParaRPr lang="en-US" sz="1050" dirty="0"/>
           </a:p>
         </p:txBody>
       </p:sp>
